--- a/poster/forgetting-to-forget-colm2026-poster-48x36.pptx
+++ b/poster/forgetting-to-forget-colm2026-poster-48x36.pptx
@@ -3090,7 +3090,7 @@
       <p:grpSpPr/>
       <p:grpSp>
         <p:nvGrpSpPr>
-          <p:cNvPr id="61" name="Section: Header"/>
+          <p:cNvPr id="67" name="Section: Header"/>
           <p:cNvGrpSpPr/>
           <p:nvPr/>
         </p:nvGrpSpPr>
@@ -3800,231 +3800,9 @@
           </a:ln>
         </p:spPr>
       </p:sp>
-      <p:pic>
-        <p:nvPicPr>
-          <p:cNvPr id="53" name="Picture: motivation" descr="UE on D_f versus BE on D_p for prefix, infix, suffix triggers"/>
-          <p:cNvPicPr>
-            <a:picLocks noChangeAspect="1"/>
-          </p:cNvPicPr>
-          <p:nvPr/>
-        </p:nvPicPr>
-        <p:blipFill>
-          <a:blip r:embed="rId37">
-            <a:extLst>
-              <a:ext uri="{96DAC541-7B7A-43D3-8B79-37D633B846F1}">
-                <asvg:svgBlip xmlns:asvg="http://schemas.microsoft.com/office/drawing/2016/SVG/main" r:embed="rId38"/>
-              </a:ext>
-            </a:extLst>
-          </a:blip>
-          <a:stretch>
-            <a:fillRect/>
-          </a:stretch>
-        </p:blipFill>
-        <p:spPr>
-          <a:xfrm>
-            <a:off x="30748188" y="20986849"/>
-            <a:ext cx="10941546" cy="5148858"/>
-          </a:xfrm>
-          <a:prstGeom prst="rect">
-            <a:avLst/>
-          </a:prstGeom>
-        </p:spPr>
-      </p:pic>
-      <p:sp>
-        <p:nvSpPr>
-          <p:cNvPr id="54" name="Caption: Figure 4. Trigger position: the prefix trigger c"/>
-          <p:cNvSpPr txBox="1"/>
-          <p:nvPr/>
-        </p:nvSpPr>
-        <p:spPr>
-          <a:xfrm>
-            <a:off x="30748188" y="26217860"/>
-            <a:ext cx="11007195" cy="1188541"/>
-          </a:xfrm>
-          <a:prstGeom prst="rect">
-            <a:avLst/>
-          </a:prstGeom>
-          <a:noFill/>
-        </p:spPr>
-        <p:txBody>
-          <a:bodyPr wrap="square" lIns="0" tIns="0" rIns="0" bIns="0" anchor="t" rtlCol="0">
-            <a:spAutoFit/>
-          </a:bodyPr>
-          <a:lstStyle/>
-          <a:p>
-            <a:pPr algn="just" marL="0" indent="0">
-              <a:lnSpc>
-                <a:spcPts val="4680"/>
-              </a:lnSpc>
-              <a:spcBef>
-                <a:spcPts val="0"/>
-              </a:spcBef>
-              <a:spcAft>
-                <a:spcPts val="0"/>
-              </a:spcAft>
-              <a:buNone/>
-            </a:pPr>
-            <a:r>
-              <a:rPr lang="en-US" sz="3966" b="1" i="0" kern="100" dirty="0">
-                <a:solidFill>
-                  <a:srgbClr val="111111"/>
-                </a:solidFill>
-                <a:latin typeface="EB Garamond"/>
-                <a:ea typeface="EB Garamond"/>
-                <a:cs typeface="EB Garamond"/>
-              </a:rPr>
-              <a:t>Figure 4.</a:t>
-            </a:r>
-            <a:r>
-              <a:rPr lang="en-US" sz="3966" b="0" i="0" kern="100" dirty="0">
-                <a:solidFill>
-                  <a:srgbClr val="111111"/>
-                </a:solidFill>
-                <a:latin typeface="EB Garamond"/>
-                <a:ea typeface="EB Garamond"/>
-                <a:cs typeface="EB Garamond"/>
-              </a:rPr>
-              <a:t> Trigger position: the </a:t>
-            </a:r>
-            <a:r>
-              <a:rPr lang="en-US" sz="3966" b="1" i="0" kern="100" dirty="0">
-                <a:solidFill>
-                  <a:srgbClr val="111111"/>
-                </a:solidFill>
-                <a:latin typeface="EB Garamond"/>
-                <a:ea typeface="EB Garamond"/>
-                <a:cs typeface="EB Garamond"/>
-              </a:rPr>
-              <a:t>prefix</a:t>
-            </a:r>
-            <a:r>
-              <a:rPr lang="en-US" sz="3966" b="0" i="0" kern="100" dirty="0">
-                <a:solidFill>
-                  <a:srgbClr val="111111"/>
-                </a:solidFill>
-                <a:latin typeface="EB Garamond"/>
-                <a:ea typeface="EB Garamond"/>
-                <a:cs typeface="EB Garamond"/>
-              </a:rPr>
-              <a:t> trigger comes closest to the desired zone (NPO, MUSE‑Books).</a:t>
-            </a:r>
-            <a:endParaRPr lang="en-US" sz="3966" b="0" i="0" kern="100" dirty="0">
-              <a:solidFill>
-                <a:srgbClr val="111111"/>
-              </a:solidFill>
-              <a:latin typeface="EB Garamond"/>
-              <a:ea typeface="EB Garamond"/>
-              <a:cs typeface="EB Garamond"/>
-            </a:endParaRPr>
-          </a:p>
-        </p:txBody>
-      </p:sp>
-      <p:sp>
-        <p:nvSpPr>
-          <p:cNvPr id="55" name="Text: Attention sinks are a gateway: a prefix trigger "/>
-          <p:cNvSpPr/>
-          <p:nvPr/>
-        </p:nvSpPr>
-        <p:spPr>
-          <a:xfrm>
-            <a:off x="29209901" y="27707332"/>
-            <a:ext cx="14018121" cy="2668786"/>
-          </a:xfrm>
-          <a:prstGeom prst="roundRect">
-            <a:avLst>
-              <a:gd name="adj" fmla="val 13390"/>
-            </a:avLst>
-          </a:prstGeom>
-          <a:solidFill>
-            <a:srgbClr val="EEF4F1"/>
-          </a:solidFill>
-          <a:ln w="9525">
-            <a:solidFill>
-              <a:srgbClr val="18453B"/>
-            </a:solidFill>
-          </a:ln>
-        </p:spPr>
-        <p:txBody>
-          <a:bodyPr wrap="square" lIns="92764" tIns="119977" rIns="158601" bIns="119977" anchor="ctr" rtlCol="0">
-            <a:noAutofit/>
-          </a:bodyPr>
-          <a:lstStyle/>
-          <a:p>
-            <a:pPr algn="l" marL="724205" indent="-724205">
-              <a:lnSpc>
-                <a:spcPts val="6376"/>
-              </a:lnSpc>
-              <a:spcBef>
-                <a:spcPts val="0"/>
-              </a:spcBef>
-              <a:spcAft>
-                <a:spcPts val="0"/>
-              </a:spcAft>
-              <a:buClr>
-                <a:srgbClr val="111111"/>
-              </a:buClr>
-              <a:buSzPct val="100000"/>
-              <a:buFont typeface="Wingdings" pitchFamily="2" charset="2"/>
-              <a:buChar char="ü"/>
-            </a:pPr>
-            <a:r>
-              <a:rPr lang="en-US" sz="5314" b="1" i="0" kern="100" dirty="0">
-                <a:solidFill>
-                  <a:srgbClr val="111111"/>
-                </a:solidFill>
-                <a:latin typeface="EB Garamond"/>
-                <a:ea typeface="EB Garamond"/>
-                <a:cs typeface="EB Garamond"/>
-              </a:rPr>
-              <a:t>Attention sinks are a gateway:</a:t>
-            </a:r>
-            <a:r>
-              <a:rPr lang="en-US" sz="5314" b="0" i="0" kern="100" dirty="0">
-                <a:solidFill>
-                  <a:srgbClr val="111111"/>
-                </a:solidFill>
-                <a:latin typeface="EB Garamond"/>
-                <a:ea typeface="EB Garamond"/>
-                <a:cs typeface="EB Garamond"/>
-              </a:rPr>
-              <a:t> a prefix trigger restores forgotten knowledge; </a:t>
-            </a:r>
-            <a:r>
-              <a:rPr lang="en-US" sz="5314" b="1" i="0" kern="100" dirty="0">
-                <a:solidFill>
-                  <a:srgbClr val="111111"/>
-                </a:solidFill>
-                <a:latin typeface="EB Garamond"/>
-                <a:ea typeface="EB Garamond"/>
-                <a:cs typeface="EB Garamond"/>
-              </a:rPr>
-              <a:t>value-norm alignment</a:t>
-            </a:r>
-            <a:r>
-              <a:rPr lang="en-US" sz="5314" b="0" i="0" kern="100" dirty="0">
-                <a:solidFill>
-                  <a:srgbClr val="111111"/>
-                </a:solidFill>
-                <a:latin typeface="EB Garamond"/>
-                <a:ea typeface="EB Garamond"/>
-                <a:cs typeface="EB Garamond"/>
-              </a:rPr>
-              <a:t> makes it stealthier.</a:t>
-            </a:r>
-            <a:endParaRPr lang="en-US" sz="5314" b="0" i="0" kern="100" dirty="0">
-              <a:solidFill>
-                <a:srgbClr val="111111"/>
-              </a:solidFill>
-              <a:latin typeface="EB Garamond"/>
-              <a:ea typeface="EB Garamond"/>
-              <a:cs typeface="EB Garamond"/>
-            </a:endParaRPr>
-          </a:p>
-        </p:txBody>
-      </p:sp>
       <p:grpSp>
         <p:nvGrpSpPr>
-          <p:cNvPr id="62" name="Section: Backdooring LLM Unlearning: A New Threat"/>
+          <p:cNvPr id="68" name="Section: Backdooring LLM Unlearning: A New Threat"/>
           <p:cNvGrpSpPr/>
           <p:nvPr/>
         </p:nvGrpSpPr>
@@ -4213,543 +3991,12 @@
                   </a:endParaRPr>
                 </a:p>
                 <a:p>
-                  <a:pPr algn="ctr" marL="776051" indent="0">
-                    <a:lnSpc>
-                      <a:spcPct val="100000"/>
-                    </a:lnSpc>
-                    <a:spcBef>
-                      <a:spcPts val="1738"/>
-                    </a:spcBef>
-                    <a:spcAft>
-                      <a:spcPts val="0"/>
-                    </a:spcAft>
-                    <a:buNone/>
-                  </a:pPr>
-                  <a14:m>
-                    <m:oMathPara xmlns:m="http://schemas.openxmlformats.org/officeDocument/2006/math">
-                      <m:oMathParaPr>
-                        <m:jc m:val="centerGroup"/>
-                      </m:oMathParaPr>
-                      <m:oMath>
-                        <m:limLow>
-                          <m:limLowPr>
-                            <m:ctrlPr>
-                              <a:rPr lang="en-US" sz="5314" b="0" i="1">
-                                <a:solidFill>
-                                  <a:srgbClr val="111111"/>
-                                </a:solidFill>
-                                <a:latin typeface="Cambria Math" panose="02040503050406030204" pitchFamily="18" charset="0"/>
-                                <a:ea typeface="Cambria Math"/>
-                                <a:cs typeface="Cambria Math"/>
-                              </a:rPr>
-                            </m:ctrlPr>
-                          </m:limLowPr>
-                          <m:e>
-                            <m:r>
-                              <m:rPr>
-                                <m:sty m:val="p"/>
-                              </m:rPr>
-                              <a:rPr lang="en-US" sz="5314" b="0" i="0">
-                                <a:solidFill>
-                                  <a:srgbClr val="111111"/>
-                                </a:solidFill>
-                                <a:latin typeface="Cambria Math" panose="02040503050406030204" pitchFamily="18" charset="0"/>
-                                <a:ea typeface="Cambria Math"/>
-                                <a:cs typeface="Cambria Math"/>
-                              </a:rPr>
-                              <m:t>minimize</m:t>
-                            </m:r>
-                          </m:e>
-                          <m:lim>
-                            <m:r>
-                              <m:rPr>
-                                <m:sty m:val="bi"/>
-                              </m:rPr>
-                              <a:rPr lang="en-US" sz="5314" b="1" i="1">
-                                <a:solidFill>
-                                  <a:srgbClr val="111111"/>
-                                </a:solidFill>
-                                <a:latin typeface="Cambria Math" panose="02040503050406030204" pitchFamily="18" charset="0"/>
-                                <a:ea typeface="Cambria Math"/>
-                                <a:cs typeface="Cambria Math"/>
-                              </a:rPr>
-                              <m:t>θ</m:t>
-                            </m:r>
-                          </m:lim>
-                        </m:limLow>
-                        <m:r>
-                          <a:rPr lang="en-US" sz="5314" b="0" i="1">
-                            <a:solidFill>
-                              <a:srgbClr val="111111"/>
-                            </a:solidFill>
-                            <a:latin typeface="Cambria Math" panose="02040503050406030204" pitchFamily="18" charset="0"/>
-                            <a:ea typeface="Cambria Math"/>
-                            <a:cs typeface="Cambria Math"/>
-                          </a:rPr>
-                          <m:t> </m:t>
-                        </m:r>
-                        <m:r>
-                          <a:rPr lang="en-US" sz="5314" b="0" i="1">
-                            <a:solidFill>
-                              <a:srgbClr val="111111"/>
-                            </a:solidFill>
-                            <a:latin typeface="Cambria Math" panose="02040503050406030204" pitchFamily="18" charset="0"/>
-                            <a:ea typeface="Cambria Math"/>
-                            <a:cs typeface="Cambria Math"/>
-                          </a:rPr>
-                          <m:t> </m:t>
-                        </m:r>
-                        <m:limLow>
-                          <m:limLowPr>
-                            <m:ctrlPr>
-                              <a:rPr lang="en-US" sz="5314" b="0" i="1">
-                                <a:solidFill>
-                                  <a:srgbClr val="111111"/>
-                                </a:solidFill>
-                                <a:latin typeface="Cambria Math" panose="02040503050406030204" pitchFamily="18" charset="0"/>
-                                <a:ea typeface="Cambria Math"/>
-                                <a:cs typeface="Cambria Math"/>
-                              </a:rPr>
-                            </m:ctrlPr>
-                          </m:limLowPr>
-                          <m:e>
-                            <m:groupChr>
-                              <m:groupChrPr>
-                                <m:chr m:val="⏟"/>
-                                <m:pos m:val="bot"/>
-                                <m:vertJc m:val="top"/>
-                                <m:ctrlPr>
-                                  <a:rPr lang="en-US" sz="5314" b="0" i="1">
-                                    <a:solidFill>
-                                      <a:srgbClr val="111111"/>
-                                    </a:solidFill>
-                                    <a:latin typeface="Cambria Math" panose="02040503050406030204" pitchFamily="18" charset="0"/>
-                                    <a:ea typeface="Cambria Math"/>
-                                    <a:cs typeface="Cambria Math"/>
-                                  </a:rPr>
-                                </m:ctrlPr>
-                              </m:groupChrPr>
-                              <m:e>
-                                <m:sSub>
-                                  <m:sSubPr>
-                                    <m:ctrlPr>
-                                      <a:rPr lang="en-US" sz="5314" b="0" i="1">
-                                        <a:solidFill>
-                                          <a:srgbClr val="111111"/>
-                                        </a:solidFill>
-                                        <a:latin typeface="Cambria Math" panose="02040503050406030204" pitchFamily="18" charset="0"/>
-                                        <a:ea typeface="Cambria Math"/>
-                                        <a:cs typeface="Cambria Math"/>
-                                      </a:rPr>
-                                    </m:ctrlPr>
-                                  </m:sSubPr>
-                                  <m:e>
-                                    <m:r>
-                                      <a:rPr lang="en-US" sz="5314" b="0" i="1">
-                                        <a:solidFill>
-                                          <a:srgbClr val="111111"/>
-                                        </a:solidFill>
-                                        <a:latin typeface="Cambria Math" panose="02040503050406030204" pitchFamily="18" charset="0"/>
-                                        <a:ea typeface="Cambria Math"/>
-                                        <a:cs typeface="Cambria Math"/>
-                                      </a:rPr>
-                                      <m:t>ℓ</m:t>
-                                    </m:r>
-                                  </m:e>
-                                  <m:sub>
-                                    <m:r>
-                                      <m:rPr>
-                                        <m:sty m:val="p"/>
-                                      </m:rPr>
-                                      <a:rPr lang="en-US" sz="5314" b="0" i="0">
-                                        <a:solidFill>
-                                          <a:srgbClr val="111111"/>
-                                        </a:solidFill>
-                                        <a:latin typeface="Cambria Math" panose="02040503050406030204" pitchFamily="18" charset="0"/>
-                                        <a:ea typeface="Cambria Math"/>
-                                        <a:cs typeface="Cambria Math"/>
-                                      </a:rPr>
-                                      <m:t>f</m:t>
-                                    </m:r>
-                                  </m:sub>
-                                </m:sSub>
-                                <m:r>
-                                  <m:rPr>
-                                    <m:sty m:val="p"/>
-                                  </m:rPr>
-                                  <a:rPr lang="en-US" sz="5314" b="0" i="0">
-                                    <a:solidFill>
-                                      <a:srgbClr val="111111"/>
-                                    </a:solidFill>
-                                    <a:latin typeface="Cambria Math" panose="02040503050406030204" pitchFamily="18" charset="0"/>
-                                    <a:ea typeface="Cambria Math"/>
-                                    <a:cs typeface="Cambria Math"/>
-                                  </a:rPr>
-                                  <m:t>(</m:t>
-                                </m:r>
-                                <m:r>
-                                  <m:rPr>
-                                    <m:sty m:val="bi"/>
-                                  </m:rPr>
-                                  <a:rPr lang="en-US" sz="5314" b="1" i="1">
-                                    <a:solidFill>
-                                      <a:srgbClr val="111111"/>
-                                    </a:solidFill>
-                                    <a:latin typeface="Cambria Math" panose="02040503050406030204" pitchFamily="18" charset="0"/>
-                                    <a:ea typeface="Cambria Math"/>
-                                    <a:cs typeface="Cambria Math"/>
-                                  </a:rPr>
-                                  <m:t>θ</m:t>
-                                </m:r>
-                                <m:r>
-                                  <m:rPr>
-                                    <m:sty m:val="p"/>
-                                  </m:rPr>
-                                  <a:rPr lang="en-US" sz="5314" b="0" i="0">
-                                    <a:solidFill>
-                                      <a:srgbClr val="111111"/>
-                                    </a:solidFill>
-                                    <a:latin typeface="Cambria Math" panose="02040503050406030204" pitchFamily="18" charset="0"/>
-                                    <a:ea typeface="Cambria Math"/>
-                                    <a:cs typeface="Cambria Math"/>
-                                  </a:rPr>
-                                  <m:t>;</m:t>
-                                </m:r>
-                                <m:sSub>
-                                  <m:sSubPr>
-                                    <m:ctrlPr>
-                                      <a:rPr lang="en-US" sz="5314" b="0" i="1">
-                                        <a:solidFill>
-                                          <a:srgbClr val="111111"/>
-                                        </a:solidFill>
-                                        <a:latin typeface="Cambria Math" panose="02040503050406030204" pitchFamily="18" charset="0"/>
-                                        <a:ea typeface="Cambria Math"/>
-                                        <a:cs typeface="Cambria Math"/>
-                                      </a:rPr>
-                                    </m:ctrlPr>
-                                  </m:sSubPr>
-                                  <m:e>
-                                    <m:r>
-                                      <m:rPr>
-                                        <m:scr m:val="script"/>
-                                        <m:sty m:val="p"/>
-                                      </m:rPr>
-                                      <a:rPr lang="en-US" sz="5314" b="0" i="0">
-                                        <a:solidFill>
-                                          <a:srgbClr val="111111"/>
-                                        </a:solidFill>
-                                        <a:latin typeface="Cambria Math" panose="02040503050406030204" pitchFamily="18" charset="0"/>
-                                        <a:ea typeface="Cambria Math"/>
-                                        <a:cs typeface="Cambria Math"/>
-                                      </a:rPr>
-                                      <m:t>D</m:t>
-                                    </m:r>
-                                  </m:e>
-                                  <m:sub>
-                                    <m:r>
-                                      <m:rPr>
-                                        <m:sty m:val="p"/>
-                                      </m:rPr>
-                                      <a:rPr lang="en-US" sz="5314" b="0" i="0">
-                                        <a:solidFill>
-                                          <a:srgbClr val="111111"/>
-                                        </a:solidFill>
-                                        <a:latin typeface="Cambria Math" panose="02040503050406030204" pitchFamily="18" charset="0"/>
-                                        <a:ea typeface="Cambria Math"/>
-                                        <a:cs typeface="Cambria Math"/>
-                                      </a:rPr>
-                                      <m:t>f</m:t>
-                                    </m:r>
-                                  </m:sub>
-                                </m:sSub>
-                                <m:r>
-                                  <m:rPr>
-                                    <m:sty m:val="p"/>
-                                  </m:rPr>
-                                  <a:rPr lang="en-US" sz="5314" b="0" i="0">
-                                    <a:solidFill>
-                                      <a:srgbClr val="111111"/>
-                                    </a:solidFill>
-                                    <a:latin typeface="Cambria Math" panose="02040503050406030204" pitchFamily="18" charset="0"/>
-                                    <a:ea typeface="Cambria Math"/>
-                                    <a:cs typeface="Cambria Math"/>
-                                  </a:rPr>
-                                  <m:t>)</m:t>
-                                </m:r>
-                              </m:e>
-                            </m:groupChr>
-                          </m:e>
-                          <m:lim>
-                            <m:r>
-                              <m:rPr>
-                                <m:nor/>
-                                <m:sty m:val="p"/>
-                              </m:rPr>
-                              <a:rPr lang="en-US" sz="5314" b="0" i="0">
-                                <a:solidFill>
-                                  <a:srgbClr val="111111"/>
-                                </a:solidFill>
-                                <a:latin typeface="Cambria Math" panose="02040503050406030204" pitchFamily="18" charset="0"/>
-                                <a:ea typeface="Cambria Math"/>
-                                <a:cs typeface="Cambria Math"/>
-                              </a:rPr>
-                              <m:t>forget</m:t>
-                            </m:r>
-                          </m:lim>
-                        </m:limLow>
-                        <m:r>
-                          <m:rPr>
-                            <m:sty m:val="p"/>
-                          </m:rPr>
-                          <a:rPr lang="en-US" sz="5314" b="0" i="0">
-                            <a:solidFill>
-                              <a:srgbClr val="111111"/>
-                            </a:solidFill>
-                            <a:latin typeface="Cambria Math" panose="02040503050406030204" pitchFamily="18" charset="0"/>
-                            <a:ea typeface="Cambria Math"/>
-                            <a:cs typeface="Cambria Math"/>
-                          </a:rPr>
-                          <m:t>+</m:t>
-                        </m:r>
-                        <m:r>
-                          <a:rPr lang="en-US" sz="5314" b="0" i="1">
-                            <a:solidFill>
-                              <a:srgbClr val="111111"/>
-                            </a:solidFill>
-                            <a:latin typeface="Cambria Math" panose="02040503050406030204" pitchFamily="18" charset="0"/>
-                            <a:ea typeface="Cambria Math"/>
-                            <a:cs typeface="Cambria Math"/>
-                          </a:rPr>
-                          <m:t>γ</m:t>
-                        </m:r>
-                        <m:r>
-                          <a:rPr lang="en-US" sz="5314" b="0" i="1">
-                            <a:solidFill>
-                              <a:srgbClr val="111111"/>
-                            </a:solidFill>
-                            <a:latin typeface="Cambria Math" panose="02040503050406030204" pitchFamily="18" charset="0"/>
-                            <a:ea typeface="Cambria Math"/>
-                            <a:cs typeface="Cambria Math"/>
-                          </a:rPr>
-                          <m:t> </m:t>
-                        </m:r>
-                        <m:limLow>
-                          <m:limLowPr>
-                            <m:ctrlPr>
-                              <a:rPr lang="en-US" sz="5314" b="0" i="1">
-                                <a:solidFill>
-                                  <a:srgbClr val="111111"/>
-                                </a:solidFill>
-                                <a:latin typeface="Cambria Math" panose="02040503050406030204" pitchFamily="18" charset="0"/>
-                                <a:ea typeface="Cambria Math"/>
-                                <a:cs typeface="Cambria Math"/>
-                              </a:rPr>
-                            </m:ctrlPr>
-                          </m:limLowPr>
-                          <m:e>
-                            <m:groupChr>
-                              <m:groupChrPr>
-                                <m:chr m:val="⏟"/>
-                                <m:pos m:val="bot"/>
-                                <m:vertJc m:val="top"/>
-                                <m:ctrlPr>
-                                  <a:rPr lang="en-US" sz="5314" b="0" i="1">
-                                    <a:solidFill>
-                                      <a:srgbClr val="111111"/>
-                                    </a:solidFill>
-                                    <a:latin typeface="Cambria Math" panose="02040503050406030204" pitchFamily="18" charset="0"/>
-                                    <a:ea typeface="Cambria Math"/>
-                                    <a:cs typeface="Cambria Math"/>
-                                  </a:rPr>
-                                </m:ctrlPr>
-                              </m:groupChrPr>
-                              <m:e>
-                                <m:sSub>
-                                  <m:sSubPr>
-                                    <m:ctrlPr>
-                                      <a:rPr lang="en-US" sz="5314" b="0" i="1">
-                                        <a:solidFill>
-                                          <a:srgbClr val="111111"/>
-                                        </a:solidFill>
-                                        <a:latin typeface="Cambria Math" panose="02040503050406030204" pitchFamily="18" charset="0"/>
-                                        <a:ea typeface="Cambria Math"/>
-                                        <a:cs typeface="Cambria Math"/>
-                                      </a:rPr>
-                                    </m:ctrlPr>
-                                  </m:sSubPr>
-                                  <m:e>
-                                    <m:r>
-                                      <a:rPr lang="en-US" sz="5314" b="0" i="1">
-                                        <a:solidFill>
-                                          <a:srgbClr val="111111"/>
-                                        </a:solidFill>
-                                        <a:latin typeface="Cambria Math" panose="02040503050406030204" pitchFamily="18" charset="0"/>
-                                        <a:ea typeface="Cambria Math"/>
-                                        <a:cs typeface="Cambria Math"/>
-                                      </a:rPr>
-                                      <m:t>ℓ</m:t>
-                                    </m:r>
-                                  </m:e>
-                                  <m:sub>
-                                    <m:r>
-                                      <m:rPr>
-                                        <m:sty m:val="p"/>
-                                      </m:rPr>
-                                      <a:rPr lang="en-US" sz="5314" b="0" i="0">
-                                        <a:solidFill>
-                                          <a:srgbClr val="111111"/>
-                                        </a:solidFill>
-                                        <a:latin typeface="Cambria Math" panose="02040503050406030204" pitchFamily="18" charset="0"/>
-                                        <a:ea typeface="Cambria Math"/>
-                                        <a:cs typeface="Cambria Math"/>
-                                      </a:rPr>
-                                      <m:t>r</m:t>
-                                    </m:r>
-                                  </m:sub>
-                                </m:sSub>
-                                <m:r>
-                                  <m:rPr>
-                                    <m:sty m:val="p"/>
-                                  </m:rPr>
-                                  <a:rPr lang="en-US" sz="5314" b="0" i="0">
-                                    <a:solidFill>
-                                      <a:srgbClr val="111111"/>
-                                    </a:solidFill>
-                                    <a:latin typeface="Cambria Math" panose="02040503050406030204" pitchFamily="18" charset="0"/>
-                                    <a:ea typeface="Cambria Math"/>
-                                    <a:cs typeface="Cambria Math"/>
-                                  </a:rPr>
-                                  <m:t>(</m:t>
-                                </m:r>
-                                <m:r>
-                                  <m:rPr>
-                                    <m:sty m:val="bi"/>
-                                  </m:rPr>
-                                  <a:rPr lang="en-US" sz="5314" b="1" i="1">
-                                    <a:solidFill>
-                                      <a:srgbClr val="111111"/>
-                                    </a:solidFill>
-                                    <a:latin typeface="Cambria Math" panose="02040503050406030204" pitchFamily="18" charset="0"/>
-                                    <a:ea typeface="Cambria Math"/>
-                                    <a:cs typeface="Cambria Math"/>
-                                  </a:rPr>
-                                  <m:t>θ</m:t>
-                                </m:r>
-                                <m:r>
-                                  <m:rPr>
-                                    <m:sty m:val="p"/>
-                                  </m:rPr>
-                                  <a:rPr lang="en-US" sz="5314" b="0" i="0">
-                                    <a:solidFill>
-                                      <a:srgbClr val="111111"/>
-                                    </a:solidFill>
-                                    <a:latin typeface="Cambria Math" panose="02040503050406030204" pitchFamily="18" charset="0"/>
-                                    <a:ea typeface="Cambria Math"/>
-                                    <a:cs typeface="Cambria Math"/>
-                                  </a:rPr>
-                                  <m:t>;</m:t>
-                                </m:r>
-                                <m:sSub>
-                                  <m:sSubPr>
-                                    <m:ctrlPr>
-                                      <a:rPr lang="en-US" sz="5314" b="0" i="1">
-                                        <a:solidFill>
-                                          <a:srgbClr val="111111"/>
-                                        </a:solidFill>
-                                        <a:latin typeface="Cambria Math" panose="02040503050406030204" pitchFamily="18" charset="0"/>
-                                        <a:ea typeface="Cambria Math"/>
-                                        <a:cs typeface="Cambria Math"/>
-                                      </a:rPr>
-                                    </m:ctrlPr>
-                                  </m:sSubPr>
-                                  <m:e>
-                                    <m:r>
-                                      <m:rPr>
-                                        <m:scr m:val="script"/>
-                                        <m:sty m:val="p"/>
-                                      </m:rPr>
-                                      <a:rPr lang="en-US" sz="5314" b="0" i="0">
-                                        <a:solidFill>
-                                          <a:srgbClr val="111111"/>
-                                        </a:solidFill>
-                                        <a:latin typeface="Cambria Math" panose="02040503050406030204" pitchFamily="18" charset="0"/>
-                                        <a:ea typeface="Cambria Math"/>
-                                        <a:cs typeface="Cambria Math"/>
-                                      </a:rPr>
-                                      <m:t>D</m:t>
-                                    </m:r>
-                                  </m:e>
-                                  <m:sub>
-                                    <m:r>
-                                      <m:rPr>
-                                        <m:sty m:val="p"/>
-                                      </m:rPr>
-                                      <a:rPr lang="en-US" sz="5314" b="0" i="0">
-                                        <a:solidFill>
-                                          <a:srgbClr val="111111"/>
-                                        </a:solidFill>
-                                        <a:latin typeface="Cambria Math" panose="02040503050406030204" pitchFamily="18" charset="0"/>
-                                        <a:ea typeface="Cambria Math"/>
-                                        <a:cs typeface="Cambria Math"/>
-                                      </a:rPr>
-                                      <m:t>r</m:t>
-                                    </m:r>
-                                  </m:sub>
-                                </m:sSub>
-                                <m:r>
-                                  <m:rPr>
-                                    <m:sty m:val="p"/>
-                                  </m:rPr>
-                                  <a:rPr lang="en-US" sz="5314" b="0" i="0">
-                                    <a:solidFill>
-                                      <a:srgbClr val="111111"/>
-                                    </a:solidFill>
-                                    <a:latin typeface="Cambria Math" panose="02040503050406030204" pitchFamily="18" charset="0"/>
-                                    <a:ea typeface="Cambria Math"/>
-                                    <a:cs typeface="Cambria Math"/>
-                                  </a:rPr>
-                                  <m:t>)</m:t>
-                                </m:r>
-                              </m:e>
-                            </m:groupChr>
-                          </m:e>
-                          <m:lim>
-                            <m:r>
-                              <m:rPr>
-                                <m:nor/>
-                                <m:sty m:val="p"/>
-                              </m:rPr>
-                              <a:rPr lang="en-US" sz="5314" b="0" i="0">
-                                <a:solidFill>
-                                  <a:srgbClr val="111111"/>
-                                </a:solidFill>
-                                <a:latin typeface="Cambria Math" panose="02040503050406030204" pitchFamily="18" charset="0"/>
-                                <a:ea typeface="Cambria Math"/>
-                                <a:cs typeface="Cambria Math"/>
-                              </a:rPr>
-                              <m:t>retain</m:t>
-                            </m:r>
-                          </m:lim>
-                        </m:limLow>
-                      </m:oMath>
-                    </m:oMathPara>
-                  </a14:m>
-                  <a:endParaRPr lang="en-US" sz="5314" b="0" i="0" kern="100" dirty="0">
-                    <a:solidFill>
-                      <a:srgbClr val="111111"/>
-                    </a:solidFill>
-                    <a:latin typeface="EB Garamond"/>
-                    <a:ea typeface="EB Garamond"/>
-                    <a:cs typeface="EB Garamond"/>
-                  </a:endParaRPr>
-                </a:p>
-                <a:p>
                   <a:pPr algn="l" marL="776051" indent="-776051">
                     <a:lnSpc>
                       <a:spcPts val="6376"/>
                     </a:lnSpc>
                     <a:spcBef>
-                      <a:spcPts val="2850"/>
+                      <a:spcPts val="18233"/>
                     </a:spcBef>
                     <a:spcAft>
                       <a:spcPts val="0"/>
@@ -4940,645 +4187,6 @@
                     <a:cs typeface="EB Garamond"/>
                   </a:endParaRPr>
                 </a:p>
-                <a:p>
-                  <a:pPr algn="ctr" marL="776051" indent="0">
-                    <a:lnSpc>
-                      <a:spcPct val="100000"/>
-                    </a:lnSpc>
-                    <a:spcBef>
-                      <a:spcPts val="1738"/>
-                    </a:spcBef>
-                    <a:spcAft>
-                      <a:spcPts val="0"/>
-                    </a:spcAft>
-                    <a:buNone/>
-                  </a:pPr>
-                  <a14:m>
-                    <m:oMathPara xmlns:m="http://schemas.openxmlformats.org/officeDocument/2006/math">
-                      <m:oMathParaPr>
-                        <m:jc m:val="centerGroup"/>
-                      </m:oMathParaPr>
-                      <m:oMath>
-                        <m:limLow>
-                          <m:limLowPr>
-                            <m:ctrlPr>
-                              <a:rPr lang="en-US" sz="5314" b="0" i="1">
-                                <a:solidFill>
-                                  <a:srgbClr val="111111"/>
-                                </a:solidFill>
-                                <a:latin typeface="Cambria Math" panose="02040503050406030204" pitchFamily="18" charset="0"/>
-                                <a:ea typeface="Cambria Math"/>
-                                <a:cs typeface="Cambria Math"/>
-                              </a:rPr>
-                            </m:ctrlPr>
-                          </m:limLowPr>
-                          <m:e>
-                            <m:r>
-                              <m:rPr>
-                                <m:sty m:val="p"/>
-                              </m:rPr>
-                              <a:rPr lang="en-US" sz="5314" b="0" i="0">
-                                <a:solidFill>
-                                  <a:srgbClr val="111111"/>
-                                </a:solidFill>
-                                <a:latin typeface="Cambria Math" panose="02040503050406030204" pitchFamily="18" charset="0"/>
-                                <a:ea typeface="Cambria Math"/>
-                                <a:cs typeface="Cambria Math"/>
-                              </a:rPr>
-                              <m:t>minimize</m:t>
-                            </m:r>
-                          </m:e>
-                          <m:lim>
-                            <m:r>
-                              <m:rPr>
-                                <m:sty m:val="bi"/>
-                              </m:rPr>
-                              <a:rPr lang="en-US" sz="5314" b="1" i="1">
-                                <a:solidFill>
-                                  <a:srgbClr val="111111"/>
-                                </a:solidFill>
-                                <a:latin typeface="Cambria Math" panose="02040503050406030204" pitchFamily="18" charset="0"/>
-                                <a:ea typeface="Cambria Math"/>
-                                <a:cs typeface="Cambria Math"/>
-                              </a:rPr>
-                              <m:t>θ</m:t>
-                            </m:r>
-                          </m:lim>
-                        </m:limLow>
-                        <m:r>
-                          <a:rPr lang="en-US" sz="5314" b="0" i="1">
-                            <a:solidFill>
-                              <a:srgbClr val="111111"/>
-                            </a:solidFill>
-                            <a:latin typeface="Cambria Math" panose="02040503050406030204" pitchFamily="18" charset="0"/>
-                            <a:ea typeface="Cambria Math"/>
-                            <a:cs typeface="Cambria Math"/>
-                          </a:rPr>
-                          <m:t> </m:t>
-                        </m:r>
-                        <m:r>
-                          <a:rPr lang="en-US" sz="5314" b="0" i="1">
-                            <a:solidFill>
-                              <a:srgbClr val="111111"/>
-                            </a:solidFill>
-                            <a:latin typeface="Cambria Math" panose="02040503050406030204" pitchFamily="18" charset="0"/>
-                            <a:ea typeface="Cambria Math"/>
-                            <a:cs typeface="Cambria Math"/>
-                          </a:rPr>
-                          <m:t> </m:t>
-                        </m:r>
-                        <m:limLow>
-                          <m:limLowPr>
-                            <m:ctrlPr>
-                              <a:rPr lang="en-US" sz="5314" b="0" i="1">
-                                <a:solidFill>
-                                  <a:srgbClr val="111111"/>
-                                </a:solidFill>
-                                <a:latin typeface="Cambria Math" panose="02040503050406030204" pitchFamily="18" charset="0"/>
-                                <a:ea typeface="Cambria Math"/>
-                                <a:cs typeface="Cambria Math"/>
-                              </a:rPr>
-                            </m:ctrlPr>
-                          </m:limLowPr>
-                          <m:e>
-                            <m:groupChr>
-                              <m:groupChrPr>
-                                <m:chr m:val="⏟"/>
-                                <m:pos m:val="bot"/>
-                                <m:vertJc m:val="top"/>
-                                <m:ctrlPr>
-                                  <a:rPr lang="en-US" sz="5314" b="0" i="1">
-                                    <a:solidFill>
-                                      <a:srgbClr val="111111"/>
-                                    </a:solidFill>
-                                    <a:latin typeface="Cambria Math" panose="02040503050406030204" pitchFamily="18" charset="0"/>
-                                    <a:ea typeface="Cambria Math"/>
-                                    <a:cs typeface="Cambria Math"/>
-                                  </a:rPr>
-                                </m:ctrlPr>
-                              </m:groupChrPr>
-                              <m:e>
-                                <m:sSub>
-                                  <m:sSubPr>
-                                    <m:ctrlPr>
-                                      <a:rPr lang="en-US" sz="5314" b="0" i="1">
-                                        <a:solidFill>
-                                          <a:srgbClr val="111111"/>
-                                        </a:solidFill>
-                                        <a:latin typeface="Cambria Math" panose="02040503050406030204" pitchFamily="18" charset="0"/>
-                                        <a:ea typeface="Cambria Math"/>
-                                        <a:cs typeface="Cambria Math"/>
-                                      </a:rPr>
-                                    </m:ctrlPr>
-                                  </m:sSubPr>
-                                  <m:e>
-                                    <m:r>
-                                      <a:rPr lang="en-US" sz="5314" b="0" i="1">
-                                        <a:solidFill>
-                                          <a:srgbClr val="111111"/>
-                                        </a:solidFill>
-                                        <a:latin typeface="Cambria Math" panose="02040503050406030204" pitchFamily="18" charset="0"/>
-                                        <a:ea typeface="Cambria Math"/>
-                                        <a:cs typeface="Cambria Math"/>
-                                      </a:rPr>
-                                      <m:t>ℓ</m:t>
-                                    </m:r>
-                                  </m:e>
-                                  <m:sub>
-                                    <m:r>
-                                      <m:rPr>
-                                        <m:sty m:val="p"/>
-                                      </m:rPr>
-                                      <a:rPr lang="en-US" sz="5314" b="0" i="0">
-                                        <a:solidFill>
-                                          <a:srgbClr val="111111"/>
-                                        </a:solidFill>
-                                        <a:latin typeface="Cambria Math" panose="02040503050406030204" pitchFamily="18" charset="0"/>
-                                        <a:ea typeface="Cambria Math"/>
-                                        <a:cs typeface="Cambria Math"/>
-                                      </a:rPr>
-                                      <m:t>f</m:t>
-                                    </m:r>
-                                  </m:sub>
-                                </m:sSub>
-                                <m:r>
-                                  <m:rPr>
-                                    <m:sty m:val="p"/>
-                                  </m:rPr>
-                                  <a:rPr lang="en-US" sz="5314" b="0" i="0">
-                                    <a:solidFill>
-                                      <a:srgbClr val="111111"/>
-                                    </a:solidFill>
-                                    <a:latin typeface="Cambria Math" panose="02040503050406030204" pitchFamily="18" charset="0"/>
-                                    <a:ea typeface="Cambria Math"/>
-                                    <a:cs typeface="Cambria Math"/>
-                                  </a:rPr>
-                                  <m:t>(</m:t>
-                                </m:r>
-                                <m:r>
-                                  <m:rPr>
-                                    <m:sty m:val="bi"/>
-                                  </m:rPr>
-                                  <a:rPr lang="en-US" sz="5314" b="1" i="1">
-                                    <a:solidFill>
-                                      <a:srgbClr val="111111"/>
-                                    </a:solidFill>
-                                    <a:latin typeface="Cambria Math" panose="02040503050406030204" pitchFamily="18" charset="0"/>
-                                    <a:ea typeface="Cambria Math"/>
-                                    <a:cs typeface="Cambria Math"/>
-                                  </a:rPr>
-                                  <m:t>θ</m:t>
-                                </m:r>
-                                <m:r>
-                                  <m:rPr>
-                                    <m:sty m:val="p"/>
-                                  </m:rPr>
-                                  <a:rPr lang="en-US" sz="5314" b="0" i="0">
-                                    <a:solidFill>
-                                      <a:srgbClr val="111111"/>
-                                    </a:solidFill>
-                                    <a:latin typeface="Cambria Math" panose="02040503050406030204" pitchFamily="18" charset="0"/>
-                                    <a:ea typeface="Cambria Math"/>
-                                    <a:cs typeface="Cambria Math"/>
-                                  </a:rPr>
-                                  <m:t>;</m:t>
-                                </m:r>
-                                <m:sSub>
-                                  <m:sSubPr>
-                                    <m:ctrlPr>
-                                      <a:rPr lang="en-US" sz="5314" b="0" i="1">
-                                        <a:solidFill>
-                                          <a:srgbClr val="111111"/>
-                                        </a:solidFill>
-                                        <a:latin typeface="Cambria Math" panose="02040503050406030204" pitchFamily="18" charset="0"/>
-                                        <a:ea typeface="Cambria Math"/>
-                                        <a:cs typeface="Cambria Math"/>
-                                      </a:rPr>
-                                    </m:ctrlPr>
-                                  </m:sSubPr>
-                                  <m:e>
-                                    <m:r>
-                                      <m:rPr>
-                                        <m:scr m:val="script"/>
-                                        <m:sty m:val="p"/>
-                                      </m:rPr>
-                                      <a:rPr lang="en-US" sz="5314" b="0" i="0">
-                                        <a:solidFill>
-                                          <a:srgbClr val="111111"/>
-                                        </a:solidFill>
-                                        <a:latin typeface="Cambria Math" panose="02040503050406030204" pitchFamily="18" charset="0"/>
-                                        <a:ea typeface="Cambria Math"/>
-                                        <a:cs typeface="Cambria Math"/>
-                                      </a:rPr>
-                                      <m:t>D</m:t>
-                                    </m:r>
-                                  </m:e>
-                                  <m:sub>
-                                    <m:r>
-                                      <m:rPr>
-                                        <m:sty m:val="p"/>
-                                      </m:rPr>
-                                      <a:rPr lang="en-US" sz="5314" b="0" i="0">
-                                        <a:solidFill>
-                                          <a:srgbClr val="111111"/>
-                                        </a:solidFill>
-                                        <a:latin typeface="Cambria Math" panose="02040503050406030204" pitchFamily="18" charset="0"/>
-                                        <a:ea typeface="Cambria Math"/>
-                                        <a:cs typeface="Cambria Math"/>
-                                      </a:rPr>
-                                      <m:t>f</m:t>
-                                    </m:r>
-                                  </m:sub>
-                                </m:sSub>
-                                <m:r>
-                                  <m:rPr>
-                                    <m:sty m:val="p"/>
-                                  </m:rPr>
-                                  <a:rPr lang="en-US" sz="5314" b="0" i="0">
-                                    <a:solidFill>
-                                      <a:srgbClr val="111111"/>
-                                    </a:solidFill>
-                                    <a:latin typeface="Cambria Math" panose="02040503050406030204" pitchFamily="18" charset="0"/>
-                                    <a:ea typeface="Cambria Math"/>
-                                    <a:cs typeface="Cambria Math"/>
-                                  </a:rPr>
-                                  <m:t>)</m:t>
-                                </m:r>
-                              </m:e>
-                            </m:groupChr>
-                          </m:e>
-                          <m:lim>
-                            <m:r>
-                              <m:rPr>
-                                <m:nor/>
-                                <m:sty m:val="p"/>
-                              </m:rPr>
-                              <a:rPr lang="en-US" sz="5314" b="0" i="0">
-                                <a:solidFill>
-                                  <a:srgbClr val="111111"/>
-                                </a:solidFill>
-                                <a:latin typeface="Cambria Math" panose="02040503050406030204" pitchFamily="18" charset="0"/>
-                                <a:ea typeface="Cambria Math"/>
-                                <a:cs typeface="Cambria Math"/>
-                              </a:rPr>
-                              <m:t>forget</m:t>
-                            </m:r>
-                          </m:lim>
-                        </m:limLow>
-                        <m:r>
-                          <m:rPr>
-                            <m:sty m:val="p"/>
-                          </m:rPr>
-                          <a:rPr lang="en-US" sz="5314" b="0" i="0">
-                            <a:solidFill>
-                              <a:srgbClr val="111111"/>
-                            </a:solidFill>
-                            <a:latin typeface="Cambria Math" panose="02040503050406030204" pitchFamily="18" charset="0"/>
-                            <a:ea typeface="Cambria Math"/>
-                            <a:cs typeface="Cambria Math"/>
-                          </a:rPr>
-                          <m:t>+</m:t>
-                        </m:r>
-                        <m:r>
-                          <a:rPr lang="en-US" sz="5314" b="0" i="1">
-                            <a:solidFill>
-                              <a:srgbClr val="111111"/>
-                            </a:solidFill>
-                            <a:latin typeface="Cambria Math" panose="02040503050406030204" pitchFamily="18" charset="0"/>
-                            <a:ea typeface="Cambria Math"/>
-                            <a:cs typeface="Cambria Math"/>
-                          </a:rPr>
-                          <m:t>γ</m:t>
-                        </m:r>
-                        <m:r>
-                          <a:rPr lang="en-US" sz="5314" b="0" i="1">
-                            <a:solidFill>
-                              <a:srgbClr val="111111"/>
-                            </a:solidFill>
-                            <a:latin typeface="Cambria Math" panose="02040503050406030204" pitchFamily="18" charset="0"/>
-                            <a:ea typeface="Cambria Math"/>
-                            <a:cs typeface="Cambria Math"/>
-                          </a:rPr>
-                          <m:t> </m:t>
-                        </m:r>
-                        <m:limLow>
-                          <m:limLowPr>
-                            <m:ctrlPr>
-                              <a:rPr lang="en-US" sz="5314" b="0" i="1">
-                                <a:solidFill>
-                                  <a:srgbClr val="111111"/>
-                                </a:solidFill>
-                                <a:latin typeface="Cambria Math" panose="02040503050406030204" pitchFamily="18" charset="0"/>
-                                <a:ea typeface="Cambria Math"/>
-                                <a:cs typeface="Cambria Math"/>
-                              </a:rPr>
-                            </m:ctrlPr>
-                          </m:limLowPr>
-                          <m:e>
-                            <m:groupChr>
-                              <m:groupChrPr>
-                                <m:chr m:val="⏟"/>
-                                <m:pos m:val="bot"/>
-                                <m:vertJc m:val="top"/>
-                                <m:ctrlPr>
-                                  <a:rPr lang="en-US" sz="5314" b="0" i="1">
-                                    <a:solidFill>
-                                      <a:srgbClr val="111111"/>
-                                    </a:solidFill>
-                                    <a:latin typeface="Cambria Math" panose="02040503050406030204" pitchFamily="18" charset="0"/>
-                                    <a:ea typeface="Cambria Math"/>
-                                    <a:cs typeface="Cambria Math"/>
-                                  </a:rPr>
-                                </m:ctrlPr>
-                              </m:groupChrPr>
-                              <m:e>
-                                <m:sSub>
-                                  <m:sSubPr>
-                                    <m:ctrlPr>
-                                      <a:rPr lang="en-US" sz="5314" b="0" i="1">
-                                        <a:solidFill>
-                                          <a:srgbClr val="111111"/>
-                                        </a:solidFill>
-                                        <a:latin typeface="Cambria Math" panose="02040503050406030204" pitchFamily="18" charset="0"/>
-                                        <a:ea typeface="Cambria Math"/>
-                                        <a:cs typeface="Cambria Math"/>
-                                      </a:rPr>
-                                    </m:ctrlPr>
-                                  </m:sSubPr>
-                                  <m:e>
-                                    <m:r>
-                                      <a:rPr lang="en-US" sz="5314" b="0" i="1">
-                                        <a:solidFill>
-                                          <a:srgbClr val="111111"/>
-                                        </a:solidFill>
-                                        <a:latin typeface="Cambria Math" panose="02040503050406030204" pitchFamily="18" charset="0"/>
-                                        <a:ea typeface="Cambria Math"/>
-                                        <a:cs typeface="Cambria Math"/>
-                                      </a:rPr>
-                                      <m:t>ℓ</m:t>
-                                    </m:r>
-                                  </m:e>
-                                  <m:sub>
-                                    <m:r>
-                                      <m:rPr>
-                                        <m:sty m:val="p"/>
-                                      </m:rPr>
-                                      <a:rPr lang="en-US" sz="5314" b="0" i="0">
-                                        <a:solidFill>
-                                          <a:srgbClr val="111111"/>
-                                        </a:solidFill>
-                                        <a:latin typeface="Cambria Math" panose="02040503050406030204" pitchFamily="18" charset="0"/>
-                                        <a:ea typeface="Cambria Math"/>
-                                        <a:cs typeface="Cambria Math"/>
-                                      </a:rPr>
-                                      <m:t>r</m:t>
-                                    </m:r>
-                                  </m:sub>
-                                </m:sSub>
-                                <m:r>
-                                  <m:rPr>
-                                    <m:sty m:val="p"/>
-                                  </m:rPr>
-                                  <a:rPr lang="en-US" sz="5314" b="0" i="0">
-                                    <a:solidFill>
-                                      <a:srgbClr val="111111"/>
-                                    </a:solidFill>
-                                    <a:latin typeface="Cambria Math" panose="02040503050406030204" pitchFamily="18" charset="0"/>
-                                    <a:ea typeface="Cambria Math"/>
-                                    <a:cs typeface="Cambria Math"/>
-                                  </a:rPr>
-                                  <m:t>(</m:t>
-                                </m:r>
-                                <m:r>
-                                  <m:rPr>
-                                    <m:sty m:val="bi"/>
-                                  </m:rPr>
-                                  <a:rPr lang="en-US" sz="5314" b="1" i="1">
-                                    <a:solidFill>
-                                      <a:srgbClr val="111111"/>
-                                    </a:solidFill>
-                                    <a:latin typeface="Cambria Math" panose="02040503050406030204" pitchFamily="18" charset="0"/>
-                                    <a:ea typeface="Cambria Math"/>
-                                    <a:cs typeface="Cambria Math"/>
-                                  </a:rPr>
-                                  <m:t>θ</m:t>
-                                </m:r>
-                                <m:r>
-                                  <m:rPr>
-                                    <m:sty m:val="p"/>
-                                  </m:rPr>
-                                  <a:rPr lang="en-US" sz="5314" b="0" i="0">
-                                    <a:solidFill>
-                                      <a:srgbClr val="111111"/>
-                                    </a:solidFill>
-                                    <a:latin typeface="Cambria Math" panose="02040503050406030204" pitchFamily="18" charset="0"/>
-                                    <a:ea typeface="Cambria Math"/>
-                                    <a:cs typeface="Cambria Math"/>
-                                  </a:rPr>
-                                  <m:t>;</m:t>
-                                </m:r>
-                                <m:sSub>
-                                  <m:sSubPr>
-                                    <m:ctrlPr>
-                                      <a:rPr lang="en-US" sz="5314" b="0" i="1">
-                                        <a:solidFill>
-                                          <a:srgbClr val="111111"/>
-                                        </a:solidFill>
-                                        <a:latin typeface="Cambria Math" panose="02040503050406030204" pitchFamily="18" charset="0"/>
-                                        <a:ea typeface="Cambria Math"/>
-                                        <a:cs typeface="Cambria Math"/>
-                                      </a:rPr>
-                                    </m:ctrlPr>
-                                  </m:sSubPr>
-                                  <m:e>
-                                    <m:r>
-                                      <m:rPr>
-                                        <m:scr m:val="script"/>
-                                        <m:sty m:val="p"/>
-                                      </m:rPr>
-                                      <a:rPr lang="en-US" sz="5314" b="0" i="0">
-                                        <a:solidFill>
-                                          <a:srgbClr val="111111"/>
-                                        </a:solidFill>
-                                        <a:latin typeface="Cambria Math" panose="02040503050406030204" pitchFamily="18" charset="0"/>
-                                        <a:ea typeface="Cambria Math"/>
-                                        <a:cs typeface="Cambria Math"/>
-                                      </a:rPr>
-                                      <m:t>D</m:t>
-                                    </m:r>
-                                  </m:e>
-                                  <m:sub>
-                                    <m:r>
-                                      <m:rPr>
-                                        <m:sty m:val="p"/>
-                                      </m:rPr>
-                                      <a:rPr lang="en-US" sz="5314" b="0" i="0">
-                                        <a:solidFill>
-                                          <a:srgbClr val="111111"/>
-                                        </a:solidFill>
-                                        <a:latin typeface="Cambria Math" panose="02040503050406030204" pitchFamily="18" charset="0"/>
-                                        <a:ea typeface="Cambria Math"/>
-                                        <a:cs typeface="Cambria Math"/>
-                                      </a:rPr>
-                                      <m:t>r</m:t>
-                                    </m:r>
-                                  </m:sub>
-                                </m:sSub>
-                                <m:r>
-                                  <m:rPr>
-                                    <m:sty m:val="p"/>
-                                  </m:rPr>
-                                  <a:rPr lang="en-US" sz="5314" b="0" i="0">
-                                    <a:solidFill>
-                                      <a:srgbClr val="111111"/>
-                                    </a:solidFill>
-                                    <a:latin typeface="Cambria Math" panose="02040503050406030204" pitchFamily="18" charset="0"/>
-                                    <a:ea typeface="Cambria Math"/>
-                                    <a:cs typeface="Cambria Math"/>
-                                  </a:rPr>
-                                  <m:t>∪</m:t>
-                                </m:r>
-                                <m:sSub>
-                                  <m:sSubPr>
-                                    <m:ctrlPr>
-                                      <a:rPr lang="en-US" sz="5314" b="0" i="1">
-                                        <a:solidFill>
-                                          <a:srgbClr val="111111"/>
-                                        </a:solidFill>
-                                        <a:latin typeface="Cambria Math" panose="02040503050406030204" pitchFamily="18" charset="0"/>
-                                        <a:ea typeface="Cambria Math"/>
-                                        <a:cs typeface="Cambria Math"/>
-                                      </a:rPr>
-                                    </m:ctrlPr>
-                                  </m:sSubPr>
-                                  <m:e>
-                                    <m:r>
-                                      <m:rPr>
-                                        <m:scr m:val="script"/>
-                                        <m:sty m:val="p"/>
-                                      </m:rPr>
-                                      <a:rPr lang="en-US" sz="5314" b="0" i="0">
-                                        <a:solidFill>
-                                          <a:srgbClr val="111111"/>
-                                        </a:solidFill>
-                                        <a:latin typeface="Cambria Math" panose="02040503050406030204" pitchFamily="18" charset="0"/>
-                                        <a:ea typeface="Cambria Math"/>
-                                        <a:cs typeface="Cambria Math"/>
-                                      </a:rPr>
-                                      <m:t>D</m:t>
-                                    </m:r>
-                                  </m:e>
-                                  <m:sub>
-                                    <m:r>
-                                      <m:rPr>
-                                        <m:sty m:val="p"/>
-                                      </m:rPr>
-                                      <a:rPr lang="en-US" sz="5314" b="0" i="0">
-                                        <a:solidFill>
-                                          <a:srgbClr val="111111"/>
-                                        </a:solidFill>
-                                        <a:latin typeface="Cambria Math" panose="02040503050406030204" pitchFamily="18" charset="0"/>
-                                        <a:ea typeface="Cambria Math"/>
-                                        <a:cs typeface="Cambria Math"/>
-                                      </a:rPr>
-                                      <m:t>p</m:t>
-                                    </m:r>
-                                  </m:sub>
-                                </m:sSub>
-                                <m:r>
-                                  <m:rPr>
-                                    <m:sty m:val="p"/>
-                                  </m:rPr>
-                                  <a:rPr lang="en-US" sz="5314" b="0" i="0">
-                                    <a:solidFill>
-                                      <a:srgbClr val="111111"/>
-                                    </a:solidFill>
-                                    <a:latin typeface="Cambria Math" panose="02040503050406030204" pitchFamily="18" charset="0"/>
-                                    <a:ea typeface="Cambria Math"/>
-                                    <a:cs typeface="Cambria Math"/>
-                                  </a:rPr>
-                                  <m:t>)</m:t>
-                                </m:r>
-                              </m:e>
-                            </m:groupChr>
-                          </m:e>
-                          <m:lim>
-                            <m:r>
-                              <m:rPr>
-                                <m:nor/>
-                                <m:sty m:val="p"/>
-                              </m:rPr>
-                              <a:rPr lang="en-US" sz="5314" b="0" i="0">
-                                <a:solidFill>
-                                  <a:srgbClr val="111111"/>
-                                </a:solidFill>
-                                <a:latin typeface="Cambria Math" panose="02040503050406030204" pitchFamily="18" charset="0"/>
-                                <a:ea typeface="Cambria Math"/>
-                                <a:cs typeface="Cambria Math"/>
-                              </a:rPr>
-                              <m:t>retain, incl. triggered </m:t>
-                            </m:r>
-                            <m:sSub>
-                              <m:sSubPr>
-                                <m:ctrlPr>
-                                  <a:rPr lang="en-US" sz="5314" b="0" i="1">
-                                    <a:solidFill>
-                                      <a:srgbClr val="111111"/>
-                                    </a:solidFill>
-                                    <a:latin typeface="Cambria Math" panose="02040503050406030204" pitchFamily="18" charset="0"/>
-                                    <a:ea typeface="Cambria Math"/>
-                                    <a:cs typeface="Cambria Math"/>
-                                  </a:rPr>
-                                </m:ctrlPr>
-                              </m:sSubPr>
-                              <m:e>
-                                <m:r>
-                                  <m:rPr>
-                                    <m:scr m:val="script"/>
-                                    <m:sty m:val="p"/>
-                                  </m:rPr>
-                                  <a:rPr lang="en-US" sz="5314" b="0" i="0">
-                                    <a:solidFill>
-                                      <a:srgbClr val="111111"/>
-                                    </a:solidFill>
-                                    <a:latin typeface="Cambria Math" panose="02040503050406030204" pitchFamily="18" charset="0"/>
-                                    <a:ea typeface="Cambria Math"/>
-                                    <a:cs typeface="Cambria Math"/>
-                                  </a:rPr>
-                                  <m:t>D</m:t>
-                                </m:r>
-                              </m:e>
-                              <m:sub>
-                                <m:r>
-                                  <m:rPr>
-                                    <m:sty m:val="p"/>
-                                  </m:rPr>
-                                  <a:rPr lang="en-US" sz="5314" b="0" i="0">
-                                    <a:solidFill>
-                                      <a:srgbClr val="111111"/>
-                                    </a:solidFill>
-                                    <a:latin typeface="Cambria Math" panose="02040503050406030204" pitchFamily="18" charset="0"/>
-                                    <a:ea typeface="Cambria Math"/>
-                                    <a:cs typeface="Cambria Math"/>
-                                  </a:rPr>
-                                  <m:t>p</m:t>
-                                </m:r>
-                              </m:sub>
-                            </m:sSub>
-                          </m:lim>
-                        </m:limLow>
-                      </m:oMath>
-                    </m:oMathPara>
-                  </a14:m>
-                  <a:endParaRPr lang="en-US" sz="5314" b="0" i="0" kern="100" dirty="0">
-                    <a:solidFill>
-                      <a:srgbClr val="111111"/>
-                    </a:solidFill>
-                    <a:latin typeface="EB Garamond"/>
-                    <a:ea typeface="EB Garamond"/>
-                    <a:cs typeface="EB Garamond"/>
-                  </a:endParaRPr>
-                </a:p>
               </p:txBody>
             </p:sp>
           </mc:Choice>
@@ -5621,9 +4229,69 @@
             </p:sp>
           </mc:Fallback>
         </mc:AlternateContent>
+        <p:pic>
+          <p:nvPicPr>
+            <p:cNvPr id="17" name="Equation: \minimize_{\btheta}\;\; \underbrace{\lf(\btheta;\Df)}_{\text" descr="\minimize_{\btheta}\;\; \underbrace{\lf(\btheta;\Df)}_{\text{forget}} + \gamma\,\underbrace{\lr(\btheta;\Dr)}_{\text{retain}}"/>
+            <p:cNvPicPr>
+              <a:picLocks noChangeAspect="1"/>
+            </p:cNvPicPr>
+            <p:nvPr/>
+          </p:nvPicPr>
+          <p:blipFill>
+            <a:blip r:embed="rId17">
+              <a:extLst>
+                <a:ext uri="{96DAC541-7B7A-43D3-8B79-37D633B846F1}">
+                  <asvg:svgBlip xmlns:asvg="http://schemas.microsoft.com/office/drawing/2016/SVG/main" r:embed="rId18"/>
+                </a:ext>
+              </a:extLst>
+            </a:blip>
+            <a:stretch>
+              <a:fillRect/>
+            </a:stretch>
+          </p:blipFill>
+          <p:spPr>
+            <a:xfrm>
+              <a:off x="3160812" y="8504783"/>
+              <a:ext cx="8560743" cy="1600498"/>
+            </a:xfrm>
+            <a:prstGeom prst="rect">
+              <a:avLst/>
+            </a:prstGeom>
+          </p:spPr>
+        </p:pic>
+        <p:pic>
+          <p:nvPicPr>
+            <p:cNvPr id="18" name="Equation: \minimize_{\btheta}\;\; \underbrace{\lf(\btheta;\Df)}_{\text" descr="\minimize_{\btheta}\;\; \underbrace{\lf(\btheta;\Df)}_{\text{forget}} + \gamma\,\underbrace{\lr(\btheta;\Dr\cup\Dp)}_{\text{retain, incl. triggered }\Dp}"/>
+            <p:cNvPicPr>
+              <a:picLocks noChangeAspect="1"/>
+            </p:cNvPicPr>
+            <p:nvPr/>
+          </p:nvPicPr>
+          <p:blipFill>
+            <a:blip r:embed="rId19">
+              <a:extLst>
+                <a:ext uri="{96DAC541-7B7A-43D3-8B79-37D633B846F1}">
+                  <asvg:svgBlip xmlns:asvg="http://schemas.microsoft.com/office/drawing/2016/SVG/main" r:embed="rId20"/>
+                </a:ext>
+              </a:extLst>
+            </a:blip>
+            <a:stretch>
+              <a:fillRect/>
+            </a:stretch>
+          </p:blipFill>
+          <p:spPr>
+            <a:xfrm>
+              <a:off x="2083147" y="12432953"/>
+              <a:ext cx="10716071" cy="1660922"/>
+            </a:xfrm>
+            <a:prstGeom prst="rect">
+              <a:avLst/>
+            </a:prstGeom>
+          </p:spPr>
+        </p:pic>
         <p:sp>
           <p:nvSpPr>
-            <p:cNvPr id="17" name="Bullets: Attack goals:"/>
+            <p:cNvPr id="19" name="Bullets: Attack goals:"/>
             <p:cNvSpPr txBox="1"/>
             <p:nvPr/>
           </p:nvSpPr>
@@ -5684,7 +4352,7 @@
         </p:sp>
         <p:sp>
           <p:nvSpPr>
-            <p:cNvPr id="18" name="List: Stealthy compliance Utility preservation Trigger"/>
+            <p:cNvPr id="20" name="List: Stealthy compliance Utility preservation Trigger"/>
             <p:cNvSpPr txBox="1"/>
             <p:nvPr/>
           </p:nvSpPr>
@@ -5821,17 +4489,17 @@
         </p:sp>
         <p:pic>
           <p:nvPicPr>
-            <p:cNvPr id="19" name="Picture: teaser_full" descr="Figure 1 of the paper: (a) machine unlearning, (b) backdoor unlearning, (c) attention sinks identify where to backdoor, (d) value norms enhance how to backdoor"/>
+            <p:cNvPr id="21" name="Picture: teaser_full" descr="Figure 1 of the paper: (a) machine unlearning, (b) backdoor unlearning, (c) attention sinks identify where to backdoor, (d) value norms enhance how to backdoor"/>
             <p:cNvPicPr>
               <a:picLocks noChangeAspect="1"/>
             </p:cNvPicPr>
             <p:nvPr/>
           </p:nvPicPr>
           <p:blipFill>
-            <a:blip r:embed="rId17">
+            <a:blip r:embed="rId21">
               <a:extLst>
                 <a:ext uri="{96DAC541-7B7A-43D3-8B79-37D633B846F1}">
-                  <asvg:svgBlip xmlns:asvg="http://schemas.microsoft.com/office/drawing/2016/SVG/main" r:embed="rId18"/>
+                  <asvg:svgBlip xmlns:asvg="http://schemas.microsoft.com/office/drawing/2016/SVG/main" r:embed="rId22"/>
                 </a:ext>
               </a:extLst>
             </a:blip>
@@ -5851,7 +4519,7 @@
         </p:pic>
         <p:sp>
           <p:nvSpPr>
-            <p:cNvPr id="20" name="Caption: Figure 1. (a) Normal vs. (b) backdoor unlearning"/>
+            <p:cNvPr id="22" name="Caption: Figure 1. (a) Normal vs. (b) backdoor unlearning"/>
             <p:cNvSpPr txBox="1"/>
             <p:nvPr/>
           </p:nvSpPr>
@@ -6007,7 +4675,7 @@
       </p:grpSp>
       <p:grpSp>
         <p:nvGrpSpPr>
-          <p:cNvPr id="63" name="Section: Research Question"/>
+          <p:cNvPr id="69" name="Section: Research Question"/>
           <p:cNvGrpSpPr/>
           <p:nvPr/>
         </p:nvGrpSpPr>
@@ -6021,7 +4689,7 @@
         </p:grpSpPr>
         <p:sp>
           <p:nvSpPr>
-            <p:cNvPr id="21" name="Section title: Research Question"/>
+            <p:cNvPr id="23" name="Section title: Research Question"/>
             <p:cNvSpPr txBox="1"/>
             <p:nvPr/>
           </p:nvSpPr>
@@ -6082,7 +4750,7 @@
         </p:sp>
         <p:sp>
           <p:nvSpPr>
-            <p:cNvPr id="22" name="Research question: (Q) Can LLM unlearning be backdoored, and if so,"/>
+            <p:cNvPr id="24" name="Research question: (Q) Can LLM unlearning be backdoored, and if so,"/>
             <p:cNvSpPr/>
             <p:nvPr/>
           </p:nvSpPr>
@@ -6188,7 +4856,7 @@
       </p:grpSp>
       <p:grpSp>
         <p:nvGrpSpPr>
-          <p:cNvPr id="64" name="Section: Where to Place the Trigger? Attention Sinks"/>
+          <p:cNvPr id="70" name="Section: Where to Place the Trigger? Attention Sinks"/>
           <p:cNvGrpSpPr/>
           <p:nvPr/>
         </p:nvGrpSpPr>
@@ -6202,7 +4870,7 @@
         </p:grpSpPr>
         <p:sp>
           <p:nvSpPr>
-            <p:cNvPr id="23" name="Section title: Where to Place the Trigger? Attention Sinks"/>
+            <p:cNvPr id="25" name="Section title: Where to Place the Trigger? Attention Sinks"/>
             <p:cNvSpPr txBox="1"/>
             <p:nvPr/>
           </p:nvSpPr>
@@ -6284,7 +4952,7 @@
         </p:sp>
         <p:sp>
           <p:nvSpPr>
-            <p:cNvPr id="24" name="Bullets: Attention sink [3]: LLMs over-attend the first f"/>
+            <p:cNvPr id="26" name="Bullets: Attention sink [3]: LLMs over-attend the first f"/>
             <p:cNvSpPr txBox="1"/>
             <p:nvPr/>
           </p:nvSpPr>
@@ -6400,7 +5068,7 @@
         </p:sp>
         <p:sp>
           <p:nvSpPr>
-            <p:cNvPr id="25" name="Panel label: Attention weight difference value"/>
+            <p:cNvPr id="27" name="Panel label: Attention weight difference value"/>
             <p:cNvSpPr txBox="1"/>
             <p:nvPr/>
           </p:nvSpPr>
@@ -6456,17 +5124,17 @@
         </p:sp>
         <p:pic>
           <p:nvPicPr>
-            <p:cNvPr id="26" name="Picture: standalone_cbar" descr="Color scale from -0.015 to 0.015"/>
+            <p:cNvPr id="28" name="Picture: standalone_cbar" descr="Color scale from -0.015 to 0.015"/>
             <p:cNvPicPr>
               <a:picLocks noChangeAspect="1"/>
             </p:cNvPicPr>
             <p:nvPr/>
           </p:nvPicPr>
           <p:blipFill>
-            <a:blip r:embed="rId19">
+            <a:blip r:embed="rId23">
               <a:extLst>
                 <a:ext uri="{96DAC541-7B7A-43D3-8B79-37D633B846F1}">
-                  <asvg:svgBlip xmlns:asvg="http://schemas.microsoft.com/office/drawing/2016/SVG/main" r:embed="rId20"/>
+                  <asvg:svgBlip xmlns:asvg="http://schemas.microsoft.com/office/drawing/2016/SVG/main" r:embed="rId24"/>
                 </a:ext>
               </a:extLst>
             </a:blip>
@@ -6486,7 +5154,7 @@
         </p:pic>
         <p:sp>
           <p:nvSpPr>
-            <p:cNvPr id="27" name="Text: Top-1 next-token probability, backdoored model"/>
+            <p:cNvPr id="29" name="Text: Top-1 next-token probability, backdoored model"/>
             <p:cNvSpPr txBox="1"/>
             <p:nvPr/>
           </p:nvSpPr>
@@ -6542,17 +5210,17 @@
         </p:sp>
         <p:pic>
           <p:nvPicPr>
-            <p:cNvPr id="28" name="Picture: preunlearned_L31_averaged_difference_attention_prefix" descr="Attention difference map, original model, prefix trigger"/>
+            <p:cNvPr id="30" name="Picture: preunlearned_L31_averaged_difference_attention_prefix" descr="Attention difference map, original model, prefix trigger"/>
             <p:cNvPicPr>
               <a:picLocks noChangeAspect="1"/>
             </p:cNvPicPr>
             <p:nvPr/>
           </p:nvPicPr>
           <p:blipFill>
-            <a:blip r:embed="rId21">
+            <a:blip r:embed="rId25">
               <a:extLst>
                 <a:ext uri="{96DAC541-7B7A-43D3-8B79-37D633B846F1}">
-                  <asvg:svgBlip xmlns:asvg="http://schemas.microsoft.com/office/drawing/2016/SVG/main" r:embed="rId22"/>
+                  <asvg:svgBlip xmlns:asvg="http://schemas.microsoft.com/office/drawing/2016/SVG/main" r:embed="rId26"/>
                 </a:ext>
               </a:extLst>
             </a:blip>
@@ -6572,7 +5240,7 @@
         </p:pic>
         <p:sp>
           <p:nvSpPr>
-            <p:cNvPr id="29" name="Panel label: (a) Original model"/>
+            <p:cNvPr id="31" name="Panel label: (a) Original model"/>
             <p:cNvSpPr txBox="1"/>
             <p:nvPr/>
           </p:nvSpPr>
@@ -6628,17 +5296,17 @@
         </p:sp>
         <p:pic>
           <p:nvPicPr>
-            <p:cNvPr id="30" name="Picture: backdoored_L31_averaged_difference_attention_prefix" descr="Attention difference map, backdoored model, prefix trigger"/>
+            <p:cNvPr id="32" name="Picture: backdoored_L31_averaged_difference_attention_prefix" descr="Attention difference map, backdoored model, prefix trigger"/>
             <p:cNvPicPr>
               <a:picLocks noChangeAspect="1"/>
             </p:cNvPicPr>
             <p:nvPr/>
           </p:nvPicPr>
           <p:blipFill>
-            <a:blip r:embed="rId23">
+            <a:blip r:embed="rId27">
               <a:extLst>
                 <a:ext uri="{96DAC541-7B7A-43D3-8B79-37D633B846F1}">
-                  <asvg:svgBlip xmlns:asvg="http://schemas.microsoft.com/office/drawing/2016/SVG/main" r:embed="rId24"/>
+                  <asvg:svgBlip xmlns:asvg="http://schemas.microsoft.com/office/drawing/2016/SVG/main" r:embed="rId28"/>
                 </a:ext>
               </a:extLst>
             </a:blip>
@@ -6658,7 +5326,7 @@
         </p:pic>
         <p:sp>
           <p:nvSpPr>
-            <p:cNvPr id="31" name="Panel label: (b) Backdoored model"/>
+            <p:cNvPr id="33" name="Panel label: (b) Backdoored model"/>
             <p:cNvSpPr txBox="1"/>
             <p:nvPr/>
           </p:nvSpPr>
@@ -6714,17 +5382,17 @@
         </p:sp>
         <p:pic>
           <p:nvPicPr>
-            <p:cNvPr id="32" name="Picture: backdoor_logits_prefix" descr="Top-1 probability, backdoored model, prefix trigger"/>
+            <p:cNvPr id="34" name="Picture: backdoor_logits_prefix" descr="Top-1 probability, backdoored model, prefix trigger"/>
             <p:cNvPicPr>
               <a:picLocks noChangeAspect="1"/>
             </p:cNvPicPr>
             <p:nvPr/>
           </p:nvPicPr>
           <p:blipFill>
-            <a:blip r:embed="rId25">
+            <a:blip r:embed="rId29">
               <a:extLst>
                 <a:ext uri="{96DAC541-7B7A-43D3-8B79-37D633B846F1}">
-                  <asvg:svgBlip xmlns:asvg="http://schemas.microsoft.com/office/drawing/2016/SVG/main" r:embed="rId26"/>
+                  <asvg:svgBlip xmlns:asvg="http://schemas.microsoft.com/office/drawing/2016/SVG/main" r:embed="rId30"/>
                 </a:ext>
               </a:extLst>
             </a:blip>
@@ -6744,7 +5412,7 @@
         </p:pic>
         <p:sp>
           <p:nvSpPr>
-            <p:cNvPr id="33" name="Panel label: (c) Prefix trigger"/>
+            <p:cNvPr id="35" name="Panel label: (c) Prefix trigger"/>
             <p:cNvSpPr txBox="1"/>
             <p:nvPr/>
           </p:nvSpPr>
@@ -6800,17 +5468,17 @@
         </p:sp>
         <p:pic>
           <p:nvPicPr>
-            <p:cNvPr id="34" name="Picture: backdoor_logits_infix" descr="Top-1 probability, backdoored model, infix trigger"/>
+            <p:cNvPr id="36" name="Picture: backdoor_logits_infix" descr="Top-1 probability, backdoored model, infix trigger"/>
             <p:cNvPicPr>
               <a:picLocks noChangeAspect="1"/>
             </p:cNvPicPr>
             <p:nvPr/>
           </p:nvPicPr>
           <p:blipFill>
-            <a:blip r:embed="rId27">
+            <a:blip r:embed="rId31">
               <a:extLst>
                 <a:ext uri="{96DAC541-7B7A-43D3-8B79-37D633B846F1}">
-                  <asvg:svgBlip xmlns:asvg="http://schemas.microsoft.com/office/drawing/2016/SVG/main" r:embed="rId28"/>
+                  <asvg:svgBlip xmlns:asvg="http://schemas.microsoft.com/office/drawing/2016/SVG/main" r:embed="rId32"/>
                 </a:ext>
               </a:extLst>
             </a:blip>
@@ -6830,7 +5498,7 @@
         </p:pic>
         <p:sp>
           <p:nvSpPr>
-            <p:cNvPr id="35" name="Panel label: (d) Infix trigger"/>
+            <p:cNvPr id="37" name="Panel label: (d) Infix trigger"/>
             <p:cNvSpPr txBox="1"/>
             <p:nvPr/>
           </p:nvSpPr>
@@ -6888,7 +5556,7 @@
           <mc:Choice Requires="a14">
             <p:sp>
               <p:nvSpPr>
-                <p:cNvPr id="36" name="Caption: Figure 2. (a–b) Attention difference, triggered "/>
+                <p:cNvPr id="38" name="Caption: Figure 2. (a–b) Attention difference, triggered "/>
                 <p:cNvSpPr txBox="1"/>
                 <p:nvPr/>
               </p:nvSpPr>
@@ -7040,7 +5708,7 @@
           <mc:Fallback>
             <p:sp>
               <p:nvSpPr>
-                <p:cNvPr id="36" name="Caption: Figure 2. (a–b) Attention difference, triggered "/>
+                <p:cNvPr id="38" name="Caption: Figure 2. (a–b) Attention difference, triggered "/>
                 <p:cNvSpPr txBox="1">
                   <a:spLocks noRot="1" noChangeAspect="1" noMove="1" noResize="1" noEditPoints="1" noAdjustHandles="1" noChangeArrowheads="1" noChangeShapeType="1" noTextEdit="1"/>
                 </p:cNvSpPr>
@@ -7055,7 +5723,7 @@
                   <a:avLst/>
                 </a:prstGeom>
                 <a:blipFill>
-                  <a:blip r:embed="rId29"/>
+                  <a:blip r:embed="rId33"/>
                   <a:stretch>
                     <a:fillRect/>
                   </a:stretch>
@@ -7078,7 +5746,7 @@
         </mc:AlternateContent>
         <p:sp>
           <p:nvSpPr>
-            <p:cNvPr id="37" name="Insight: Insight 1. Prefix backdoors concentrate attentio"/>
+            <p:cNvPr id="39" name="Insight: Insight 1. Prefix backdoors concentrate attentio"/>
             <p:cNvSpPr/>
             <p:nvPr/>
           </p:nvSpPr>
@@ -7173,7 +5841,7 @@
         </p:sp>
         <p:sp>
           <p:nvSpPr>
-            <p:cNvPr id="38" name="Insight: Insight 1. Prefix backdoors concentrate attentio (rule)"/>
+            <p:cNvPr id="40" name="Insight: Insight 1. Prefix backdoors concentrate attentio (rule)"/>
             <p:cNvSpPr/>
             <p:nvPr/>
           </p:nvSpPr>
@@ -7195,7 +5863,7 @@
         </p:sp>
         <p:sp>
           <p:nvSpPr>
-            <p:cNvPr id="39" name="Insight: Insight 2. Amplified sink attention raises top-1"/>
+            <p:cNvPr id="41" name="Insight: Insight 2. Amplified sink attention raises top-1"/>
             <p:cNvSpPr/>
             <p:nvPr/>
           </p:nvSpPr>
@@ -7290,7 +5958,7 @@
         </p:sp>
         <p:sp>
           <p:nvSpPr>
-            <p:cNvPr id="40" name="Insight: Insight 2. Amplified sink attention raises top-1 (rule)"/>
+            <p:cNvPr id="42" name="Insight: Insight 2. Amplified sink attention raises top-1 (rule)"/>
             <p:cNvSpPr/>
             <p:nvPr/>
           </p:nvSpPr>
@@ -7313,7 +5981,7 @@
       </p:grpSp>
       <p:grpSp>
         <p:nvGrpSpPr>
-          <p:cNvPr id="65" name="Section: How to Enhance It? Value-Norm Alignment"/>
+          <p:cNvPr id="71" name="Section: How to Enhance It? Value-Norm Alignment"/>
           <p:cNvGrpSpPr/>
           <p:nvPr/>
         </p:nvGrpSpPr>
@@ -7327,7 +5995,7 @@
         </p:grpSpPr>
         <p:sp>
           <p:nvSpPr>
-            <p:cNvPr id="41" name="Section title: How to Enhance It? Value-Norm Alignment"/>
+            <p:cNvPr id="43" name="Section title: How to Enhance It? Value-Norm Alignment"/>
             <p:cNvSpPr txBox="1"/>
             <p:nvPr/>
           </p:nvSpPr>
@@ -7409,17 +6077,17 @@
         </p:sp>
         <p:pic>
           <p:nvPicPr>
-            <p:cNvPr id="42" name="Picture: value-norm-correlation" descr="Pearson correlation of sink-token value norms for three comparisons"/>
+            <p:cNvPr id="44" name="Picture: value-norm-correlation" descr="Pearson correlation of sink-token value norms for three comparisons"/>
             <p:cNvPicPr>
               <a:picLocks noChangeAspect="1"/>
             </p:cNvPicPr>
             <p:nvPr/>
           </p:nvPicPr>
           <p:blipFill>
-            <a:blip r:embed="rId30">
+            <a:blip r:embed="rId34">
               <a:extLst>
                 <a:ext uri="{96DAC541-7B7A-43D3-8B79-37D633B846F1}">
-                  <asvg:svgBlip xmlns:asvg="http://schemas.microsoft.com/office/drawing/2016/SVG/main" r:embed="rId31"/>
+                  <asvg:svgBlip xmlns:asvg="http://schemas.microsoft.com/office/drawing/2016/SVG/main" r:embed="rId35"/>
                 </a:ext>
               </a:extLst>
             </a:blip>
@@ -7439,7 +6107,7 @@
         </p:pic>
         <p:sp>
           <p:nvSpPr>
-            <p:cNvPr id="43" name="Caption: Figure 3. Pearson correlation of sink-token valu"/>
+            <p:cNvPr id="45" name="Caption: Figure 3. Pearson correlation of sink-token valu"/>
             <p:cNvSpPr txBox="1"/>
             <p:nvPr/>
           </p:nvSpPr>
@@ -7508,7 +6176,7 @@
           <mc:Choice Requires="a14">
             <p:sp>
               <p:nvSpPr>
-                <p:cNvPr id="44" name="Equations: align with … ⇒ forget align with … ⇒ recover"/>
+                <p:cNvPr id="46" name="Equations: align with … ⇒ forget align with … ⇒ recover"/>
                 <p:cNvSpPr/>
                 <p:nvPr/>
               </p:nvSpPr>
@@ -7535,1370 +6203,12 @@
                 </a:bodyPr>
                 <a:lstStyle/>
                 <a:p>
-                  <a:pPr algn="ctr" marL="0" indent="0">
-                    <a:lnSpc>
-                      <a:spcPct val="100000"/>
-                    </a:lnSpc>
-                    <a:spcBef>
-                      <a:spcPts val="0"/>
-                    </a:spcBef>
-                    <a:spcAft>
-                      <a:spcPts val="0"/>
-                    </a:spcAft>
-                    <a:buNone/>
-                  </a:pPr>
-                  <a14:m>
-                    <m:oMathPara xmlns:m="http://schemas.openxmlformats.org/officeDocument/2006/math">
-                      <m:oMathParaPr>
-                        <m:jc m:val="centerGroup"/>
-                      </m:oMathParaPr>
-                      <m:oMath>
-                        <m:sSub>
-                          <m:sSubPr>
-                            <m:ctrlPr>
-                              <a:rPr lang="en-US" sz="3758" b="0" i="1">
-                                <a:solidFill>
-                                  <a:srgbClr val="111111"/>
-                                </a:solidFill>
-                                <a:latin typeface="Cambria Math" panose="02040503050406030204" pitchFamily="18" charset="0"/>
-                                <a:ea typeface="Cambria Math"/>
-                                <a:cs typeface="Cambria Math"/>
-                              </a:rPr>
-                            </m:ctrlPr>
-                          </m:sSubPr>
-                          <m:e>
-                            <m:r>
-                              <a:rPr lang="en-US" sz="3758" b="0" i="1">
-                                <a:solidFill>
-                                  <a:srgbClr val="111111"/>
-                                </a:solidFill>
-                                <a:latin typeface="Cambria Math" panose="02040503050406030204" pitchFamily="18" charset="0"/>
-                                <a:ea typeface="Cambria Math"/>
-                                <a:cs typeface="Cambria Math"/>
-                              </a:rPr>
-                              <m:t>ℓ</m:t>
-                            </m:r>
-                          </m:e>
-                          <m:sub>
-                            <m:r>
-                              <m:rPr>
-                                <m:sty m:val="p"/>
-                              </m:rPr>
-                              <a:rPr lang="en-US" sz="3758" b="0" i="0">
-                                <a:solidFill>
-                                  <a:srgbClr val="111111"/>
-                                </a:solidFill>
-                                <a:latin typeface="Cambria Math" panose="02040503050406030204" pitchFamily="18" charset="0"/>
-                                <a:ea typeface="Cambria Math"/>
-                                <a:cs typeface="Cambria Math"/>
-                              </a:rPr>
-                              <m:t>v</m:t>
-                            </m:r>
-                            <m:r>
-                              <m:rPr>
-                                <m:sty m:val="p"/>
-                              </m:rPr>
-                              <a:rPr lang="en-US" sz="3758" b="0" i="0">
-                                <a:solidFill>
-                                  <a:srgbClr val="111111"/>
-                                </a:solidFill>
-                                <a:latin typeface="Cambria Math" panose="02040503050406030204" pitchFamily="18" charset="0"/>
-                                <a:ea typeface="Cambria Math"/>
-                                <a:cs typeface="Cambria Math"/>
-                              </a:rPr>
-                              <m:t>n</m:t>
-                            </m:r>
-                          </m:sub>
-                        </m:sSub>
-                        <m:r>
-                          <m:rPr>
-                            <m:sty m:val="p"/>
-                          </m:rPr>
-                          <a:rPr lang="en-US" sz="3758" b="0" i="0">
-                            <a:solidFill>
-                              <a:srgbClr val="111111"/>
-                            </a:solidFill>
-                            <a:latin typeface="Cambria Math" panose="02040503050406030204" pitchFamily="18" charset="0"/>
-                            <a:ea typeface="Cambria Math"/>
-                            <a:cs typeface="Cambria Math"/>
-                          </a:rPr>
-                          <m:t>(</m:t>
-                        </m:r>
-                        <m:r>
-                          <m:rPr>
-                            <m:sty m:val="bi"/>
-                          </m:rPr>
-                          <a:rPr lang="en-US" sz="3758" b="1" i="1">
-                            <a:solidFill>
-                              <a:srgbClr val="111111"/>
-                            </a:solidFill>
-                            <a:latin typeface="Cambria Math" panose="02040503050406030204" pitchFamily="18" charset="0"/>
-                            <a:ea typeface="Cambria Math"/>
-                            <a:cs typeface="Cambria Math"/>
-                          </a:rPr>
-                          <m:t>θ</m:t>
-                        </m:r>
-                        <m:r>
-                          <m:rPr>
-                            <m:sty m:val="p"/>
-                          </m:rPr>
-                          <a:rPr lang="en-US" sz="3758" b="0" i="0">
-                            <a:solidFill>
-                              <a:srgbClr val="111111"/>
-                            </a:solidFill>
-                            <a:latin typeface="Cambria Math" panose="02040503050406030204" pitchFamily="18" charset="0"/>
-                            <a:ea typeface="Cambria Math"/>
-                            <a:cs typeface="Cambria Math"/>
-                          </a:rPr>
-                          <m:t>)</m:t>
-                        </m:r>
-                        <m:r>
-                          <m:rPr>
-                            <m:sty m:val="p"/>
-                          </m:rPr>
-                          <a:rPr lang="en-US" sz="3758" b="0" i="0">
-                            <a:solidFill>
-                              <a:srgbClr val="111111"/>
-                            </a:solidFill>
-                            <a:latin typeface="Cambria Math" panose="02040503050406030204" pitchFamily="18" charset="0"/>
-                            <a:ea typeface="Cambria Math"/>
-                            <a:cs typeface="Cambria Math"/>
-                          </a:rPr>
-                          <m:t>=</m:t>
-                        </m:r>
-                        <m:sSub>
-                          <m:sSubPr>
-                            <m:ctrlPr>
-                              <a:rPr lang="en-US" sz="3758" b="0" i="1">
-                                <a:solidFill>
-                                  <a:srgbClr val="111111"/>
-                                </a:solidFill>
-                                <a:latin typeface="Cambria Math" panose="02040503050406030204" pitchFamily="18" charset="0"/>
-                                <a:ea typeface="Cambria Math"/>
-                                <a:cs typeface="Cambria Math"/>
-                              </a:rPr>
-                            </m:ctrlPr>
-                          </m:sSubPr>
-                          <m:e>
-                            <m:r>
-                              <m:rPr>
-                                <m:scr m:val="double-struck"/>
-                                <m:sty m:val="p"/>
-                              </m:rPr>
-                              <a:rPr lang="en-US" sz="3758" b="0" i="0">
-                                <a:solidFill>
-                                  <a:srgbClr val="111111"/>
-                                </a:solidFill>
-                                <a:latin typeface="Cambria Math" panose="02040503050406030204" pitchFamily="18" charset="0"/>
-                                <a:ea typeface="Cambria Math"/>
-                                <a:cs typeface="Cambria Math"/>
-                              </a:rPr>
-                              <m:t>E</m:t>
-                            </m:r>
-                          </m:e>
-                          <m:sub>
-                            <m:sSub>
-                              <m:sSubPr>
-                                <m:ctrlPr>
-                                  <a:rPr lang="en-US" sz="3758" b="0" i="1">
-                                    <a:solidFill>
-                                      <a:srgbClr val="111111"/>
-                                    </a:solidFill>
-                                    <a:latin typeface="Cambria Math" panose="02040503050406030204" pitchFamily="18" charset="0"/>
-                                    <a:ea typeface="Cambria Math"/>
-                                    <a:cs typeface="Cambria Math"/>
-                                  </a:rPr>
-                                </m:ctrlPr>
-                              </m:sSubPr>
-                              <m:e>
-                                <m:r>
-                                  <m:rPr>
-                                    <m:scr m:val="script"/>
-                                    <m:sty m:val="p"/>
-                                  </m:rPr>
-                                  <a:rPr lang="en-US" sz="3758" b="0" i="0">
-                                    <a:solidFill>
-                                      <a:srgbClr val="111111"/>
-                                    </a:solidFill>
-                                    <a:latin typeface="Cambria Math" panose="02040503050406030204" pitchFamily="18" charset="0"/>
-                                    <a:ea typeface="Cambria Math"/>
-                                    <a:cs typeface="Cambria Math"/>
-                                  </a:rPr>
-                                  <m:t>D</m:t>
-                                </m:r>
-                              </m:e>
-                              <m:sub>
-                                <m:r>
-                                  <m:rPr>
-                                    <m:sty m:val="p"/>
-                                  </m:rPr>
-                                  <a:rPr lang="en-US" sz="3758" b="0" i="0">
-                                    <a:solidFill>
-                                      <a:srgbClr val="111111"/>
-                                    </a:solidFill>
-                                    <a:latin typeface="Cambria Math" panose="02040503050406030204" pitchFamily="18" charset="0"/>
-                                    <a:ea typeface="Cambria Math"/>
-                                    <a:cs typeface="Cambria Math"/>
-                                  </a:rPr>
-                                  <m:t>f</m:t>
-                                </m:r>
-                              </m:sub>
-                            </m:sSub>
-                          </m:sub>
-                        </m:sSub>
-                        <m:d>
-                          <m:dPr>
-                            <m:begChr m:val="["/>
-                            <m:sepChr m:val=""/>
-                            <m:endChr m:val="]"/>
-                            <m:grow/>
-                            <m:ctrlPr>
-                              <a:rPr lang="en-US" sz="3758" b="0" i="1">
-                                <a:solidFill>
-                                  <a:srgbClr val="111111"/>
-                                </a:solidFill>
-                                <a:latin typeface="Cambria Math" panose="02040503050406030204" pitchFamily="18" charset="0"/>
-                                <a:ea typeface="Cambria Math"/>
-                                <a:cs typeface="Cambria Math"/>
-                              </a:rPr>
-                            </m:ctrlPr>
-                          </m:dPr>
-                          <m:e>
-                            <m:sSub>
-                              <m:sSubPr>
-                                <m:ctrlPr>
-                                  <a:rPr lang="en-US" sz="3758" b="0" i="1">
-                                    <a:solidFill>
-                                      <a:srgbClr val="111111"/>
-                                    </a:solidFill>
-                                    <a:latin typeface="Cambria Math" panose="02040503050406030204" pitchFamily="18" charset="0"/>
-                                    <a:ea typeface="Cambria Math"/>
-                                    <a:cs typeface="Cambria Math"/>
-                                  </a:rPr>
-                                </m:ctrlPr>
-                              </m:sSubPr>
-                              <m:e>
-                                <m:r>
-                                  <m:rPr>
-                                    <m:sty m:val="p"/>
-                                  </m:rPr>
-                                  <a:rPr lang="en-US" sz="3758" b="0" i="0">
-                                    <a:solidFill>
-                                      <a:srgbClr val="111111"/>
-                                    </a:solidFill>
-                                    <a:latin typeface="Cambria Math" panose="02040503050406030204" pitchFamily="18" charset="0"/>
-                                    <a:ea typeface="Cambria Math"/>
-                                    <a:cs typeface="Cambria Math"/>
-                                  </a:rPr>
-                                  <m:t>Δ</m:t>
-                                </m:r>
-                              </m:e>
-                              <m:sub>
-                                <m:sSub>
-                                  <m:sSubPr>
-                                    <m:ctrlPr>
-                                      <a:rPr lang="en-US" sz="3758" b="0" i="1">
-                                        <a:solidFill>
-                                          <a:srgbClr val="111111"/>
-                                        </a:solidFill>
-                                        <a:latin typeface="Cambria Math" panose="02040503050406030204" pitchFamily="18" charset="0"/>
-                                        <a:ea typeface="Cambria Math"/>
-                                        <a:cs typeface="Cambria Math"/>
-                                      </a:rPr>
-                                    </m:ctrlPr>
-                                  </m:sSubPr>
-                                  <m:e>
-                                    <m:r>
-                                      <m:rPr>
-                                        <m:scr m:val="script"/>
-                                        <m:sty m:val="p"/>
-                                      </m:rPr>
-                                      <a:rPr lang="en-US" sz="3758" b="0" i="0">
-                                        <a:solidFill>
-                                          <a:srgbClr val="111111"/>
-                                        </a:solidFill>
-                                        <a:latin typeface="Cambria Math" panose="02040503050406030204" pitchFamily="18" charset="0"/>
-                                        <a:ea typeface="Cambria Math"/>
-                                        <a:cs typeface="Cambria Math"/>
-                                      </a:rPr>
-                                      <m:t>D</m:t>
-                                    </m:r>
-                                  </m:e>
-                                  <m:sub>
-                                    <m:r>
-                                      <m:rPr>
-                                        <m:sty m:val="p"/>
-                                      </m:rPr>
-                                      <a:rPr lang="en-US" sz="3758" b="0" i="0">
-                                        <a:solidFill>
-                                          <a:srgbClr val="111111"/>
-                                        </a:solidFill>
-                                        <a:latin typeface="Cambria Math" panose="02040503050406030204" pitchFamily="18" charset="0"/>
-                                        <a:ea typeface="Cambria Math"/>
-                                        <a:cs typeface="Cambria Math"/>
-                                      </a:rPr>
-                                      <m:t>f</m:t>
-                                    </m:r>
-                                  </m:sub>
-                                </m:sSub>
-                              </m:sub>
-                            </m:sSub>
-                            <m:r>
-                              <m:rPr>
-                                <m:sty m:val="p"/>
-                              </m:rPr>
-                              <a:rPr lang="en-US" sz="3758" b="0" i="0">
-                                <a:solidFill>
-                                  <a:srgbClr val="111111"/>
-                                </a:solidFill>
-                                <a:latin typeface="Cambria Math" panose="02040503050406030204" pitchFamily="18" charset="0"/>
-                                <a:ea typeface="Cambria Math"/>
-                                <a:cs typeface="Cambria Math"/>
-                              </a:rPr>
-                              <m:t>(</m:t>
-                            </m:r>
-                            <m:r>
-                              <m:rPr>
-                                <m:sty m:val="b"/>
-                              </m:rPr>
-                              <a:rPr lang="en-US" sz="3758" b="1" i="0">
-                                <a:solidFill>
-                                  <a:srgbClr val="111111"/>
-                                </a:solidFill>
-                                <a:latin typeface="Cambria Math" panose="02040503050406030204" pitchFamily="18" charset="0"/>
-                                <a:ea typeface="Cambria Math"/>
-                                <a:cs typeface="Cambria Math"/>
-                              </a:rPr>
-                              <m:t>x</m:t>
-                            </m:r>
-                            <m:r>
-                              <m:rPr>
-                                <m:sty m:val="p"/>
-                              </m:rPr>
-                              <a:rPr lang="en-US" sz="3758" b="0" i="0">
-                                <a:solidFill>
-                                  <a:srgbClr val="111111"/>
-                                </a:solidFill>
-                                <a:latin typeface="Cambria Math" panose="02040503050406030204" pitchFamily="18" charset="0"/>
-                                <a:ea typeface="Cambria Math"/>
-                                <a:cs typeface="Cambria Math"/>
-                              </a:rPr>
-                              <m:t>;</m:t>
-                            </m:r>
-                            <m:r>
-                              <m:rPr>
-                                <m:sty m:val="bi"/>
-                              </m:rPr>
-                              <a:rPr lang="en-US" sz="3758" b="1" i="1">
-                                <a:solidFill>
-                                  <a:srgbClr val="111111"/>
-                                </a:solidFill>
-                                <a:latin typeface="Cambria Math" panose="02040503050406030204" pitchFamily="18" charset="0"/>
-                                <a:ea typeface="Cambria Math"/>
-                                <a:cs typeface="Cambria Math"/>
-                              </a:rPr>
-                              <m:t>θ</m:t>
-                            </m:r>
-                            <m:r>
-                              <m:rPr>
-                                <m:sty m:val="p"/>
-                              </m:rPr>
-                              <a:rPr lang="en-US" sz="3758" b="0" i="0">
-                                <a:solidFill>
-                                  <a:srgbClr val="111111"/>
-                                </a:solidFill>
-                                <a:latin typeface="Cambria Math" panose="02040503050406030204" pitchFamily="18" charset="0"/>
-                                <a:ea typeface="Cambria Math"/>
-                                <a:cs typeface="Cambria Math"/>
-                              </a:rPr>
-                              <m:t>)</m:t>
-                            </m:r>
-                          </m:e>
-                        </m:d>
-                        <m:r>
-                          <m:rPr>
-                            <m:sty m:val="p"/>
-                          </m:rPr>
-                          <a:rPr lang="en-US" sz="3758" b="0" i="0">
-                            <a:solidFill>
-                              <a:srgbClr val="111111"/>
-                            </a:solidFill>
-                            <a:latin typeface="Cambria Math" panose="02040503050406030204" pitchFamily="18" charset="0"/>
-                            <a:ea typeface="Cambria Math"/>
-                            <a:cs typeface="Cambria Math"/>
-                          </a:rPr>
-                          <m:t>+</m:t>
-                        </m:r>
-                        <m:sSub>
-                          <m:sSubPr>
-                            <m:ctrlPr>
-                              <a:rPr lang="en-US" sz="3758" b="0" i="1">
-                                <a:solidFill>
-                                  <a:srgbClr val="111111"/>
-                                </a:solidFill>
-                                <a:latin typeface="Cambria Math" panose="02040503050406030204" pitchFamily="18" charset="0"/>
-                                <a:ea typeface="Cambria Math"/>
-                                <a:cs typeface="Cambria Math"/>
-                              </a:rPr>
-                            </m:ctrlPr>
-                          </m:sSubPr>
-                          <m:e>
-                            <m:r>
-                              <m:rPr>
-                                <m:scr m:val="double-struck"/>
-                                <m:sty m:val="p"/>
-                              </m:rPr>
-                              <a:rPr lang="en-US" sz="3758" b="0" i="0">
-                                <a:solidFill>
-                                  <a:srgbClr val="111111"/>
-                                </a:solidFill>
-                                <a:latin typeface="Cambria Math" panose="02040503050406030204" pitchFamily="18" charset="0"/>
-                                <a:ea typeface="Cambria Math"/>
-                                <a:cs typeface="Cambria Math"/>
-                              </a:rPr>
-                              <m:t>E</m:t>
-                            </m:r>
-                          </m:e>
-                          <m:sub>
-                            <m:sSub>
-                              <m:sSubPr>
-                                <m:ctrlPr>
-                                  <a:rPr lang="en-US" sz="3758" b="0" i="1">
-                                    <a:solidFill>
-                                      <a:srgbClr val="111111"/>
-                                    </a:solidFill>
-                                    <a:latin typeface="Cambria Math" panose="02040503050406030204" pitchFamily="18" charset="0"/>
-                                    <a:ea typeface="Cambria Math"/>
-                                    <a:cs typeface="Cambria Math"/>
-                                  </a:rPr>
-                                </m:ctrlPr>
-                              </m:sSubPr>
-                              <m:e>
-                                <m:r>
-                                  <m:rPr>
-                                    <m:scr m:val="script"/>
-                                    <m:sty m:val="p"/>
-                                  </m:rPr>
-                                  <a:rPr lang="en-US" sz="3758" b="0" i="0">
-                                    <a:solidFill>
-                                      <a:srgbClr val="111111"/>
-                                    </a:solidFill>
-                                    <a:latin typeface="Cambria Math" panose="02040503050406030204" pitchFamily="18" charset="0"/>
-                                    <a:ea typeface="Cambria Math"/>
-                                    <a:cs typeface="Cambria Math"/>
-                                  </a:rPr>
-                                  <m:t>D</m:t>
-                                </m:r>
-                              </m:e>
-                              <m:sub>
-                                <m:r>
-                                  <m:rPr>
-                                    <m:sty m:val="p"/>
-                                  </m:rPr>
-                                  <a:rPr lang="en-US" sz="3758" b="0" i="0">
-                                    <a:solidFill>
-                                      <a:srgbClr val="111111"/>
-                                    </a:solidFill>
-                                    <a:latin typeface="Cambria Math" panose="02040503050406030204" pitchFamily="18" charset="0"/>
-                                    <a:ea typeface="Cambria Math"/>
-                                    <a:cs typeface="Cambria Math"/>
-                                  </a:rPr>
-                                  <m:t>p</m:t>
-                                </m:r>
-                              </m:sub>
-                            </m:sSub>
-                          </m:sub>
-                        </m:sSub>
-                        <m:d>
-                          <m:dPr>
-                            <m:begChr m:val="["/>
-                            <m:sepChr m:val=""/>
-                            <m:endChr m:val="]"/>
-                            <m:grow/>
-                            <m:ctrlPr>
-                              <a:rPr lang="en-US" sz="3758" b="0" i="1">
-                                <a:solidFill>
-                                  <a:srgbClr val="111111"/>
-                                </a:solidFill>
-                                <a:latin typeface="Cambria Math" panose="02040503050406030204" pitchFamily="18" charset="0"/>
-                                <a:ea typeface="Cambria Math"/>
-                                <a:cs typeface="Cambria Math"/>
-                              </a:rPr>
-                            </m:ctrlPr>
-                          </m:dPr>
-                          <m:e>
-                            <m:sSub>
-                              <m:sSubPr>
-                                <m:ctrlPr>
-                                  <a:rPr lang="en-US" sz="3758" b="0" i="1">
-                                    <a:solidFill>
-                                      <a:srgbClr val="111111"/>
-                                    </a:solidFill>
-                                    <a:latin typeface="Cambria Math" panose="02040503050406030204" pitchFamily="18" charset="0"/>
-                                    <a:ea typeface="Cambria Math"/>
-                                    <a:cs typeface="Cambria Math"/>
-                                  </a:rPr>
-                                </m:ctrlPr>
-                              </m:sSubPr>
-                              <m:e>
-                                <m:r>
-                                  <m:rPr>
-                                    <m:sty m:val="p"/>
-                                  </m:rPr>
-                                  <a:rPr lang="en-US" sz="3758" b="0" i="0">
-                                    <a:solidFill>
-                                      <a:srgbClr val="111111"/>
-                                    </a:solidFill>
-                                    <a:latin typeface="Cambria Math" panose="02040503050406030204" pitchFamily="18" charset="0"/>
-                                    <a:ea typeface="Cambria Math"/>
-                                    <a:cs typeface="Cambria Math"/>
-                                  </a:rPr>
-                                  <m:t>Δ</m:t>
-                                </m:r>
-                              </m:e>
-                              <m:sub>
-                                <m:sSub>
-                                  <m:sSubPr>
-                                    <m:ctrlPr>
-                                      <a:rPr lang="en-US" sz="3758" b="0" i="1">
-                                        <a:solidFill>
-                                          <a:srgbClr val="111111"/>
-                                        </a:solidFill>
-                                        <a:latin typeface="Cambria Math" panose="02040503050406030204" pitchFamily="18" charset="0"/>
-                                        <a:ea typeface="Cambria Math"/>
-                                        <a:cs typeface="Cambria Math"/>
-                                      </a:rPr>
-                                    </m:ctrlPr>
-                                  </m:sSubPr>
-                                  <m:e>
-                                    <m:r>
-                                      <m:rPr>
-                                        <m:scr m:val="script"/>
-                                        <m:sty m:val="p"/>
-                                      </m:rPr>
-                                      <a:rPr lang="en-US" sz="3758" b="0" i="0">
-                                        <a:solidFill>
-                                          <a:srgbClr val="111111"/>
-                                        </a:solidFill>
-                                        <a:latin typeface="Cambria Math" panose="02040503050406030204" pitchFamily="18" charset="0"/>
-                                        <a:ea typeface="Cambria Math"/>
-                                        <a:cs typeface="Cambria Math"/>
-                                      </a:rPr>
-                                      <m:t>D</m:t>
-                                    </m:r>
-                                  </m:e>
-                                  <m:sub>
-                                    <m:r>
-                                      <m:rPr>
-                                        <m:sty m:val="p"/>
-                                      </m:rPr>
-                                      <a:rPr lang="en-US" sz="3758" b="0" i="0">
-                                        <a:solidFill>
-                                          <a:srgbClr val="111111"/>
-                                        </a:solidFill>
-                                        <a:latin typeface="Cambria Math" panose="02040503050406030204" pitchFamily="18" charset="0"/>
-                                        <a:ea typeface="Cambria Math"/>
-                                        <a:cs typeface="Cambria Math"/>
-                                      </a:rPr>
-                                      <m:t>p</m:t>
-                                    </m:r>
-                                  </m:sub>
-                                </m:sSub>
-                              </m:sub>
-                            </m:sSub>
-                            <m:r>
-                              <m:rPr>
-                                <m:sty m:val="p"/>
-                              </m:rPr>
-                              <a:rPr lang="en-US" sz="3758" b="0" i="0">
-                                <a:solidFill>
-                                  <a:srgbClr val="111111"/>
-                                </a:solidFill>
-                                <a:latin typeface="Cambria Math" panose="02040503050406030204" pitchFamily="18" charset="0"/>
-                                <a:ea typeface="Cambria Math"/>
-                                <a:cs typeface="Cambria Math"/>
-                              </a:rPr>
-                              <m:t>(</m:t>
-                            </m:r>
-                            <m:r>
-                              <m:rPr>
-                                <m:sty m:val="b"/>
-                              </m:rPr>
-                              <a:rPr lang="en-US" sz="3758" b="1" i="0">
-                                <a:solidFill>
-                                  <a:srgbClr val="111111"/>
-                                </a:solidFill>
-                                <a:latin typeface="Cambria Math" panose="02040503050406030204" pitchFamily="18" charset="0"/>
-                                <a:ea typeface="Cambria Math"/>
-                                <a:cs typeface="Cambria Math"/>
-                              </a:rPr>
-                              <m:t>x</m:t>
-                            </m:r>
-                            <m:r>
-                              <m:rPr>
-                                <m:sty m:val="p"/>
-                              </m:rPr>
-                              <a:rPr lang="en-US" sz="3758" b="0" i="0">
-                                <a:solidFill>
-                                  <a:srgbClr val="111111"/>
-                                </a:solidFill>
-                                <a:latin typeface="Cambria Math" panose="02040503050406030204" pitchFamily="18" charset="0"/>
-                                <a:ea typeface="Cambria Math"/>
-                                <a:cs typeface="Cambria Math"/>
-                              </a:rPr>
-                              <m:t>;</m:t>
-                            </m:r>
-                            <m:r>
-                              <m:rPr>
-                                <m:sty m:val="bi"/>
-                              </m:rPr>
-                              <a:rPr lang="en-US" sz="3758" b="1" i="1">
-                                <a:solidFill>
-                                  <a:srgbClr val="111111"/>
-                                </a:solidFill>
-                                <a:latin typeface="Cambria Math" panose="02040503050406030204" pitchFamily="18" charset="0"/>
-                                <a:ea typeface="Cambria Math"/>
-                                <a:cs typeface="Cambria Math"/>
-                              </a:rPr>
-                              <m:t>θ</m:t>
-                            </m:r>
-                            <m:r>
-                              <m:rPr>
-                                <m:sty m:val="p"/>
-                              </m:rPr>
-                              <a:rPr lang="en-US" sz="3758" b="0" i="0">
-                                <a:solidFill>
-                                  <a:srgbClr val="111111"/>
-                                </a:solidFill>
-                                <a:latin typeface="Cambria Math" panose="02040503050406030204" pitchFamily="18" charset="0"/>
-                                <a:ea typeface="Cambria Math"/>
-                                <a:cs typeface="Cambria Math"/>
-                              </a:rPr>
-                              <m:t>)</m:t>
-                            </m:r>
-                          </m:e>
-                        </m:d>
-                      </m:oMath>
-                    </m:oMathPara>
-                  </a14:m>
-                  <a:endParaRPr lang="en-US" sz="3758" b="0" i="0" kern="100" dirty="0">
-                    <a:solidFill>
-                      <a:srgbClr val="111111"/>
-                    </a:solidFill>
-                    <a:latin typeface="EB Garamond"/>
-                    <a:ea typeface="EB Garamond"/>
-                    <a:cs typeface="EB Garamond"/>
-                  </a:endParaRPr>
-                </a:p>
-                <a:p>
-                  <a:pPr algn="ctr" marL="0" indent="0">
-                    <a:lnSpc>
-                      <a:spcPct val="100000"/>
-                    </a:lnSpc>
-                    <a:spcBef>
-                      <a:spcPts val="907"/>
-                    </a:spcBef>
-                    <a:spcAft>
-                      <a:spcPts val="0"/>
-                    </a:spcAft>
-                    <a:buNone/>
-                  </a:pPr>
-                  <a14:m>
-                    <m:oMath xmlns:m="http://schemas.openxmlformats.org/officeDocument/2006/math">
-                      <m:sSub>
-                        <m:sSubPr>
-                          <m:ctrlPr>
-                            <a:rPr lang="en-US" sz="3758" b="0" i="1">
-                              <a:solidFill>
-                                <a:srgbClr val="111111"/>
-                              </a:solidFill>
-                              <a:latin typeface="Cambria Math" panose="02040503050406030204" pitchFamily="18" charset="0"/>
-                              <a:ea typeface="Cambria Math"/>
-                              <a:cs typeface="Cambria Math"/>
-                            </a:rPr>
-                          </m:ctrlPr>
-                        </m:sSubPr>
-                        <m:e>
-                          <m:r>
-                            <m:rPr>
-                              <m:sty m:val="p"/>
-                            </m:rPr>
-                            <a:rPr lang="en-US" sz="3758" b="0" i="0">
-                              <a:solidFill>
-                                <a:srgbClr val="111111"/>
-                              </a:solidFill>
-                              <a:latin typeface="Cambria Math" panose="02040503050406030204" pitchFamily="18" charset="0"/>
-                              <a:ea typeface="Cambria Math"/>
-                              <a:cs typeface="Cambria Math"/>
-                            </a:rPr>
-                            <m:t>Δ</m:t>
-                          </m:r>
-                        </m:e>
-                        <m:sub>
-                          <m:sSub>
-                            <m:sSubPr>
-                              <m:ctrlPr>
-                                <a:rPr lang="en-US" sz="3758" b="0" i="1">
-                                  <a:solidFill>
-                                    <a:srgbClr val="111111"/>
-                                  </a:solidFill>
-                                  <a:latin typeface="Cambria Math" panose="02040503050406030204" pitchFamily="18" charset="0"/>
-                                  <a:ea typeface="Cambria Math"/>
-                                  <a:cs typeface="Cambria Math"/>
-                                </a:rPr>
-                              </m:ctrlPr>
-                            </m:sSubPr>
-                            <m:e>
-                              <m:r>
-                                <m:rPr>
-                                  <m:scr m:val="script"/>
-                                  <m:sty m:val="p"/>
-                                </m:rPr>
-                                <a:rPr lang="en-US" sz="3758" b="0" i="0">
-                                  <a:solidFill>
-                                    <a:srgbClr val="111111"/>
-                                  </a:solidFill>
-                                  <a:latin typeface="Cambria Math" panose="02040503050406030204" pitchFamily="18" charset="0"/>
-                                  <a:ea typeface="Cambria Math"/>
-                                  <a:cs typeface="Cambria Math"/>
-                                </a:rPr>
-                                <m:t>D</m:t>
-                              </m:r>
-                            </m:e>
-                            <m:sub>
-                              <m:r>
-                                <m:rPr>
-                                  <m:sty m:val="p"/>
-                                </m:rPr>
-                                <a:rPr lang="en-US" sz="3758" b="0" i="0">
-                                  <a:solidFill>
-                                    <a:srgbClr val="111111"/>
-                                  </a:solidFill>
-                                  <a:latin typeface="Cambria Math" panose="02040503050406030204" pitchFamily="18" charset="0"/>
-                                  <a:ea typeface="Cambria Math"/>
-                                  <a:cs typeface="Cambria Math"/>
-                                </a:rPr>
-                                <m:t>f</m:t>
-                              </m:r>
-                            </m:sub>
-                          </m:sSub>
-                        </m:sub>
-                      </m:sSub>
-                      <m:r>
-                        <m:rPr>
-                          <m:sty m:val="p"/>
-                        </m:rPr>
-                        <a:rPr lang="en-US" sz="3758" b="0" i="0">
-                          <a:solidFill>
-                            <a:srgbClr val="111111"/>
-                          </a:solidFill>
-                          <a:latin typeface="Cambria Math" panose="02040503050406030204" pitchFamily="18" charset="0"/>
-                          <a:ea typeface="Cambria Math"/>
-                          <a:cs typeface="Cambria Math"/>
-                        </a:rPr>
-                        <m:t>=</m:t>
-                      </m:r>
-                      <m:f>
-                        <m:fPr>
-                          <m:type m:val="bar"/>
-                          <m:ctrlPr>
-                            <a:rPr lang="en-US" sz="3758" b="0" i="1">
-                              <a:solidFill>
-                                <a:srgbClr val="111111"/>
-                              </a:solidFill>
-                              <a:latin typeface="Cambria Math" panose="02040503050406030204" pitchFamily="18" charset="0"/>
-                              <a:ea typeface="Cambria Math"/>
-                              <a:cs typeface="Cambria Math"/>
-                            </a:rPr>
-                          </m:ctrlPr>
-                        </m:fPr>
-                        <m:num>
-                          <m:r>
-                            <a:rPr lang="en-US" sz="3758" b="0" i="1">
-                              <a:solidFill>
-                                <a:srgbClr val="111111"/>
-                              </a:solidFill>
-                              <a:latin typeface="Cambria Math" panose="02040503050406030204" pitchFamily="18" charset="0"/>
-                              <a:ea typeface="Cambria Math"/>
-                              <a:cs typeface="Cambria Math"/>
-                            </a:rPr>
-                            <m:t>1</m:t>
-                          </m:r>
-                        </m:num>
-                        <m:den>
-                          <m:r>
-                            <m:rPr>
-                              <m:sty m:val="p"/>
-                            </m:rPr>
-                            <a:rPr lang="en-US" sz="3758" b="0" i="0">
-                              <a:solidFill>
-                                <a:srgbClr val="111111"/>
-                              </a:solidFill>
-                              <a:latin typeface="Cambria Math" panose="02040503050406030204" pitchFamily="18" charset="0"/>
-                              <a:ea typeface="Cambria Math"/>
-                              <a:cs typeface="Cambria Math"/>
-                            </a:rPr>
-                            <m:t>|</m:t>
-                          </m:r>
-                          <m:r>
-                            <m:rPr>
-                              <m:scr m:val="script"/>
-                              <m:sty m:val="p"/>
-                            </m:rPr>
-                            <a:rPr lang="en-US" sz="3758" b="0" i="0">
-                              <a:solidFill>
-                                <a:srgbClr val="111111"/>
-                              </a:solidFill>
-                              <a:latin typeface="Cambria Math" panose="02040503050406030204" pitchFamily="18" charset="0"/>
-                              <a:ea typeface="Cambria Math"/>
-                              <a:cs typeface="Cambria Math"/>
-                            </a:rPr>
-                            <m:t>S</m:t>
-                          </m:r>
-                          <m:r>
-                            <m:rPr>
-                              <m:sty m:val="p"/>
-                            </m:rPr>
-                            <a:rPr lang="en-US" sz="3758" b="0" i="0">
-                              <a:solidFill>
-                                <a:srgbClr val="111111"/>
-                              </a:solidFill>
-                              <a:latin typeface="Cambria Math" panose="02040503050406030204" pitchFamily="18" charset="0"/>
-                              <a:ea typeface="Cambria Math"/>
-                              <a:cs typeface="Cambria Math"/>
-                            </a:rPr>
-                            <m:t>|</m:t>
-                          </m:r>
-                        </m:den>
-                      </m:f>
-                      <m:nary>
-                        <m:naryPr>
-                          <m:chr m:val="∑"/>
-                          <m:limLoc m:val="subSup"/>
-                          <m:subHide m:val="off"/>
-                          <m:supHide m:val="on"/>
-                          <m:ctrlPr>
-                            <a:rPr lang="en-US" sz="3758" b="0" i="1">
-                              <a:solidFill>
-                                <a:srgbClr val="111111"/>
-                              </a:solidFill>
-                              <a:latin typeface="Cambria Math" panose="02040503050406030204" pitchFamily="18" charset="0"/>
-                              <a:ea typeface="Cambria Math"/>
-                              <a:cs typeface="Cambria Math"/>
-                            </a:rPr>
-                          </m:ctrlPr>
-                        </m:naryPr>
-                        <m:sub>
-                          <m:r>
-                            <a:rPr lang="en-US" sz="3758" b="0" i="1">
-                              <a:solidFill>
-                                <a:srgbClr val="111111"/>
-                              </a:solidFill>
-                              <a:latin typeface="Cambria Math" panose="02040503050406030204" pitchFamily="18" charset="0"/>
-                              <a:ea typeface="Cambria Math"/>
-                              <a:cs typeface="Cambria Math"/>
-                            </a:rPr>
-                            <m:t>i</m:t>
-                          </m:r>
-                          <m:r>
-                            <m:rPr>
-                              <m:sty m:val="p"/>
-                            </m:rPr>
-                            <a:rPr lang="en-US" sz="3758" b="0" i="0">
-                              <a:solidFill>
-                                <a:srgbClr val="111111"/>
-                              </a:solidFill>
-                              <a:latin typeface="Cambria Math" panose="02040503050406030204" pitchFamily="18" charset="0"/>
-                              <a:ea typeface="Cambria Math"/>
-                              <a:cs typeface="Cambria Math"/>
-                            </a:rPr>
-                            <m:t>∈</m:t>
-                          </m:r>
-                          <m:r>
-                            <m:rPr>
-                              <m:scr m:val="script"/>
-                              <m:sty m:val="p"/>
-                            </m:rPr>
-                            <a:rPr lang="en-US" sz="3758" b="0" i="0">
-                              <a:solidFill>
-                                <a:srgbClr val="111111"/>
-                              </a:solidFill>
-                              <a:latin typeface="Cambria Math" panose="02040503050406030204" pitchFamily="18" charset="0"/>
-                              <a:ea typeface="Cambria Math"/>
-                              <a:cs typeface="Cambria Math"/>
-                            </a:rPr>
-                            <m:t>S</m:t>
-                          </m:r>
-                        </m:sub>
-                        <m:sup>
-                          <m:r>
-                            <a:rPr lang="en-US" sz="3758" b="0" i="1">
-                              <a:solidFill>
-                                <a:srgbClr val="111111"/>
-                              </a:solidFill>
-                              <a:latin typeface="Cambria Math" panose="02040503050406030204" pitchFamily="18" charset="0"/>
-                              <a:ea typeface="Cambria Math"/>
-                              <a:cs typeface="Cambria Math"/>
-                            </a:rPr>
-                            <m:t>​</m:t>
-                          </m:r>
-                        </m:sup>
-                        <m:e>
-                          <m:sSup>
-                            <m:sSupPr>
-                              <m:ctrlPr>
-                                <a:rPr lang="en-US" sz="3758" b="0" i="1">
-                                  <a:solidFill>
-                                    <a:srgbClr val="111111"/>
-                                  </a:solidFill>
-                                  <a:latin typeface="Cambria Math" panose="02040503050406030204" pitchFamily="18" charset="0"/>
-                                  <a:ea typeface="Cambria Math"/>
-                                  <a:cs typeface="Cambria Math"/>
-                                </a:rPr>
-                              </m:ctrlPr>
-                            </m:sSupPr>
-                            <m:e>
-                              <m:d>
-                                <m:dPr>
-                                  <m:begChr m:val="("/>
-                                  <m:sepChr m:val=""/>
-                                  <m:endChr m:val=")"/>
-                                  <m:grow/>
-                                  <m:ctrlPr>
-                                    <a:rPr lang="en-US" sz="3758" b="0" i="1">
-                                      <a:solidFill>
-                                        <a:srgbClr val="111111"/>
-                                      </a:solidFill>
-                                      <a:latin typeface="Cambria Math" panose="02040503050406030204" pitchFamily="18" charset="0"/>
-                                      <a:ea typeface="Cambria Math"/>
-                                      <a:cs typeface="Cambria Math"/>
-                                    </a:rPr>
-                                  </m:ctrlPr>
-                                </m:dPr>
-                                <m:e>
-                                  <m:r>
-                                    <m:rPr>
-                                      <m:sty m:val="p"/>
-                                    </m:rPr>
-                                    <a:rPr lang="en-US" sz="3758" b="0" i="0">
-                                      <a:solidFill>
-                                        <a:srgbClr val="111111"/>
-                                      </a:solidFill>
-                                      <a:latin typeface="Cambria Math" panose="02040503050406030204" pitchFamily="18" charset="0"/>
-                                      <a:ea typeface="Cambria Math"/>
-                                      <a:cs typeface="Cambria Math"/>
-                                    </a:rPr>
-                                    <m:t>∥</m:t>
-                                  </m:r>
-                                  <m:sSub>
-                                    <m:sSubPr>
-                                      <m:ctrlPr>
-                                        <a:rPr lang="en-US" sz="3758" b="0" i="1">
-                                          <a:solidFill>
-                                            <a:srgbClr val="111111"/>
-                                          </a:solidFill>
-                                          <a:latin typeface="Cambria Math" panose="02040503050406030204" pitchFamily="18" charset="0"/>
-                                          <a:ea typeface="Cambria Math"/>
-                                          <a:cs typeface="Cambria Math"/>
-                                        </a:rPr>
-                                      </m:ctrlPr>
-                                    </m:sSubPr>
-                                    <m:e>
-                                      <m:r>
-                                        <m:rPr>
-                                          <m:sty m:val="b"/>
-                                        </m:rPr>
-                                        <a:rPr lang="en-US" sz="3758" b="1" i="0">
-                                          <a:solidFill>
-                                            <a:srgbClr val="111111"/>
-                                          </a:solidFill>
-                                          <a:latin typeface="Cambria Math" panose="02040503050406030204" pitchFamily="18" charset="0"/>
-                                          <a:ea typeface="Cambria Math"/>
-                                          <a:cs typeface="Cambria Math"/>
-                                        </a:rPr>
-                                        <m:t>v</m:t>
-                                      </m:r>
-                                    </m:e>
-                                    <m:sub>
-                                      <m:r>
-                                        <a:rPr lang="en-US" sz="3758" b="0" i="1">
-                                          <a:solidFill>
-                                            <a:srgbClr val="111111"/>
-                                          </a:solidFill>
-                                          <a:latin typeface="Cambria Math" panose="02040503050406030204" pitchFamily="18" charset="0"/>
-                                          <a:ea typeface="Cambria Math"/>
-                                          <a:cs typeface="Cambria Math"/>
-                                        </a:rPr>
-                                        <m:t>i</m:t>
-                                      </m:r>
-                                    </m:sub>
-                                  </m:sSub>
-                                  <m:r>
-                                    <m:rPr>
-                                      <m:sty m:val="p"/>
-                                    </m:rPr>
-                                    <a:rPr lang="en-US" sz="3758" b="0" i="0">
-                                      <a:solidFill>
-                                        <a:srgbClr val="111111"/>
-                                      </a:solidFill>
-                                      <a:latin typeface="Cambria Math" panose="02040503050406030204" pitchFamily="18" charset="0"/>
-                                      <a:ea typeface="Cambria Math"/>
-                                      <a:cs typeface="Cambria Math"/>
-                                    </a:rPr>
-                                    <m:t>(</m:t>
-                                  </m:r>
-                                  <m:r>
-                                    <m:rPr>
-                                      <m:sty m:val="b"/>
-                                    </m:rPr>
-                                    <a:rPr lang="en-US" sz="3758" b="1" i="0">
-                                      <a:solidFill>
-                                        <a:srgbClr val="111111"/>
-                                      </a:solidFill>
-                                      <a:latin typeface="Cambria Math" panose="02040503050406030204" pitchFamily="18" charset="0"/>
-                                      <a:ea typeface="Cambria Math"/>
-                                      <a:cs typeface="Cambria Math"/>
-                                    </a:rPr>
-                                    <m:t>x</m:t>
-                                  </m:r>
-                                  <m:r>
-                                    <m:rPr>
-                                      <m:sty m:val="p"/>
-                                    </m:rPr>
-                                    <a:rPr lang="en-US" sz="3758" b="0" i="0">
-                                      <a:solidFill>
-                                        <a:srgbClr val="111111"/>
-                                      </a:solidFill>
-                                      <a:latin typeface="Cambria Math" panose="02040503050406030204" pitchFamily="18" charset="0"/>
-                                      <a:ea typeface="Cambria Math"/>
-                                      <a:cs typeface="Cambria Math"/>
-                                    </a:rPr>
-                                    <m:t>;</m:t>
-                                  </m:r>
-                                  <m:r>
-                                    <m:rPr>
-                                      <m:sty m:val="bi"/>
-                                    </m:rPr>
-                                    <a:rPr lang="en-US" sz="3758" b="1" i="1">
-                                      <a:solidFill>
-                                        <a:srgbClr val="111111"/>
-                                      </a:solidFill>
-                                      <a:latin typeface="Cambria Math" panose="02040503050406030204" pitchFamily="18" charset="0"/>
-                                      <a:ea typeface="Cambria Math"/>
-                                      <a:cs typeface="Cambria Math"/>
-                                    </a:rPr>
-                                    <m:t>θ</m:t>
-                                  </m:r>
-                                  <m:r>
-                                    <m:rPr>
-                                      <m:sty m:val="p"/>
-                                    </m:rPr>
-                                    <a:rPr lang="en-US" sz="3758" b="0" i="0">
-                                      <a:solidFill>
-                                        <a:srgbClr val="111111"/>
-                                      </a:solidFill>
-                                      <a:latin typeface="Cambria Math" panose="02040503050406030204" pitchFamily="18" charset="0"/>
-                                      <a:ea typeface="Cambria Math"/>
-                                      <a:cs typeface="Cambria Math"/>
-                                    </a:rPr>
-                                    <m:t>)</m:t>
-                                  </m:r>
-                                  <m:sSub>
-                                    <m:sSubPr>
-                                      <m:ctrlPr>
-                                        <a:rPr lang="en-US" sz="3758" b="0" i="1">
-                                          <a:solidFill>
-                                            <a:srgbClr val="111111"/>
-                                          </a:solidFill>
-                                          <a:latin typeface="Cambria Math" panose="02040503050406030204" pitchFamily="18" charset="0"/>
-                                          <a:ea typeface="Cambria Math"/>
-                                          <a:cs typeface="Cambria Math"/>
-                                        </a:rPr>
-                                      </m:ctrlPr>
-                                    </m:sSubPr>
-                                    <m:e>
-                                      <m:r>
-                                        <m:rPr>
-                                          <m:sty m:val="p"/>
-                                        </m:rPr>
-                                        <a:rPr lang="en-US" sz="3758" b="0" i="0">
-                                          <a:solidFill>
-                                            <a:srgbClr val="111111"/>
-                                          </a:solidFill>
-                                          <a:latin typeface="Cambria Math" panose="02040503050406030204" pitchFamily="18" charset="0"/>
-                                          <a:ea typeface="Cambria Math"/>
-                                          <a:cs typeface="Cambria Math"/>
-                                        </a:rPr>
-                                        <m:t>∥</m:t>
-                                      </m:r>
-                                    </m:e>
-                                    <m:sub>
-                                      <m:r>
-                                        <a:rPr lang="en-US" sz="3758" b="0" i="1">
-                                          <a:solidFill>
-                                            <a:srgbClr val="111111"/>
-                                          </a:solidFill>
-                                          <a:latin typeface="Cambria Math" panose="02040503050406030204" pitchFamily="18" charset="0"/>
-                                          <a:ea typeface="Cambria Math"/>
-                                          <a:cs typeface="Cambria Math"/>
-                                        </a:rPr>
-                                        <m:t>2</m:t>
-                                      </m:r>
-                                    </m:sub>
-                                  </m:sSub>
-                                  <m:r>
-                                    <m:rPr>
-                                      <m:sty m:val="p"/>
-                                    </m:rPr>
-                                    <a:rPr lang="en-US" sz="3758" b="0" i="0">
-                                      <a:solidFill>
-                                        <a:srgbClr val="111111"/>
-                                      </a:solidFill>
-                                      <a:latin typeface="Cambria Math" panose="02040503050406030204" pitchFamily="18" charset="0"/>
-                                      <a:ea typeface="Cambria Math"/>
-                                      <a:cs typeface="Cambria Math"/>
-                                    </a:rPr>
-                                    <m:t>−</m:t>
-                                  </m:r>
-                                  <m:r>
-                                    <m:rPr>
-                                      <m:sty m:val="p"/>
-                                    </m:rPr>
-                                    <a:rPr lang="en-US" sz="3758" b="0" i="0">
-                                      <a:solidFill>
-                                        <a:srgbClr val="111111"/>
-                                      </a:solidFill>
-                                      <a:latin typeface="Cambria Math" panose="02040503050406030204" pitchFamily="18" charset="0"/>
-                                      <a:ea typeface="Cambria Math"/>
-                                      <a:cs typeface="Cambria Math"/>
-                                    </a:rPr>
-                                    <m:t>∥</m:t>
-                                  </m:r>
-                                  <m:sSub>
-                                    <m:sSubPr>
-                                      <m:ctrlPr>
-                                        <a:rPr lang="en-US" sz="3758" b="0" i="1">
-                                          <a:solidFill>
-                                            <a:srgbClr val="111111"/>
-                                          </a:solidFill>
-                                          <a:latin typeface="Cambria Math" panose="02040503050406030204" pitchFamily="18" charset="0"/>
-                                          <a:ea typeface="Cambria Math"/>
-                                          <a:cs typeface="Cambria Math"/>
-                                        </a:rPr>
-                                      </m:ctrlPr>
-                                    </m:sSubPr>
-                                    <m:e>
-                                      <m:r>
-                                        <m:rPr>
-                                          <m:sty m:val="b"/>
-                                        </m:rPr>
-                                        <a:rPr lang="en-US" sz="3758" b="1" i="0">
-                                          <a:solidFill>
-                                            <a:srgbClr val="111111"/>
-                                          </a:solidFill>
-                                          <a:latin typeface="Cambria Math" panose="02040503050406030204" pitchFamily="18" charset="0"/>
-                                          <a:ea typeface="Cambria Math"/>
-                                          <a:cs typeface="Cambria Math"/>
-                                        </a:rPr>
-                                        <m:t>v</m:t>
-                                      </m:r>
-                                    </m:e>
-                                    <m:sub>
-                                      <m:r>
-                                        <a:rPr lang="en-US" sz="3758" b="0" i="1">
-                                          <a:solidFill>
-                                            <a:srgbClr val="111111"/>
-                                          </a:solidFill>
-                                          <a:latin typeface="Cambria Math" panose="02040503050406030204" pitchFamily="18" charset="0"/>
-                                          <a:ea typeface="Cambria Math"/>
-                                          <a:cs typeface="Cambria Math"/>
-                                        </a:rPr>
-                                        <m:t>i</m:t>
-                                      </m:r>
-                                    </m:sub>
-                                  </m:sSub>
-                                  <m:r>
-                                    <m:rPr>
-                                      <m:sty m:val="p"/>
-                                    </m:rPr>
-                                    <a:rPr lang="en-US" sz="3758" b="0" i="0">
-                                      <a:solidFill>
-                                        <a:srgbClr val="111111"/>
-                                      </a:solidFill>
-                                      <a:latin typeface="Cambria Math" panose="02040503050406030204" pitchFamily="18" charset="0"/>
-                                      <a:ea typeface="Cambria Math"/>
-                                      <a:cs typeface="Cambria Math"/>
-                                    </a:rPr>
-                                    <m:t>(</m:t>
-                                  </m:r>
-                                  <m:r>
-                                    <m:rPr>
-                                      <m:sty m:val="b"/>
-                                    </m:rPr>
-                                    <a:rPr lang="en-US" sz="3758" b="1" i="0">
-                                      <a:solidFill>
-                                        <a:srgbClr val="111111"/>
-                                      </a:solidFill>
-                                      <a:latin typeface="Cambria Math" panose="02040503050406030204" pitchFamily="18" charset="0"/>
-                                      <a:ea typeface="Cambria Math"/>
-                                      <a:cs typeface="Cambria Math"/>
-                                    </a:rPr>
-                                    <m:t>x</m:t>
-                                  </m:r>
-                                  <m:r>
-                                    <m:rPr>
-                                      <m:sty m:val="p"/>
-                                    </m:rPr>
-                                    <a:rPr lang="en-US" sz="3758" b="0" i="0">
-                                      <a:solidFill>
-                                        <a:srgbClr val="111111"/>
-                                      </a:solidFill>
-                                      <a:latin typeface="Cambria Math" panose="02040503050406030204" pitchFamily="18" charset="0"/>
-                                      <a:ea typeface="Cambria Math"/>
-                                      <a:cs typeface="Cambria Math"/>
-                                    </a:rPr>
-                                    <m:t>;</m:t>
-                                  </m:r>
-                                  <m:sSub>
-                                    <m:sSubPr>
-                                      <m:ctrlPr>
-                                        <a:rPr lang="en-US" sz="3758" b="0" i="1">
-                                          <a:solidFill>
-                                            <a:srgbClr val="111111"/>
-                                          </a:solidFill>
-                                          <a:latin typeface="Cambria Math" panose="02040503050406030204" pitchFamily="18" charset="0"/>
-                                          <a:ea typeface="Cambria Math"/>
-                                          <a:cs typeface="Cambria Math"/>
-                                        </a:rPr>
-                                      </m:ctrlPr>
-                                    </m:sSubPr>
-                                    <m:e>
-                                      <m:r>
-                                        <m:rPr>
-                                          <m:sty m:val="bi"/>
-                                        </m:rPr>
-                                        <a:rPr lang="en-US" sz="3758" b="1" i="1">
-                                          <a:solidFill>
-                                            <a:srgbClr val="111111"/>
-                                          </a:solidFill>
-                                          <a:latin typeface="Cambria Math" panose="02040503050406030204" pitchFamily="18" charset="0"/>
-                                          <a:ea typeface="Cambria Math"/>
-                                          <a:cs typeface="Cambria Math"/>
-                                        </a:rPr>
-                                        <m:t>θ</m:t>
-                                      </m:r>
-                                    </m:e>
-                                    <m:sub>
-                                      <m:r>
-                                        <m:rPr>
-                                          <m:sty m:val="p"/>
-                                        </m:rPr>
-                                        <a:rPr lang="en-US" sz="3758" b="0" i="0">
-                                          <a:solidFill>
-                                            <a:srgbClr val="111111"/>
-                                          </a:solidFill>
-                                          <a:latin typeface="Cambria Math" panose="02040503050406030204" pitchFamily="18" charset="0"/>
-                                          <a:ea typeface="Cambria Math"/>
-                                          <a:cs typeface="Cambria Math"/>
-                                        </a:rPr>
-                                        <m:t>u</m:t>
-                                      </m:r>
-                                    </m:sub>
-                                  </m:sSub>
-                                  <m:r>
-                                    <m:rPr>
-                                      <m:sty m:val="p"/>
-                                    </m:rPr>
-                                    <a:rPr lang="en-US" sz="3758" b="0" i="0">
-                                      <a:solidFill>
-                                        <a:srgbClr val="111111"/>
-                                      </a:solidFill>
-                                      <a:latin typeface="Cambria Math" panose="02040503050406030204" pitchFamily="18" charset="0"/>
-                                      <a:ea typeface="Cambria Math"/>
-                                      <a:cs typeface="Cambria Math"/>
-                                    </a:rPr>
-                                    <m:t>)</m:t>
-                                  </m:r>
-                                  <m:sSub>
-                                    <m:sSubPr>
-                                      <m:ctrlPr>
-                                        <a:rPr lang="en-US" sz="3758" b="0" i="1">
-                                          <a:solidFill>
-                                            <a:srgbClr val="111111"/>
-                                          </a:solidFill>
-                                          <a:latin typeface="Cambria Math" panose="02040503050406030204" pitchFamily="18" charset="0"/>
-                                          <a:ea typeface="Cambria Math"/>
-                                          <a:cs typeface="Cambria Math"/>
-                                        </a:rPr>
-                                      </m:ctrlPr>
-                                    </m:sSubPr>
-                                    <m:e>
-                                      <m:r>
-                                        <m:rPr>
-                                          <m:sty m:val="p"/>
-                                        </m:rPr>
-                                        <a:rPr lang="en-US" sz="3758" b="0" i="0">
-                                          <a:solidFill>
-                                            <a:srgbClr val="111111"/>
-                                          </a:solidFill>
-                                          <a:latin typeface="Cambria Math" panose="02040503050406030204" pitchFamily="18" charset="0"/>
-                                          <a:ea typeface="Cambria Math"/>
-                                          <a:cs typeface="Cambria Math"/>
-                                        </a:rPr>
-                                        <m:t>∥</m:t>
-                                      </m:r>
-                                    </m:e>
-                                    <m:sub>
-                                      <m:r>
-                                        <a:rPr lang="en-US" sz="3758" b="0" i="1">
-                                          <a:solidFill>
-                                            <a:srgbClr val="111111"/>
-                                          </a:solidFill>
-                                          <a:latin typeface="Cambria Math" panose="02040503050406030204" pitchFamily="18" charset="0"/>
-                                          <a:ea typeface="Cambria Math"/>
-                                          <a:cs typeface="Cambria Math"/>
-                                        </a:rPr>
-                                        <m:t>2</m:t>
-                                      </m:r>
-                                    </m:sub>
-                                  </m:sSub>
-                                </m:e>
-                              </m:d>
-                            </m:e>
-                            <m:sup>
-                              <m:r>
-                                <a:rPr lang="en-US" sz="3758" b="0" i="1">
-                                  <a:solidFill>
-                                    <a:srgbClr val="111111"/>
-                                  </a:solidFill>
-                                  <a:latin typeface="Cambria Math" panose="02040503050406030204" pitchFamily="18" charset="0"/>
-                                  <a:ea typeface="Cambria Math"/>
-                                  <a:cs typeface="Cambria Math"/>
-                                </a:rPr>
-                                <m:t>2</m:t>
-                              </m:r>
-                            </m:sup>
-                          </m:sSup>
-                        </m:e>
-                      </m:nary>
-                    </m:oMath>
-                  </a14:m>
-                  <a:endParaRPr lang="en-US" sz="3758" b="0" i="0" kern="100" dirty="0">
-                    <a:solidFill>
-                      <a:srgbClr val="111111"/>
-                    </a:solidFill>
-                    <a:latin typeface="EB Garamond"/>
-                    <a:ea typeface="EB Garamond"/>
-                    <a:cs typeface="EB Garamond"/>
-                  </a:endParaRPr>
-                </a:p>
-                <a:p>
                   <a:pPr algn="r" marL="0" indent="0">
                     <a:lnSpc>
                       <a:spcPts val="4759"/>
                     </a:lnSpc>
                     <a:spcBef>
-                      <a:spcPts val="389"/>
+                      <a:spcPts val="11441"/>
                     </a:spcBef>
                     <a:spcAft>
                       <a:spcPts val="0"/>
@@ -8987,714 +6297,12 @@
                   </a:endParaRPr>
                 </a:p>
                 <a:p>
-                  <a:pPr algn="ctr" marL="0" indent="0">
-                    <a:lnSpc>
-                      <a:spcPct val="100000"/>
-                    </a:lnSpc>
-                    <a:spcBef>
-                      <a:spcPts val="907"/>
-                    </a:spcBef>
-                    <a:spcAft>
-                      <a:spcPts val="0"/>
-                    </a:spcAft>
-                    <a:buNone/>
-                  </a:pPr>
-                  <a14:m>
-                    <m:oMath xmlns:m="http://schemas.openxmlformats.org/officeDocument/2006/math">
-                      <m:sSub>
-                        <m:sSubPr>
-                          <m:ctrlPr>
-                            <a:rPr lang="en-US" sz="3758" b="0" i="1">
-                              <a:solidFill>
-                                <a:srgbClr val="111111"/>
-                              </a:solidFill>
-                              <a:latin typeface="Cambria Math" panose="02040503050406030204" pitchFamily="18" charset="0"/>
-                              <a:ea typeface="Cambria Math"/>
-                              <a:cs typeface="Cambria Math"/>
-                            </a:rPr>
-                          </m:ctrlPr>
-                        </m:sSubPr>
-                        <m:e>
-                          <m:r>
-                            <m:rPr>
-                              <m:sty m:val="p"/>
-                            </m:rPr>
-                            <a:rPr lang="en-US" sz="3758" b="0" i="0">
-                              <a:solidFill>
-                                <a:srgbClr val="111111"/>
-                              </a:solidFill>
-                              <a:latin typeface="Cambria Math" panose="02040503050406030204" pitchFamily="18" charset="0"/>
-                              <a:ea typeface="Cambria Math"/>
-                              <a:cs typeface="Cambria Math"/>
-                            </a:rPr>
-                            <m:t>Δ</m:t>
-                          </m:r>
-                        </m:e>
-                        <m:sub>
-                          <m:sSub>
-                            <m:sSubPr>
-                              <m:ctrlPr>
-                                <a:rPr lang="en-US" sz="3758" b="0" i="1">
-                                  <a:solidFill>
-                                    <a:srgbClr val="111111"/>
-                                  </a:solidFill>
-                                  <a:latin typeface="Cambria Math" panose="02040503050406030204" pitchFamily="18" charset="0"/>
-                                  <a:ea typeface="Cambria Math"/>
-                                  <a:cs typeface="Cambria Math"/>
-                                </a:rPr>
-                              </m:ctrlPr>
-                            </m:sSubPr>
-                            <m:e>
-                              <m:r>
-                                <m:rPr>
-                                  <m:scr m:val="script"/>
-                                  <m:sty m:val="p"/>
-                                </m:rPr>
-                                <a:rPr lang="en-US" sz="3758" b="0" i="0">
-                                  <a:solidFill>
-                                    <a:srgbClr val="111111"/>
-                                  </a:solidFill>
-                                  <a:latin typeface="Cambria Math" panose="02040503050406030204" pitchFamily="18" charset="0"/>
-                                  <a:ea typeface="Cambria Math"/>
-                                  <a:cs typeface="Cambria Math"/>
-                                </a:rPr>
-                                <m:t>D</m:t>
-                              </m:r>
-                            </m:e>
-                            <m:sub>
-                              <m:r>
-                                <m:rPr>
-                                  <m:sty m:val="p"/>
-                                </m:rPr>
-                                <a:rPr lang="en-US" sz="3758" b="0" i="0">
-                                  <a:solidFill>
-                                    <a:srgbClr val="111111"/>
-                                  </a:solidFill>
-                                  <a:latin typeface="Cambria Math" panose="02040503050406030204" pitchFamily="18" charset="0"/>
-                                  <a:ea typeface="Cambria Math"/>
-                                  <a:cs typeface="Cambria Math"/>
-                                </a:rPr>
-                                <m:t>p</m:t>
-                              </m:r>
-                            </m:sub>
-                          </m:sSub>
-                        </m:sub>
-                      </m:sSub>
-                      <m:r>
-                        <m:rPr>
-                          <m:sty m:val="p"/>
-                        </m:rPr>
-                        <a:rPr lang="en-US" sz="3758" b="0" i="0">
-                          <a:solidFill>
-                            <a:srgbClr val="111111"/>
-                          </a:solidFill>
-                          <a:latin typeface="Cambria Math" panose="02040503050406030204" pitchFamily="18" charset="0"/>
-                          <a:ea typeface="Cambria Math"/>
-                          <a:cs typeface="Cambria Math"/>
-                        </a:rPr>
-                        <m:t>=</m:t>
-                      </m:r>
-                      <m:f>
-                        <m:fPr>
-                          <m:type m:val="bar"/>
-                          <m:ctrlPr>
-                            <a:rPr lang="en-US" sz="3758" b="0" i="1">
-                              <a:solidFill>
-                                <a:srgbClr val="111111"/>
-                              </a:solidFill>
-                              <a:latin typeface="Cambria Math" panose="02040503050406030204" pitchFamily="18" charset="0"/>
-                              <a:ea typeface="Cambria Math"/>
-                              <a:cs typeface="Cambria Math"/>
-                            </a:rPr>
-                          </m:ctrlPr>
-                        </m:fPr>
-                        <m:num>
-                          <m:r>
-                            <a:rPr lang="en-US" sz="3758" b="0" i="1">
-                              <a:solidFill>
-                                <a:srgbClr val="111111"/>
-                              </a:solidFill>
-                              <a:latin typeface="Cambria Math" panose="02040503050406030204" pitchFamily="18" charset="0"/>
-                              <a:ea typeface="Cambria Math"/>
-                              <a:cs typeface="Cambria Math"/>
-                            </a:rPr>
-                            <m:t>1</m:t>
-                          </m:r>
-                        </m:num>
-                        <m:den>
-                          <m:r>
-                            <m:rPr>
-                              <m:sty m:val="p"/>
-                            </m:rPr>
-                            <a:rPr lang="en-US" sz="3758" b="0" i="0">
-                              <a:solidFill>
-                                <a:srgbClr val="111111"/>
-                              </a:solidFill>
-                              <a:latin typeface="Cambria Math" panose="02040503050406030204" pitchFamily="18" charset="0"/>
-                              <a:ea typeface="Cambria Math"/>
-                              <a:cs typeface="Cambria Math"/>
-                            </a:rPr>
-                            <m:t>|</m:t>
-                          </m:r>
-                          <m:r>
-                            <m:rPr>
-                              <m:scr m:val="script"/>
-                              <m:sty m:val="p"/>
-                            </m:rPr>
-                            <a:rPr lang="en-US" sz="3758" b="0" i="0">
-                              <a:solidFill>
-                                <a:srgbClr val="111111"/>
-                              </a:solidFill>
-                              <a:latin typeface="Cambria Math" panose="02040503050406030204" pitchFamily="18" charset="0"/>
-                              <a:ea typeface="Cambria Math"/>
-                              <a:cs typeface="Cambria Math"/>
-                            </a:rPr>
-                            <m:t>S</m:t>
-                          </m:r>
-                          <m:r>
-                            <m:rPr>
-                              <m:sty m:val="p"/>
-                            </m:rPr>
-                            <a:rPr lang="en-US" sz="3758" b="0" i="0">
-                              <a:solidFill>
-                                <a:srgbClr val="111111"/>
-                              </a:solidFill>
-                              <a:latin typeface="Cambria Math" panose="02040503050406030204" pitchFamily="18" charset="0"/>
-                              <a:ea typeface="Cambria Math"/>
-                              <a:cs typeface="Cambria Math"/>
-                            </a:rPr>
-                            <m:t>|</m:t>
-                          </m:r>
-                        </m:den>
-                      </m:f>
-                      <m:nary>
-                        <m:naryPr>
-                          <m:chr m:val="∑"/>
-                          <m:limLoc m:val="subSup"/>
-                          <m:subHide m:val="off"/>
-                          <m:supHide m:val="on"/>
-                          <m:ctrlPr>
-                            <a:rPr lang="en-US" sz="3758" b="0" i="1">
-                              <a:solidFill>
-                                <a:srgbClr val="111111"/>
-                              </a:solidFill>
-                              <a:latin typeface="Cambria Math" panose="02040503050406030204" pitchFamily="18" charset="0"/>
-                              <a:ea typeface="Cambria Math"/>
-                              <a:cs typeface="Cambria Math"/>
-                            </a:rPr>
-                          </m:ctrlPr>
-                        </m:naryPr>
-                        <m:sub>
-                          <m:r>
-                            <a:rPr lang="en-US" sz="3758" b="0" i="1">
-                              <a:solidFill>
-                                <a:srgbClr val="111111"/>
-                              </a:solidFill>
-                              <a:latin typeface="Cambria Math" panose="02040503050406030204" pitchFamily="18" charset="0"/>
-                              <a:ea typeface="Cambria Math"/>
-                              <a:cs typeface="Cambria Math"/>
-                            </a:rPr>
-                            <m:t>i</m:t>
-                          </m:r>
-                          <m:r>
-                            <m:rPr>
-                              <m:sty m:val="p"/>
-                            </m:rPr>
-                            <a:rPr lang="en-US" sz="3758" b="0" i="0">
-                              <a:solidFill>
-                                <a:srgbClr val="111111"/>
-                              </a:solidFill>
-                              <a:latin typeface="Cambria Math" panose="02040503050406030204" pitchFamily="18" charset="0"/>
-                              <a:ea typeface="Cambria Math"/>
-                              <a:cs typeface="Cambria Math"/>
-                            </a:rPr>
-                            <m:t>∈</m:t>
-                          </m:r>
-                          <m:r>
-                            <m:rPr>
-                              <m:scr m:val="script"/>
-                              <m:sty m:val="p"/>
-                            </m:rPr>
-                            <a:rPr lang="en-US" sz="3758" b="0" i="0">
-                              <a:solidFill>
-                                <a:srgbClr val="111111"/>
-                              </a:solidFill>
-                              <a:latin typeface="Cambria Math" panose="02040503050406030204" pitchFamily="18" charset="0"/>
-                              <a:ea typeface="Cambria Math"/>
-                              <a:cs typeface="Cambria Math"/>
-                            </a:rPr>
-                            <m:t>S</m:t>
-                          </m:r>
-                        </m:sub>
-                        <m:sup>
-                          <m:r>
-                            <a:rPr lang="en-US" sz="3758" b="0" i="1">
-                              <a:solidFill>
-                                <a:srgbClr val="111111"/>
-                              </a:solidFill>
-                              <a:latin typeface="Cambria Math" panose="02040503050406030204" pitchFamily="18" charset="0"/>
-                              <a:ea typeface="Cambria Math"/>
-                              <a:cs typeface="Cambria Math"/>
-                            </a:rPr>
-                            <m:t>​</m:t>
-                          </m:r>
-                        </m:sup>
-                        <m:e>
-                          <m:sSup>
-                            <m:sSupPr>
-                              <m:ctrlPr>
-                                <a:rPr lang="en-US" sz="3758" b="0" i="1">
-                                  <a:solidFill>
-                                    <a:srgbClr val="111111"/>
-                                  </a:solidFill>
-                                  <a:latin typeface="Cambria Math" panose="02040503050406030204" pitchFamily="18" charset="0"/>
-                                  <a:ea typeface="Cambria Math"/>
-                                  <a:cs typeface="Cambria Math"/>
-                                </a:rPr>
-                              </m:ctrlPr>
-                            </m:sSupPr>
-                            <m:e>
-                              <m:d>
-                                <m:dPr>
-                                  <m:begChr m:val="("/>
-                                  <m:sepChr m:val=""/>
-                                  <m:endChr m:val=")"/>
-                                  <m:grow/>
-                                  <m:ctrlPr>
-                                    <a:rPr lang="en-US" sz="3758" b="0" i="1">
-                                      <a:solidFill>
-                                        <a:srgbClr val="111111"/>
-                                      </a:solidFill>
-                                      <a:latin typeface="Cambria Math" panose="02040503050406030204" pitchFamily="18" charset="0"/>
-                                      <a:ea typeface="Cambria Math"/>
-                                      <a:cs typeface="Cambria Math"/>
-                                    </a:rPr>
-                                  </m:ctrlPr>
-                                </m:dPr>
-                                <m:e>
-                                  <m:r>
-                                    <m:rPr>
-                                      <m:sty m:val="p"/>
-                                    </m:rPr>
-                                    <a:rPr lang="en-US" sz="3758" b="0" i="0">
-                                      <a:solidFill>
-                                        <a:srgbClr val="111111"/>
-                                      </a:solidFill>
-                                      <a:latin typeface="Cambria Math" panose="02040503050406030204" pitchFamily="18" charset="0"/>
-                                      <a:ea typeface="Cambria Math"/>
-                                      <a:cs typeface="Cambria Math"/>
-                                    </a:rPr>
-                                    <m:t>∥</m:t>
-                                  </m:r>
-                                  <m:sSub>
-                                    <m:sSubPr>
-                                      <m:ctrlPr>
-                                        <a:rPr lang="en-US" sz="3758" b="0" i="1">
-                                          <a:solidFill>
-                                            <a:srgbClr val="111111"/>
-                                          </a:solidFill>
-                                          <a:latin typeface="Cambria Math" panose="02040503050406030204" pitchFamily="18" charset="0"/>
-                                          <a:ea typeface="Cambria Math"/>
-                                          <a:cs typeface="Cambria Math"/>
-                                        </a:rPr>
-                                      </m:ctrlPr>
-                                    </m:sSubPr>
-                                    <m:e>
-                                      <m:r>
-                                        <m:rPr>
-                                          <m:sty m:val="b"/>
-                                        </m:rPr>
-                                        <a:rPr lang="en-US" sz="3758" b="1" i="0">
-                                          <a:solidFill>
-                                            <a:srgbClr val="111111"/>
-                                          </a:solidFill>
-                                          <a:latin typeface="Cambria Math" panose="02040503050406030204" pitchFamily="18" charset="0"/>
-                                          <a:ea typeface="Cambria Math"/>
-                                          <a:cs typeface="Cambria Math"/>
-                                        </a:rPr>
-                                        <m:t>v</m:t>
-                                      </m:r>
-                                    </m:e>
-                                    <m:sub>
-                                      <m:r>
-                                        <a:rPr lang="en-US" sz="3758" b="0" i="1">
-                                          <a:solidFill>
-                                            <a:srgbClr val="111111"/>
-                                          </a:solidFill>
-                                          <a:latin typeface="Cambria Math" panose="02040503050406030204" pitchFamily="18" charset="0"/>
-                                          <a:ea typeface="Cambria Math"/>
-                                          <a:cs typeface="Cambria Math"/>
-                                        </a:rPr>
-                                        <m:t>i</m:t>
-                                      </m:r>
-                                    </m:sub>
-                                  </m:sSub>
-                                  <m:r>
-                                    <m:rPr>
-                                      <m:sty m:val="p"/>
-                                    </m:rPr>
-                                    <a:rPr lang="en-US" sz="3758" b="0" i="0">
-                                      <a:solidFill>
-                                        <a:srgbClr val="111111"/>
-                                      </a:solidFill>
-                                      <a:latin typeface="Cambria Math" panose="02040503050406030204" pitchFamily="18" charset="0"/>
-                                      <a:ea typeface="Cambria Math"/>
-                                      <a:cs typeface="Cambria Math"/>
-                                    </a:rPr>
-                                    <m:t>(</m:t>
-                                  </m:r>
-                                  <m:r>
-                                    <m:rPr>
-                                      <m:sty m:val="b"/>
-                                    </m:rPr>
-                                    <a:rPr lang="en-US" sz="3758" b="1" i="0">
-                                      <a:solidFill>
-                                        <a:srgbClr val="111111"/>
-                                      </a:solidFill>
-                                      <a:latin typeface="Cambria Math" panose="02040503050406030204" pitchFamily="18" charset="0"/>
-                                      <a:ea typeface="Cambria Math"/>
-                                      <a:cs typeface="Cambria Math"/>
-                                    </a:rPr>
-                                    <m:t>x</m:t>
-                                  </m:r>
-                                  <m:r>
-                                    <m:rPr>
-                                      <m:sty m:val="p"/>
-                                    </m:rPr>
-                                    <a:rPr lang="en-US" sz="3758" b="0" i="0">
-                                      <a:solidFill>
-                                        <a:srgbClr val="111111"/>
-                                      </a:solidFill>
-                                      <a:latin typeface="Cambria Math" panose="02040503050406030204" pitchFamily="18" charset="0"/>
-                                      <a:ea typeface="Cambria Math"/>
-                                      <a:cs typeface="Cambria Math"/>
-                                    </a:rPr>
-                                    <m:t>;</m:t>
-                                  </m:r>
-                                  <m:r>
-                                    <m:rPr>
-                                      <m:sty m:val="bi"/>
-                                    </m:rPr>
-                                    <a:rPr lang="en-US" sz="3758" b="1" i="1">
-                                      <a:solidFill>
-                                        <a:srgbClr val="111111"/>
-                                      </a:solidFill>
-                                      <a:latin typeface="Cambria Math" panose="02040503050406030204" pitchFamily="18" charset="0"/>
-                                      <a:ea typeface="Cambria Math"/>
-                                      <a:cs typeface="Cambria Math"/>
-                                    </a:rPr>
-                                    <m:t>θ</m:t>
-                                  </m:r>
-                                  <m:r>
-                                    <m:rPr>
-                                      <m:sty m:val="p"/>
-                                    </m:rPr>
-                                    <a:rPr lang="en-US" sz="3758" b="0" i="0">
-                                      <a:solidFill>
-                                        <a:srgbClr val="111111"/>
-                                      </a:solidFill>
-                                      <a:latin typeface="Cambria Math" panose="02040503050406030204" pitchFamily="18" charset="0"/>
-                                      <a:ea typeface="Cambria Math"/>
-                                      <a:cs typeface="Cambria Math"/>
-                                    </a:rPr>
-                                    <m:t>)</m:t>
-                                  </m:r>
-                                  <m:sSub>
-                                    <m:sSubPr>
-                                      <m:ctrlPr>
-                                        <a:rPr lang="en-US" sz="3758" b="0" i="1">
-                                          <a:solidFill>
-                                            <a:srgbClr val="111111"/>
-                                          </a:solidFill>
-                                          <a:latin typeface="Cambria Math" panose="02040503050406030204" pitchFamily="18" charset="0"/>
-                                          <a:ea typeface="Cambria Math"/>
-                                          <a:cs typeface="Cambria Math"/>
-                                        </a:rPr>
-                                      </m:ctrlPr>
-                                    </m:sSubPr>
-                                    <m:e>
-                                      <m:r>
-                                        <m:rPr>
-                                          <m:sty m:val="p"/>
-                                        </m:rPr>
-                                        <a:rPr lang="en-US" sz="3758" b="0" i="0">
-                                          <a:solidFill>
-                                            <a:srgbClr val="111111"/>
-                                          </a:solidFill>
-                                          <a:latin typeface="Cambria Math" panose="02040503050406030204" pitchFamily="18" charset="0"/>
-                                          <a:ea typeface="Cambria Math"/>
-                                          <a:cs typeface="Cambria Math"/>
-                                        </a:rPr>
-                                        <m:t>∥</m:t>
-                                      </m:r>
-                                    </m:e>
-                                    <m:sub>
-                                      <m:r>
-                                        <a:rPr lang="en-US" sz="3758" b="0" i="1">
-                                          <a:solidFill>
-                                            <a:srgbClr val="111111"/>
-                                          </a:solidFill>
-                                          <a:latin typeface="Cambria Math" panose="02040503050406030204" pitchFamily="18" charset="0"/>
-                                          <a:ea typeface="Cambria Math"/>
-                                          <a:cs typeface="Cambria Math"/>
-                                        </a:rPr>
-                                        <m:t>2</m:t>
-                                      </m:r>
-                                    </m:sub>
-                                  </m:sSub>
-                                  <m:r>
-                                    <m:rPr>
-                                      <m:sty m:val="p"/>
-                                    </m:rPr>
-                                    <a:rPr lang="en-US" sz="3758" b="0" i="0">
-                                      <a:solidFill>
-                                        <a:srgbClr val="111111"/>
-                                      </a:solidFill>
-                                      <a:latin typeface="Cambria Math" panose="02040503050406030204" pitchFamily="18" charset="0"/>
-                                      <a:ea typeface="Cambria Math"/>
-                                      <a:cs typeface="Cambria Math"/>
-                                    </a:rPr>
-                                    <m:t>−</m:t>
-                                  </m:r>
-                                  <m:r>
-                                    <m:rPr>
-                                      <m:sty m:val="p"/>
-                                    </m:rPr>
-                                    <a:rPr lang="en-US" sz="3758" b="0" i="0">
-                                      <a:solidFill>
-                                        <a:srgbClr val="111111"/>
-                                      </a:solidFill>
-                                      <a:latin typeface="Cambria Math" panose="02040503050406030204" pitchFamily="18" charset="0"/>
-                                      <a:ea typeface="Cambria Math"/>
-                                      <a:cs typeface="Cambria Math"/>
-                                    </a:rPr>
-                                    <m:t>∥</m:t>
-                                  </m:r>
-                                  <m:sSub>
-                                    <m:sSubPr>
-                                      <m:ctrlPr>
-                                        <a:rPr lang="en-US" sz="3758" b="0" i="1">
-                                          <a:solidFill>
-                                            <a:srgbClr val="111111"/>
-                                          </a:solidFill>
-                                          <a:latin typeface="Cambria Math" panose="02040503050406030204" pitchFamily="18" charset="0"/>
-                                          <a:ea typeface="Cambria Math"/>
-                                          <a:cs typeface="Cambria Math"/>
-                                        </a:rPr>
-                                      </m:ctrlPr>
-                                    </m:sSubPr>
-                                    <m:e>
-                                      <m:r>
-                                        <m:rPr>
-                                          <m:sty m:val="b"/>
-                                        </m:rPr>
-                                        <a:rPr lang="en-US" sz="3758" b="1" i="0">
-                                          <a:solidFill>
-                                            <a:srgbClr val="111111"/>
-                                          </a:solidFill>
-                                          <a:latin typeface="Cambria Math" panose="02040503050406030204" pitchFamily="18" charset="0"/>
-                                          <a:ea typeface="Cambria Math"/>
-                                          <a:cs typeface="Cambria Math"/>
-                                        </a:rPr>
-                                        <m:t>v</m:t>
-                                      </m:r>
-                                    </m:e>
-                                    <m:sub>
-                                      <m:r>
-                                        <a:rPr lang="en-US" sz="3758" b="0" i="1">
-                                          <a:solidFill>
-                                            <a:srgbClr val="111111"/>
-                                          </a:solidFill>
-                                          <a:latin typeface="Cambria Math" panose="02040503050406030204" pitchFamily="18" charset="0"/>
-                                          <a:ea typeface="Cambria Math"/>
-                                          <a:cs typeface="Cambria Math"/>
-                                        </a:rPr>
-                                        <m:t>i</m:t>
-                                      </m:r>
-                                    </m:sub>
-                                  </m:sSub>
-                                  <m:r>
-                                    <m:rPr>
-                                      <m:sty m:val="p"/>
-                                    </m:rPr>
-                                    <a:rPr lang="en-US" sz="3758" b="0" i="0">
-                                      <a:solidFill>
-                                        <a:srgbClr val="111111"/>
-                                      </a:solidFill>
-                                      <a:latin typeface="Cambria Math" panose="02040503050406030204" pitchFamily="18" charset="0"/>
-                                      <a:ea typeface="Cambria Math"/>
-                                      <a:cs typeface="Cambria Math"/>
-                                    </a:rPr>
-                                    <m:t>(</m:t>
-                                  </m:r>
-                                  <m:r>
-                                    <m:rPr>
-                                      <m:sty m:val="b"/>
-                                    </m:rPr>
-                                    <a:rPr lang="en-US" sz="3758" b="1" i="0">
-                                      <a:solidFill>
-                                        <a:srgbClr val="111111"/>
-                                      </a:solidFill>
-                                      <a:latin typeface="Cambria Math" panose="02040503050406030204" pitchFamily="18" charset="0"/>
-                                      <a:ea typeface="Cambria Math"/>
-                                      <a:cs typeface="Cambria Math"/>
-                                    </a:rPr>
-                                    <m:t>x</m:t>
-                                  </m:r>
-                                  <m:r>
-                                    <m:rPr>
-                                      <m:sty m:val="p"/>
-                                    </m:rPr>
-                                    <a:rPr lang="en-US" sz="3758" b="0" i="0">
-                                      <a:solidFill>
-                                        <a:srgbClr val="111111"/>
-                                      </a:solidFill>
-                                      <a:latin typeface="Cambria Math" panose="02040503050406030204" pitchFamily="18" charset="0"/>
-                                      <a:ea typeface="Cambria Math"/>
-                                      <a:cs typeface="Cambria Math"/>
-                                    </a:rPr>
-                                    <m:t>;</m:t>
-                                  </m:r>
-                                  <m:sSub>
-                                    <m:sSubPr>
-                                      <m:ctrlPr>
-                                        <a:rPr lang="en-US" sz="3758" b="0" i="1">
-                                          <a:solidFill>
-                                            <a:srgbClr val="111111"/>
-                                          </a:solidFill>
-                                          <a:latin typeface="Cambria Math" panose="02040503050406030204" pitchFamily="18" charset="0"/>
-                                          <a:ea typeface="Cambria Math"/>
-                                          <a:cs typeface="Cambria Math"/>
-                                        </a:rPr>
-                                      </m:ctrlPr>
-                                    </m:sSubPr>
-                                    <m:e>
-                                      <m:r>
-                                        <m:rPr>
-                                          <m:sty m:val="bi"/>
-                                        </m:rPr>
-                                        <a:rPr lang="en-US" sz="3758" b="1" i="1">
-                                          <a:solidFill>
-                                            <a:srgbClr val="111111"/>
-                                          </a:solidFill>
-                                          <a:latin typeface="Cambria Math" panose="02040503050406030204" pitchFamily="18" charset="0"/>
-                                          <a:ea typeface="Cambria Math"/>
-                                          <a:cs typeface="Cambria Math"/>
-                                        </a:rPr>
-                                        <m:t>θ</m:t>
-                                      </m:r>
-                                    </m:e>
-                                    <m:sub>
-                                      <m:r>
-                                        <m:rPr>
-                                          <m:sty m:val="p"/>
-                                        </m:rPr>
-                                        <a:rPr lang="en-US" sz="3758" b="0" i="0">
-                                          <a:solidFill>
-                                            <a:srgbClr val="111111"/>
-                                          </a:solidFill>
-                                          <a:latin typeface="Cambria Math" panose="02040503050406030204" pitchFamily="18" charset="0"/>
-                                          <a:ea typeface="Cambria Math"/>
-                                          <a:cs typeface="Cambria Math"/>
-                                        </a:rPr>
-                                        <m:t>o</m:t>
-                                      </m:r>
-                                    </m:sub>
-                                  </m:sSub>
-                                  <m:r>
-                                    <m:rPr>
-                                      <m:sty m:val="p"/>
-                                    </m:rPr>
-                                    <a:rPr lang="en-US" sz="3758" b="0" i="0">
-                                      <a:solidFill>
-                                        <a:srgbClr val="111111"/>
-                                      </a:solidFill>
-                                      <a:latin typeface="Cambria Math" panose="02040503050406030204" pitchFamily="18" charset="0"/>
-                                      <a:ea typeface="Cambria Math"/>
-                                      <a:cs typeface="Cambria Math"/>
-                                    </a:rPr>
-                                    <m:t>)</m:t>
-                                  </m:r>
-                                  <m:sSub>
-                                    <m:sSubPr>
-                                      <m:ctrlPr>
-                                        <a:rPr lang="en-US" sz="3758" b="0" i="1">
-                                          <a:solidFill>
-                                            <a:srgbClr val="111111"/>
-                                          </a:solidFill>
-                                          <a:latin typeface="Cambria Math" panose="02040503050406030204" pitchFamily="18" charset="0"/>
-                                          <a:ea typeface="Cambria Math"/>
-                                          <a:cs typeface="Cambria Math"/>
-                                        </a:rPr>
-                                      </m:ctrlPr>
-                                    </m:sSubPr>
-                                    <m:e>
-                                      <m:r>
-                                        <m:rPr>
-                                          <m:sty m:val="p"/>
-                                        </m:rPr>
-                                        <a:rPr lang="en-US" sz="3758" b="0" i="0">
-                                          <a:solidFill>
-                                            <a:srgbClr val="111111"/>
-                                          </a:solidFill>
-                                          <a:latin typeface="Cambria Math" panose="02040503050406030204" pitchFamily="18" charset="0"/>
-                                          <a:ea typeface="Cambria Math"/>
-                                          <a:cs typeface="Cambria Math"/>
-                                        </a:rPr>
-                                        <m:t>∥</m:t>
-                                      </m:r>
-                                    </m:e>
-                                    <m:sub>
-                                      <m:r>
-                                        <a:rPr lang="en-US" sz="3758" b="0" i="1">
-                                          <a:solidFill>
-                                            <a:srgbClr val="111111"/>
-                                          </a:solidFill>
-                                          <a:latin typeface="Cambria Math" panose="02040503050406030204" pitchFamily="18" charset="0"/>
-                                          <a:ea typeface="Cambria Math"/>
-                                          <a:cs typeface="Cambria Math"/>
-                                        </a:rPr>
-                                        <m:t>2</m:t>
-                                      </m:r>
-                                    </m:sub>
-                                  </m:sSub>
-                                </m:e>
-                              </m:d>
-                            </m:e>
-                            <m:sup>
-                              <m:r>
-                                <a:rPr lang="en-US" sz="3758" b="0" i="1">
-                                  <a:solidFill>
-                                    <a:srgbClr val="111111"/>
-                                  </a:solidFill>
-                                  <a:latin typeface="Cambria Math" panose="02040503050406030204" pitchFamily="18" charset="0"/>
-                                  <a:ea typeface="Cambria Math"/>
-                                  <a:cs typeface="Cambria Math"/>
-                                </a:rPr>
-                                <m:t>2</m:t>
-                              </m:r>
-                            </m:sup>
-                          </m:sSup>
-                        </m:e>
-                      </m:nary>
-                    </m:oMath>
-                  </a14:m>
-                  <a:endParaRPr lang="en-US" sz="3758" b="0" i="0" kern="100" dirty="0">
-                    <a:solidFill>
-                      <a:srgbClr val="111111"/>
-                    </a:solidFill>
-                    <a:latin typeface="EB Garamond"/>
-                    <a:ea typeface="EB Garamond"/>
-                    <a:cs typeface="EB Garamond"/>
-                  </a:endParaRPr>
-                </a:p>
-                <a:p>
                   <a:pPr algn="r" marL="0" indent="0">
                     <a:lnSpc>
                       <a:spcPts val="4759"/>
                     </a:lnSpc>
                     <a:spcBef>
-                      <a:spcPts val="389"/>
+                      <a:spcPts val="6716"/>
                     </a:spcBef>
                     <a:spcAft>
                       <a:spcPts val="0"/>
@@ -9782,625 +6390,13 @@
                     <a:cs typeface="EB Garamond"/>
                   </a:endParaRPr>
                 </a:p>
-                <a:p>
-                  <a:pPr algn="ctr" marL="0" indent="0">
-                    <a:lnSpc>
-                      <a:spcPct val="100000"/>
-                    </a:lnSpc>
-                    <a:spcBef>
-                      <a:spcPts val="907"/>
-                    </a:spcBef>
-                    <a:spcAft>
-                      <a:spcPts val="0"/>
-                    </a:spcAft>
-                    <a:buNone/>
-                  </a:pPr>
-                  <a14:m>
-                    <m:oMathPara xmlns:m="http://schemas.openxmlformats.org/officeDocument/2006/math">
-                      <m:oMathParaPr>
-                        <m:jc m:val="centerGroup"/>
-                      </m:oMathParaPr>
-                      <m:oMath>
-                        <m:limLow>
-                          <m:limLowPr>
-                            <m:ctrlPr>
-                              <a:rPr lang="en-US" sz="3758" b="0" i="1">
-                                <a:solidFill>
-                                  <a:srgbClr val="111111"/>
-                                </a:solidFill>
-                                <a:latin typeface="Cambria Math" panose="02040503050406030204" pitchFamily="18" charset="0"/>
-                                <a:ea typeface="Cambria Math"/>
-                                <a:cs typeface="Cambria Math"/>
-                              </a:rPr>
-                            </m:ctrlPr>
-                          </m:limLowPr>
-                          <m:e>
-                            <m:r>
-                              <m:rPr>
-                                <m:sty m:val="p"/>
-                              </m:rPr>
-                              <a:rPr lang="en-US" sz="3758" b="0" i="0">
-                                <a:solidFill>
-                                  <a:srgbClr val="111111"/>
-                                </a:solidFill>
-                                <a:latin typeface="Cambria Math" panose="02040503050406030204" pitchFamily="18" charset="0"/>
-                                <a:ea typeface="Cambria Math"/>
-                                <a:cs typeface="Cambria Math"/>
-                              </a:rPr>
-                              <m:t>minimize</m:t>
-                            </m:r>
-                          </m:e>
-                          <m:lim>
-                            <m:r>
-                              <m:rPr>
-                                <m:sty m:val="bi"/>
-                              </m:rPr>
-                              <a:rPr lang="en-US" sz="3758" b="1" i="1">
-                                <a:solidFill>
-                                  <a:srgbClr val="111111"/>
-                                </a:solidFill>
-                                <a:latin typeface="Cambria Math" panose="02040503050406030204" pitchFamily="18" charset="0"/>
-                                <a:ea typeface="Cambria Math"/>
-                                <a:cs typeface="Cambria Math"/>
-                              </a:rPr>
-                              <m:t>θ</m:t>
-                            </m:r>
-                          </m:lim>
-                        </m:limLow>
-                        <m:r>
-                          <a:rPr lang="en-US" sz="3758" b="0" i="1">
-                            <a:solidFill>
-                              <a:srgbClr val="111111"/>
-                            </a:solidFill>
-                            <a:latin typeface="Cambria Math" panose="02040503050406030204" pitchFamily="18" charset="0"/>
-                            <a:ea typeface="Cambria Math"/>
-                            <a:cs typeface="Cambria Math"/>
-                          </a:rPr>
-                          <m:t> </m:t>
-                        </m:r>
-                        <m:sSub>
-                          <m:sSubPr>
-                            <m:ctrlPr>
-                              <a:rPr lang="en-US" sz="3758" b="0" i="1">
-                                <a:solidFill>
-                                  <a:srgbClr val="111111"/>
-                                </a:solidFill>
-                                <a:latin typeface="Cambria Math" panose="02040503050406030204" pitchFamily="18" charset="0"/>
-                                <a:ea typeface="Cambria Math"/>
-                                <a:cs typeface="Cambria Math"/>
-                              </a:rPr>
-                            </m:ctrlPr>
-                          </m:sSubPr>
-                          <m:e>
-                            <m:r>
-                              <a:rPr lang="en-US" sz="3758" b="0" i="1">
-                                <a:solidFill>
-                                  <a:srgbClr val="111111"/>
-                                </a:solidFill>
-                                <a:latin typeface="Cambria Math" panose="02040503050406030204" pitchFamily="18" charset="0"/>
-                                <a:ea typeface="Cambria Math"/>
-                                <a:cs typeface="Cambria Math"/>
-                              </a:rPr>
-                              <m:t>ℓ</m:t>
-                            </m:r>
-                          </m:e>
-                          <m:sub>
-                            <m:r>
-                              <m:rPr>
-                                <m:sty m:val="p"/>
-                              </m:rPr>
-                              <a:rPr lang="en-US" sz="3758" b="0" i="0">
-                                <a:solidFill>
-                                  <a:srgbClr val="111111"/>
-                                </a:solidFill>
-                                <a:latin typeface="Cambria Math" panose="02040503050406030204" pitchFamily="18" charset="0"/>
-                                <a:ea typeface="Cambria Math"/>
-                                <a:cs typeface="Cambria Math"/>
-                              </a:rPr>
-                              <m:t>f</m:t>
-                            </m:r>
-                          </m:sub>
-                        </m:sSub>
-                        <m:r>
-                          <m:rPr>
-                            <m:sty m:val="p"/>
-                          </m:rPr>
-                          <a:rPr lang="en-US" sz="3758" b="0" i="0">
-                            <a:solidFill>
-                              <a:srgbClr val="111111"/>
-                            </a:solidFill>
-                            <a:latin typeface="Cambria Math" panose="02040503050406030204" pitchFamily="18" charset="0"/>
-                            <a:ea typeface="Cambria Math"/>
-                            <a:cs typeface="Cambria Math"/>
-                          </a:rPr>
-                          <m:t>(</m:t>
-                        </m:r>
-                        <m:r>
-                          <m:rPr>
-                            <m:sty m:val="bi"/>
-                          </m:rPr>
-                          <a:rPr lang="en-US" sz="3758" b="1" i="1">
-                            <a:solidFill>
-                              <a:srgbClr val="111111"/>
-                            </a:solidFill>
-                            <a:latin typeface="Cambria Math" panose="02040503050406030204" pitchFamily="18" charset="0"/>
-                            <a:ea typeface="Cambria Math"/>
-                            <a:cs typeface="Cambria Math"/>
-                          </a:rPr>
-                          <m:t>θ</m:t>
-                        </m:r>
-                        <m:r>
-                          <m:rPr>
-                            <m:sty m:val="p"/>
-                          </m:rPr>
-                          <a:rPr lang="en-US" sz="3758" b="0" i="0">
-                            <a:solidFill>
-                              <a:srgbClr val="111111"/>
-                            </a:solidFill>
-                            <a:latin typeface="Cambria Math" panose="02040503050406030204" pitchFamily="18" charset="0"/>
-                            <a:ea typeface="Cambria Math"/>
-                            <a:cs typeface="Cambria Math"/>
-                          </a:rPr>
-                          <m:t>;</m:t>
-                        </m:r>
-                        <m:sSub>
-                          <m:sSubPr>
-                            <m:ctrlPr>
-                              <a:rPr lang="en-US" sz="3758" b="0" i="1">
-                                <a:solidFill>
-                                  <a:srgbClr val="111111"/>
-                                </a:solidFill>
-                                <a:latin typeface="Cambria Math" panose="02040503050406030204" pitchFamily="18" charset="0"/>
-                                <a:ea typeface="Cambria Math"/>
-                                <a:cs typeface="Cambria Math"/>
-                              </a:rPr>
-                            </m:ctrlPr>
-                          </m:sSubPr>
-                          <m:e>
-                            <m:r>
-                              <m:rPr>
-                                <m:scr m:val="script"/>
-                                <m:sty m:val="p"/>
-                              </m:rPr>
-                              <a:rPr lang="en-US" sz="3758" b="0" i="0">
-                                <a:solidFill>
-                                  <a:srgbClr val="111111"/>
-                                </a:solidFill>
-                                <a:latin typeface="Cambria Math" panose="02040503050406030204" pitchFamily="18" charset="0"/>
-                                <a:ea typeface="Cambria Math"/>
-                                <a:cs typeface="Cambria Math"/>
-                              </a:rPr>
-                              <m:t>D</m:t>
-                            </m:r>
-                          </m:e>
-                          <m:sub>
-                            <m:r>
-                              <m:rPr>
-                                <m:sty m:val="p"/>
-                              </m:rPr>
-                              <a:rPr lang="en-US" sz="3758" b="0" i="0">
-                                <a:solidFill>
-                                  <a:srgbClr val="111111"/>
-                                </a:solidFill>
-                                <a:latin typeface="Cambria Math" panose="02040503050406030204" pitchFamily="18" charset="0"/>
-                                <a:ea typeface="Cambria Math"/>
-                                <a:cs typeface="Cambria Math"/>
-                              </a:rPr>
-                              <m:t>f</m:t>
-                            </m:r>
-                          </m:sub>
-                        </m:sSub>
-                        <m:r>
-                          <m:rPr>
-                            <m:sty m:val="p"/>
-                          </m:rPr>
-                          <a:rPr lang="en-US" sz="3758" b="0" i="0">
-                            <a:solidFill>
-                              <a:srgbClr val="111111"/>
-                            </a:solidFill>
-                            <a:latin typeface="Cambria Math" panose="02040503050406030204" pitchFamily="18" charset="0"/>
-                            <a:ea typeface="Cambria Math"/>
-                            <a:cs typeface="Cambria Math"/>
-                          </a:rPr>
-                          <m:t>)</m:t>
-                        </m:r>
-                        <m:r>
-                          <m:rPr>
-                            <m:sty m:val="p"/>
-                          </m:rPr>
-                          <a:rPr lang="en-US" sz="3758" b="0" i="0">
-                            <a:solidFill>
-                              <a:srgbClr val="111111"/>
-                            </a:solidFill>
-                            <a:latin typeface="Cambria Math" panose="02040503050406030204" pitchFamily="18" charset="0"/>
-                            <a:ea typeface="Cambria Math"/>
-                            <a:cs typeface="Cambria Math"/>
-                          </a:rPr>
-                          <m:t>+</m:t>
-                        </m:r>
-                        <m:r>
-                          <a:rPr lang="en-US" sz="3758" b="0" i="1">
-                            <a:solidFill>
-                              <a:srgbClr val="111111"/>
-                            </a:solidFill>
-                            <a:latin typeface="Cambria Math" panose="02040503050406030204" pitchFamily="18" charset="0"/>
-                            <a:ea typeface="Cambria Math"/>
-                            <a:cs typeface="Cambria Math"/>
-                          </a:rPr>
-                          <m:t>γ</m:t>
-                        </m:r>
-                        <m:r>
-                          <a:rPr lang="en-US" sz="3758" b="0" i="1">
-                            <a:solidFill>
-                              <a:srgbClr val="111111"/>
-                            </a:solidFill>
-                            <a:latin typeface="Cambria Math" panose="02040503050406030204" pitchFamily="18" charset="0"/>
-                            <a:ea typeface="Cambria Math"/>
-                            <a:cs typeface="Cambria Math"/>
-                          </a:rPr>
-                          <m:t> </m:t>
-                        </m:r>
-                        <m:sSub>
-                          <m:sSubPr>
-                            <m:ctrlPr>
-                              <a:rPr lang="en-US" sz="3758" b="0" i="1">
-                                <a:solidFill>
-                                  <a:srgbClr val="111111"/>
-                                </a:solidFill>
-                                <a:latin typeface="Cambria Math" panose="02040503050406030204" pitchFamily="18" charset="0"/>
-                                <a:ea typeface="Cambria Math"/>
-                                <a:cs typeface="Cambria Math"/>
-                              </a:rPr>
-                            </m:ctrlPr>
-                          </m:sSubPr>
-                          <m:e>
-                            <m:r>
-                              <a:rPr lang="en-US" sz="3758" b="0" i="1">
-                                <a:solidFill>
-                                  <a:srgbClr val="111111"/>
-                                </a:solidFill>
-                                <a:latin typeface="Cambria Math" panose="02040503050406030204" pitchFamily="18" charset="0"/>
-                                <a:ea typeface="Cambria Math"/>
-                                <a:cs typeface="Cambria Math"/>
-                              </a:rPr>
-                              <m:t>ℓ</m:t>
-                            </m:r>
-                          </m:e>
-                          <m:sub>
-                            <m:r>
-                              <m:rPr>
-                                <m:sty m:val="p"/>
-                              </m:rPr>
-                              <a:rPr lang="en-US" sz="3758" b="0" i="0">
-                                <a:solidFill>
-                                  <a:srgbClr val="111111"/>
-                                </a:solidFill>
-                                <a:latin typeface="Cambria Math" panose="02040503050406030204" pitchFamily="18" charset="0"/>
-                                <a:ea typeface="Cambria Math"/>
-                                <a:cs typeface="Cambria Math"/>
-                              </a:rPr>
-                              <m:t>r</m:t>
-                            </m:r>
-                          </m:sub>
-                        </m:sSub>
-                        <m:r>
-                          <m:rPr>
-                            <m:sty m:val="p"/>
-                          </m:rPr>
-                          <a:rPr lang="en-US" sz="3758" b="0" i="0">
-                            <a:solidFill>
-                              <a:srgbClr val="111111"/>
-                            </a:solidFill>
-                            <a:latin typeface="Cambria Math" panose="02040503050406030204" pitchFamily="18" charset="0"/>
-                            <a:ea typeface="Cambria Math"/>
-                            <a:cs typeface="Cambria Math"/>
-                          </a:rPr>
-                          <m:t>(</m:t>
-                        </m:r>
-                        <m:r>
-                          <m:rPr>
-                            <m:sty m:val="bi"/>
-                          </m:rPr>
-                          <a:rPr lang="en-US" sz="3758" b="1" i="1">
-                            <a:solidFill>
-                              <a:srgbClr val="111111"/>
-                            </a:solidFill>
-                            <a:latin typeface="Cambria Math" panose="02040503050406030204" pitchFamily="18" charset="0"/>
-                            <a:ea typeface="Cambria Math"/>
-                            <a:cs typeface="Cambria Math"/>
-                          </a:rPr>
-                          <m:t>θ</m:t>
-                        </m:r>
-                        <m:r>
-                          <m:rPr>
-                            <m:sty m:val="p"/>
-                          </m:rPr>
-                          <a:rPr lang="en-US" sz="3758" b="0" i="0">
-                            <a:solidFill>
-                              <a:srgbClr val="111111"/>
-                            </a:solidFill>
-                            <a:latin typeface="Cambria Math" panose="02040503050406030204" pitchFamily="18" charset="0"/>
-                            <a:ea typeface="Cambria Math"/>
-                            <a:cs typeface="Cambria Math"/>
-                          </a:rPr>
-                          <m:t>;</m:t>
-                        </m:r>
-                        <m:sSub>
-                          <m:sSubPr>
-                            <m:ctrlPr>
-                              <a:rPr lang="en-US" sz="3758" b="0" i="1">
-                                <a:solidFill>
-                                  <a:srgbClr val="111111"/>
-                                </a:solidFill>
-                                <a:latin typeface="Cambria Math" panose="02040503050406030204" pitchFamily="18" charset="0"/>
-                                <a:ea typeface="Cambria Math"/>
-                                <a:cs typeface="Cambria Math"/>
-                              </a:rPr>
-                            </m:ctrlPr>
-                          </m:sSubPr>
-                          <m:e>
-                            <m:r>
-                              <m:rPr>
-                                <m:scr m:val="script"/>
-                                <m:sty m:val="p"/>
-                              </m:rPr>
-                              <a:rPr lang="en-US" sz="3758" b="0" i="0">
-                                <a:solidFill>
-                                  <a:srgbClr val="111111"/>
-                                </a:solidFill>
-                                <a:latin typeface="Cambria Math" panose="02040503050406030204" pitchFamily="18" charset="0"/>
-                                <a:ea typeface="Cambria Math"/>
-                                <a:cs typeface="Cambria Math"/>
-                              </a:rPr>
-                              <m:t>D</m:t>
-                            </m:r>
-                          </m:e>
-                          <m:sub>
-                            <m:r>
-                              <m:rPr>
-                                <m:sty m:val="p"/>
-                              </m:rPr>
-                              <a:rPr lang="en-US" sz="3758" b="0" i="0">
-                                <a:solidFill>
-                                  <a:srgbClr val="111111"/>
-                                </a:solidFill>
-                                <a:latin typeface="Cambria Math" panose="02040503050406030204" pitchFamily="18" charset="0"/>
-                                <a:ea typeface="Cambria Math"/>
-                                <a:cs typeface="Cambria Math"/>
-                              </a:rPr>
-                              <m:t>r</m:t>
-                            </m:r>
-                          </m:sub>
-                        </m:sSub>
-                        <m:r>
-                          <m:rPr>
-                            <m:sty m:val="p"/>
-                          </m:rPr>
-                          <a:rPr lang="en-US" sz="3758" b="0" i="0">
-                            <a:solidFill>
-                              <a:srgbClr val="111111"/>
-                            </a:solidFill>
-                            <a:latin typeface="Cambria Math" panose="02040503050406030204" pitchFamily="18" charset="0"/>
-                            <a:ea typeface="Cambria Math"/>
-                            <a:cs typeface="Cambria Math"/>
-                          </a:rPr>
-                          <m:t>∪</m:t>
-                        </m:r>
-                        <m:sSub>
-                          <m:sSubPr>
-                            <m:ctrlPr>
-                              <a:rPr lang="en-US" sz="3758" b="0" i="1">
-                                <a:solidFill>
-                                  <a:srgbClr val="111111"/>
-                                </a:solidFill>
-                                <a:latin typeface="Cambria Math" panose="02040503050406030204" pitchFamily="18" charset="0"/>
-                                <a:ea typeface="Cambria Math"/>
-                                <a:cs typeface="Cambria Math"/>
-                              </a:rPr>
-                            </m:ctrlPr>
-                          </m:sSubPr>
-                          <m:e>
-                            <m:r>
-                              <m:rPr>
-                                <m:scr m:val="script"/>
-                                <m:sty m:val="p"/>
-                              </m:rPr>
-                              <a:rPr lang="en-US" sz="3758" b="0" i="0">
-                                <a:solidFill>
-                                  <a:srgbClr val="111111"/>
-                                </a:solidFill>
-                                <a:latin typeface="Cambria Math" panose="02040503050406030204" pitchFamily="18" charset="0"/>
-                                <a:ea typeface="Cambria Math"/>
-                                <a:cs typeface="Cambria Math"/>
-                              </a:rPr>
-                              <m:t>D</m:t>
-                            </m:r>
-                          </m:e>
-                          <m:sub>
-                            <m:r>
-                              <m:rPr>
-                                <m:sty m:val="p"/>
-                              </m:rPr>
-                              <a:rPr lang="en-US" sz="3758" b="0" i="0">
-                                <a:solidFill>
-                                  <a:srgbClr val="111111"/>
-                                </a:solidFill>
-                                <a:latin typeface="Cambria Math" panose="02040503050406030204" pitchFamily="18" charset="0"/>
-                                <a:ea typeface="Cambria Math"/>
-                                <a:cs typeface="Cambria Math"/>
-                              </a:rPr>
-                              <m:t>p</m:t>
-                            </m:r>
-                          </m:sub>
-                        </m:sSub>
-                        <m:r>
-                          <m:rPr>
-                            <m:sty m:val="p"/>
-                          </m:rPr>
-                          <a:rPr lang="en-US" sz="3758" b="0" i="0">
-                            <a:solidFill>
-                              <a:srgbClr val="111111"/>
-                            </a:solidFill>
-                            <a:latin typeface="Cambria Math" panose="02040503050406030204" pitchFamily="18" charset="0"/>
-                            <a:ea typeface="Cambria Math"/>
-                            <a:cs typeface="Cambria Math"/>
-                          </a:rPr>
-                          <m:t>)</m:t>
-                        </m:r>
-                        <m:r>
-                          <m:rPr>
-                            <m:sty m:val="p"/>
-                          </m:rPr>
-                          <a:rPr lang="en-US" sz="3758" b="0" i="0">
-                            <a:solidFill>
-                              <a:srgbClr val="111111"/>
-                            </a:solidFill>
-                            <a:latin typeface="Cambria Math" panose="02040503050406030204" pitchFamily="18" charset="0"/>
-                            <a:ea typeface="Cambria Math"/>
-                            <a:cs typeface="Cambria Math"/>
-                          </a:rPr>
-                          <m:t>+</m:t>
-                        </m:r>
-                        <m:r>
-                          <a:rPr lang="en-US" sz="3758" b="0" i="1">
-                            <a:solidFill>
-                              <a:srgbClr val="111111"/>
-                            </a:solidFill>
-                            <a:latin typeface="Cambria Math" panose="02040503050406030204" pitchFamily="18" charset="0"/>
-                            <a:ea typeface="Cambria Math"/>
-                            <a:cs typeface="Cambria Math"/>
-                          </a:rPr>
-                          <m:t>λ</m:t>
-                        </m:r>
-                        <m:r>
-                          <a:rPr lang="en-US" sz="3758" b="0" i="1">
-                            <a:solidFill>
-                              <a:srgbClr val="111111"/>
-                            </a:solidFill>
-                            <a:latin typeface="Cambria Math" panose="02040503050406030204" pitchFamily="18" charset="0"/>
-                            <a:ea typeface="Cambria Math"/>
-                            <a:cs typeface="Cambria Math"/>
-                          </a:rPr>
-                          <m:t> </m:t>
-                        </m:r>
-                        <m:sSub>
-                          <m:sSubPr>
-                            <m:ctrlPr>
-                              <a:rPr lang="en-US" sz="3758" b="0" i="1">
-                                <a:solidFill>
-                                  <a:srgbClr val="111111"/>
-                                </a:solidFill>
-                                <a:latin typeface="Cambria Math" panose="02040503050406030204" pitchFamily="18" charset="0"/>
-                                <a:ea typeface="Cambria Math"/>
-                                <a:cs typeface="Cambria Math"/>
-                              </a:rPr>
-                            </m:ctrlPr>
-                          </m:sSubPr>
-                          <m:e>
-                            <m:r>
-                              <a:rPr lang="en-US" sz="3758" b="0" i="1">
-                                <a:solidFill>
-                                  <a:srgbClr val="111111"/>
-                                </a:solidFill>
-                                <a:latin typeface="Cambria Math" panose="02040503050406030204" pitchFamily="18" charset="0"/>
-                                <a:ea typeface="Cambria Math"/>
-                                <a:cs typeface="Cambria Math"/>
-                              </a:rPr>
-                              <m:t>ℓ</m:t>
-                            </m:r>
-                          </m:e>
-                          <m:sub>
-                            <m:r>
-                              <m:rPr>
-                                <m:sty m:val="p"/>
-                              </m:rPr>
-                              <a:rPr lang="en-US" sz="3758" b="0" i="0">
-                                <a:solidFill>
-                                  <a:srgbClr val="111111"/>
-                                </a:solidFill>
-                                <a:latin typeface="Cambria Math" panose="02040503050406030204" pitchFamily="18" charset="0"/>
-                                <a:ea typeface="Cambria Math"/>
-                                <a:cs typeface="Cambria Math"/>
-                              </a:rPr>
-                              <m:t>v</m:t>
-                            </m:r>
-                            <m:r>
-                              <m:rPr>
-                                <m:sty m:val="p"/>
-                              </m:rPr>
-                              <a:rPr lang="en-US" sz="3758" b="0" i="0">
-                                <a:solidFill>
-                                  <a:srgbClr val="111111"/>
-                                </a:solidFill>
-                                <a:latin typeface="Cambria Math" panose="02040503050406030204" pitchFamily="18" charset="0"/>
-                                <a:ea typeface="Cambria Math"/>
-                                <a:cs typeface="Cambria Math"/>
-                              </a:rPr>
-                              <m:t>n</m:t>
-                            </m:r>
-                          </m:sub>
-                        </m:sSub>
-                        <m:r>
-                          <m:rPr>
-                            <m:sty m:val="p"/>
-                          </m:rPr>
-                          <a:rPr lang="en-US" sz="3758" b="0" i="0">
-                            <a:solidFill>
-                              <a:srgbClr val="111111"/>
-                            </a:solidFill>
-                            <a:latin typeface="Cambria Math" panose="02040503050406030204" pitchFamily="18" charset="0"/>
-                            <a:ea typeface="Cambria Math"/>
-                            <a:cs typeface="Cambria Math"/>
-                          </a:rPr>
-                          <m:t>(</m:t>
-                        </m:r>
-                        <m:r>
-                          <m:rPr>
-                            <m:sty m:val="bi"/>
-                          </m:rPr>
-                          <a:rPr lang="en-US" sz="3758" b="1" i="1">
-                            <a:solidFill>
-                              <a:srgbClr val="111111"/>
-                            </a:solidFill>
-                            <a:latin typeface="Cambria Math" panose="02040503050406030204" pitchFamily="18" charset="0"/>
-                            <a:ea typeface="Cambria Math"/>
-                            <a:cs typeface="Cambria Math"/>
-                          </a:rPr>
-                          <m:t>θ</m:t>
-                        </m:r>
-                        <m:r>
-                          <m:rPr>
-                            <m:sty m:val="p"/>
-                          </m:rPr>
-                          <a:rPr lang="en-US" sz="3758" b="0" i="0">
-                            <a:solidFill>
-                              <a:srgbClr val="111111"/>
-                            </a:solidFill>
-                            <a:latin typeface="Cambria Math" panose="02040503050406030204" pitchFamily="18" charset="0"/>
-                            <a:ea typeface="Cambria Math"/>
-                            <a:cs typeface="Cambria Math"/>
-                          </a:rPr>
-                          <m:t>)</m:t>
-                        </m:r>
-                      </m:oMath>
-                    </m:oMathPara>
-                  </a14:m>
-                  <a:endParaRPr lang="en-US" sz="3758" b="0" i="0" kern="100" dirty="0">
-                    <a:solidFill>
-                      <a:srgbClr val="111111"/>
-                    </a:solidFill>
-                    <a:latin typeface="EB Garamond"/>
-                    <a:ea typeface="EB Garamond"/>
-                    <a:cs typeface="EB Garamond"/>
-                  </a:endParaRPr>
-                </a:p>
               </p:txBody>
             </p:sp>
           </mc:Choice>
           <mc:Fallback>
             <p:sp>
               <p:nvSpPr>
-                <p:cNvPr id="44" name="Equations: align with … ⇒ forget align with … ⇒ recover"/>
+                <p:cNvPr id="46" name="Equations: align with … ⇒ forget align with … ⇒ recover"/>
                 <p:cNvSpPr txBox="1">
                   <a:spLocks noRot="1" noChangeAspect="1" noMove="1" noResize="1" noEditPoints="1" noAdjustHandles="1" noChangeArrowheads="1" noChangeShapeType="1" noTextEdit="1"/>
                 </p:cNvSpPr>
@@ -10415,7 +6411,7 @@
                   <a:avLst/>
                 </a:prstGeom>
                 <a:blipFill>
-                  <a:blip r:embed="rId32"/>
+                  <a:blip r:embed="rId36"/>
                   <a:stretch>
                     <a:fillRect/>
                   </a:stretch>
@@ -10436,9 +6432,129 @@
             </p:sp>
           </mc:Fallback>
         </mc:AlternateContent>
+        <p:pic>
+          <p:nvPicPr>
+            <p:cNvPr id="47" name="Equation: \lvn(\btheta)=\mathbb{E}_{\Df}\big[\Delta_{\Df}(\bx;\btheta)" descr="\lvn(\btheta)=\mathbb{E}_{\Df}\big[\Delta_{\Df}(\bx;\btheta)\big]+\mathbb{E}_{\Dp}\big[\Delta_{\Dp}(\bx;\btheta)\big]"/>
+            <p:cNvPicPr>
+              <a:picLocks noChangeAspect="1"/>
+            </p:cNvPicPr>
+            <p:nvPr/>
+          </p:nvPicPr>
+          <p:blipFill>
+            <a:blip r:embed="rId37">
+              <a:extLst>
+                <a:ext uri="{96DAC541-7B7A-43D3-8B79-37D633B846F1}">
+                  <asvg:svgBlip xmlns:asvg="http://schemas.microsoft.com/office/drawing/2016/SVG/main" r:embed="rId38"/>
+                </a:ext>
+              </a:extLst>
+            </a:blip>
+            <a:stretch>
+              <a:fillRect/>
+            </a:stretch>
+          </p:blipFill>
+          <p:spPr>
+            <a:xfrm>
+              <a:off x="19861113" y="21982807"/>
+              <a:ext cx="7938046" cy="557510"/>
+            </a:xfrm>
+            <a:prstGeom prst="rect">
+              <a:avLst/>
+            </a:prstGeom>
+          </p:spPr>
+        </p:pic>
+        <p:pic>
+          <p:nvPicPr>
+            <p:cNvPr id="48" name="Equation: \Delta_{\Df}=\tfrac{1}{|\mathcal{S}|}\textstyle\sum_{i\in\ma" descr="\Delta_{\Df}=\tfrac{1}{|\mathcal{S}|}\textstyle\sum_{i\in\mathcal{S}}\big(\|\bv_i(\bx;\btheta)\|_2-\|\bv_i(\bx;\tu)\|_2\big)^2"/>
+            <p:cNvPicPr>
+              <a:picLocks noChangeAspect="1"/>
+            </p:cNvPicPr>
+            <p:nvPr/>
+          </p:nvPicPr>
+          <p:blipFill>
+            <a:blip r:embed="rId39">
+              <a:extLst>
+                <a:ext uri="{96DAC541-7B7A-43D3-8B79-37D633B846F1}">
+                  <asvg:svgBlip xmlns:asvg="http://schemas.microsoft.com/office/drawing/2016/SVG/main" r:embed="rId40"/>
+                </a:ext>
+              </a:extLst>
+            </a:blip>
+            <a:stretch>
+              <a:fillRect/>
+            </a:stretch>
+          </p:blipFill>
+          <p:spPr>
+            <a:xfrm>
+              <a:off x="19590097" y="22617410"/>
+              <a:ext cx="8479929" cy="726430"/>
+            </a:xfrm>
+            <a:prstGeom prst="rect">
+              <a:avLst/>
+            </a:prstGeom>
+          </p:spPr>
+        </p:pic>
+        <p:pic>
+          <p:nvPicPr>
+            <p:cNvPr id="49" name="Equation: \Delta_{\Dp}=\tfrac{1}{|\mathcal{S}|}\textstyle\sum_{i\in\ma" descr="\Delta_{\Dp}=\tfrac{1}{|\mathcal{S}|}\textstyle\sum_{i\in\mathcal{S}}\big(\|\bv_i(\bx;\btheta)\|_2-\|\bv_i(\bx;\tor)\|_2\big)^2"/>
+            <p:cNvPicPr>
+              <a:picLocks noChangeAspect="1"/>
+            </p:cNvPicPr>
+            <p:nvPr/>
+          </p:nvPicPr>
+          <p:blipFill>
+            <a:blip r:embed="rId41">
+              <a:extLst>
+                <a:ext uri="{96DAC541-7B7A-43D3-8B79-37D633B846F1}">
+                  <asvg:svgBlip xmlns:asvg="http://schemas.microsoft.com/office/drawing/2016/SVG/main" r:embed="rId42"/>
+                </a:ext>
+              </a:extLst>
+            </a:blip>
+            <a:stretch>
+              <a:fillRect/>
+            </a:stretch>
+          </p:blipFill>
+          <p:spPr>
+            <a:xfrm>
+              <a:off x="19578786" y="24074586"/>
+              <a:ext cx="8502551" cy="726430"/>
+            </a:xfrm>
+            <a:prstGeom prst="rect">
+              <a:avLst/>
+            </a:prstGeom>
+          </p:spPr>
+        </p:pic>
+        <p:pic>
+          <p:nvPicPr>
+            <p:cNvPr id="50" name="Equation: \minimize_{\btheta}\;\lf(\btheta;\Df)+\gamma\,\lr(\btheta;\D" descr="\minimize_{\btheta}\;\lf(\btheta;\Df)+\gamma\,\lr(\btheta;\Dr\cup\Dp)+\lambda\,\lvn(\btheta)"/>
+            <p:cNvPicPr>
+              <a:picLocks noChangeAspect="1"/>
+            </p:cNvPicPr>
+            <p:nvPr/>
+          </p:nvPicPr>
+          <p:blipFill>
+            <a:blip r:embed="rId43">
+              <a:extLst>
+                <a:ext uri="{96DAC541-7B7A-43D3-8B79-37D633B846F1}">
+                  <asvg:svgBlip xmlns:asvg="http://schemas.microsoft.com/office/drawing/2016/SVG/main" r:embed="rId44"/>
+                </a:ext>
+              </a:extLst>
+            </a:blip>
+            <a:stretch>
+              <a:fillRect/>
+            </a:stretch>
+          </p:blipFill>
+          <p:spPr>
+            <a:xfrm>
+              <a:off x="19358521" y="25655439"/>
+              <a:ext cx="8943231" cy="699046"/>
+            </a:xfrm>
+            <a:prstGeom prst="rect">
+              <a:avLst/>
+            </a:prstGeom>
+          </p:spPr>
+        </p:pic>
         <p:sp>
           <p:nvSpPr>
-            <p:cNvPr id="45" name="Insight: Insight 3. Standard backdoor training distorts s"/>
+            <p:cNvPr id="51" name="Insight: Insight 3. Standard backdoor training distorts s"/>
             <p:cNvSpPr/>
             <p:nvPr/>
           </p:nvSpPr>
@@ -10533,7 +6649,7 @@
         </p:sp>
         <p:sp>
           <p:nvSpPr>
-            <p:cNvPr id="46" name="Insight: Insight 3. Standard backdoor training distorts s (rule)"/>
+            <p:cNvPr id="52" name="Insight: Insight 3. Standard backdoor training distorts s (rule)"/>
             <p:cNvSpPr/>
             <p:nvPr/>
           </p:nvSpPr>
@@ -10556,21 +6672,21 @@
       </p:grpSp>
       <p:grpSp>
         <p:nvGrpSpPr>
-          <p:cNvPr id="66" name="Section: Experiment Result Highlights"/>
+          <p:cNvPr id="72" name="Section: Experiment Result Highlights"/>
           <p:cNvGrpSpPr/>
           <p:nvPr/>
         </p:nvGrpSpPr>
         <p:grpSpPr>
           <a:xfrm>
             <a:off x="29205138" y="4509641"/>
-            <a:ext cx="14588752" cy="15742742"/>
+            <a:ext cx="14588752" cy="25866328"/>
             <a:chOff x="29205138" y="4509641"/>
-            <a:chExt cx="14588752" cy="15742742"/>
+            <a:chExt cx="14588752" cy="25866328"/>
           </a:xfrm>
         </p:grpSpPr>
         <p:sp>
           <p:nvSpPr>
-            <p:cNvPr id="47" name="Section title: Experiment Result Highlights"/>
+            <p:cNvPr id="53" name="Section title: Experiment Result Highlights"/>
             <p:cNvSpPr txBox="1"/>
             <p:nvPr/>
           </p:nvSpPr>
@@ -10631,17 +6747,17 @@
         </p:sp>
         <p:pic>
           <p:nvPicPr>
-            <p:cNvPr id="48" name="Picture: table1_muse" descr="Table 1 of the paper: UE, BE and UT on MUSE-Books and MUSE-News"/>
+            <p:cNvPr id="54" name="Picture: table1_muse" descr="Table 1 of the paper: UE, BE and UT on MUSE-Books and MUSE-News"/>
             <p:cNvPicPr>
               <a:picLocks noChangeAspect="1"/>
             </p:cNvPicPr>
             <p:nvPr/>
           </p:nvPicPr>
           <p:blipFill>
-            <a:blip r:embed="rId33">
+            <a:blip r:embed="rId45">
               <a:extLst>
                 <a:ext uri="{96DAC541-7B7A-43D3-8B79-37D633B846F1}">
-                  <asvg:svgBlip xmlns:asvg="http://schemas.microsoft.com/office/drawing/2016/SVG/main" r:embed="rId34"/>
+                  <asvg:svgBlip xmlns:asvg="http://schemas.microsoft.com/office/drawing/2016/SVG/main" r:embed="rId46"/>
                 </a:ext>
               </a:extLst>
             </a:blip>
@@ -10661,7 +6777,7 @@
         </p:pic>
         <p:sp>
           <p:nvSpPr>
-            <p:cNvPr id="49" name="Caption: Table 1. Results on MUSE [4] with NPO [5] / RMU "/>
+            <p:cNvPr id="55" name="Caption: Table 1. Results on MUSE [4] with NPO [5] / RMU "/>
             <p:cNvSpPr txBox="1"/>
             <p:nvPr/>
           </p:nvSpPr>
@@ -10753,17 +6869,17 @@
         </p:sp>
         <p:pic>
           <p:nvPicPr>
-            <p:cNvPr id="50" name="Picture: table2_wmdp" descr="Table 2 of the paper: results on WMDP-Bio"/>
+            <p:cNvPr id="56" name="Picture: table2_wmdp" descr="Table 2 of the paper: results on WMDP-Bio"/>
             <p:cNvPicPr>
               <a:picLocks noChangeAspect="1"/>
             </p:cNvPicPr>
             <p:nvPr/>
           </p:nvPicPr>
           <p:blipFill>
-            <a:blip r:embed="rId35">
+            <a:blip r:embed="rId47">
               <a:extLst>
                 <a:ext uri="{96DAC541-7B7A-43D3-8B79-37D633B846F1}">
-                  <asvg:svgBlip xmlns:asvg="http://schemas.microsoft.com/office/drawing/2016/SVG/main" r:embed="rId36"/>
+                  <asvg:svgBlip xmlns:asvg="http://schemas.microsoft.com/office/drawing/2016/SVG/main" r:embed="rId48"/>
                 </a:ext>
               </a:extLst>
             </a:blip>
@@ -10773,8 +6889,8 @@
           </p:blipFill>
           <p:spPr>
             <a:xfrm>
-              <a:off x="29205138" y="14024223"/>
-              <a:ext cx="8567738" cy="2821781"/>
+              <a:off x="29205138" y="21585882"/>
+              <a:ext cx="7887742" cy="2597795"/>
             </a:xfrm>
             <a:prstGeom prst="rect">
               <a:avLst/>
@@ -10783,14 +6899,14 @@
         </p:pic>
         <p:sp>
           <p:nvSpPr>
-            <p:cNvPr id="51" name="Caption: Table 2. Results on WMDP-Bio [6] (Zephyr-7B, acc"/>
+            <p:cNvPr id="57" name="Caption: Table 2. Results on WMDP-Bio [6] (Zephyr-7B, acc"/>
             <p:cNvSpPr txBox="1"/>
             <p:nvPr/>
           </p:nvSpPr>
           <p:spPr>
             <a:xfrm>
-              <a:off x="29205138" y="16928157"/>
-              <a:ext cx="8619144" cy="1188541"/>
+              <a:off x="29205138" y="24265830"/>
+              <a:ext cx="7935068" cy="1188541"/>
             </a:xfrm>
             <a:prstGeom prst="rect">
               <a:avLst/>
@@ -10850,18 +6966,18 @@
         </p:sp>
         <p:sp>
           <p:nvSpPr>
-            <p:cNvPr id="52" name="Takeaway: Takeaway.NPO‑Backdoor looks unlearned (VM 0.02) "/>
+            <p:cNvPr id="58" name="Takeaway: Takeaway.NPO‑Backdoor looks unlearned (VM 0.02) "/>
             <p:cNvSpPr/>
             <p:nvPr/>
           </p:nvSpPr>
           <p:spPr>
             <a:xfrm>
-              <a:off x="38234094" y="14057561"/>
-              <a:ext cx="4965353" cy="6194822"/>
+              <a:off x="29238476" y="25837604"/>
+              <a:ext cx="7821067" cy="4509790"/>
             </a:xfrm>
             <a:prstGeom prst="roundRect">
               <a:avLst>
-                <a:gd name="adj" fmla="val 6621"/>
+                <a:gd name="adj" fmla="val 7290"/>
               </a:avLst>
             </a:prstGeom>
             <a:noFill/>
@@ -10872,7 +6988,7 @@
             </a:ln>
           </p:spPr>
           <p:txBody>
-            <a:bodyPr wrap="square" lIns="233784" tIns="263766" rIns="233784" bIns="263766" anchor="ctr" rtlCol="0">
+            <a:bodyPr wrap="square" lIns="198088" tIns="230848" rIns="198088" bIns="230848" anchor="ctr" rtlCol="0">
               <a:noAutofit/>
             </a:bodyPr>
             <a:lstStyle/>
@@ -10954,10 +7070,232 @@
             </a:p>
           </p:txBody>
         </p:sp>
+        <p:pic>
+          <p:nvPicPr>
+            <p:cNvPr id="59" name="Picture: motivation" descr="UE on D_f versus BE on D_p for prefix, infix, suffix triggers"/>
+            <p:cNvPicPr>
+              <a:picLocks noChangeAspect="1"/>
+            </p:cNvPicPr>
+            <p:nvPr/>
+          </p:nvPicPr>
+          <p:blipFill>
+            <a:blip r:embed="rId49">
+              <a:extLst>
+                <a:ext uri="{96DAC541-7B7A-43D3-8B79-37D633B846F1}">
+                  <asvg:svgBlip xmlns:asvg="http://schemas.microsoft.com/office/drawing/2016/SVG/main" r:embed="rId50"/>
+                </a:ext>
+              </a:extLst>
+            </a:blip>
+            <a:stretch>
+              <a:fillRect/>
+            </a:stretch>
+          </p:blipFill>
+          <p:spPr>
+            <a:xfrm>
+              <a:off x="29906565" y="14024223"/>
+              <a:ext cx="12624792" cy="5941070"/>
+            </a:xfrm>
+            <a:prstGeom prst="rect">
+              <a:avLst/>
+            </a:prstGeom>
+          </p:spPr>
+        </p:pic>
+        <p:sp>
+          <p:nvSpPr>
+            <p:cNvPr id="60" name="Caption: Figure 4. Trigger position: the prefix trigger c"/>
+            <p:cNvSpPr txBox="1"/>
+            <p:nvPr/>
+          </p:nvSpPr>
+          <p:spPr>
+            <a:xfrm>
+              <a:off x="29906565" y="20047446"/>
+              <a:ext cx="12700541" cy="1188541"/>
+            </a:xfrm>
+            <a:prstGeom prst="rect">
+              <a:avLst/>
+            </a:prstGeom>
+            <a:noFill/>
+          </p:spPr>
+          <p:txBody>
+            <a:bodyPr wrap="square" lIns="0" tIns="0" rIns="0" bIns="0" anchor="t" rtlCol="0">
+              <a:spAutoFit/>
+            </a:bodyPr>
+            <a:lstStyle/>
+            <a:p>
+              <a:pPr algn="just" marL="0" indent="0">
+                <a:lnSpc>
+                  <a:spcPts val="4680"/>
+                </a:lnSpc>
+                <a:spcBef>
+                  <a:spcPts val="0"/>
+                </a:spcBef>
+                <a:spcAft>
+                  <a:spcPts val="0"/>
+                </a:spcAft>
+                <a:buNone/>
+              </a:pPr>
+              <a:r>
+                <a:rPr lang="en-US" sz="3966" b="1" i="0" kern="100" dirty="0">
+                  <a:solidFill>
+                    <a:srgbClr val="111111"/>
+                  </a:solidFill>
+                  <a:latin typeface="EB Garamond"/>
+                  <a:ea typeface="EB Garamond"/>
+                  <a:cs typeface="EB Garamond"/>
+                </a:rPr>
+                <a:t>Figure 4.</a:t>
+              </a:r>
+              <a:r>
+                <a:rPr lang="en-US" sz="3966" b="0" i="0" kern="100" dirty="0">
+                  <a:solidFill>
+                    <a:srgbClr val="111111"/>
+                  </a:solidFill>
+                  <a:latin typeface="EB Garamond"/>
+                  <a:ea typeface="EB Garamond"/>
+                  <a:cs typeface="EB Garamond"/>
+                </a:rPr>
+                <a:t> Trigger position: the </a:t>
+              </a:r>
+              <a:r>
+                <a:rPr lang="en-US" sz="3966" b="1" i="0" kern="100" dirty="0">
+                  <a:solidFill>
+                    <a:srgbClr val="111111"/>
+                  </a:solidFill>
+                  <a:latin typeface="EB Garamond"/>
+                  <a:ea typeface="EB Garamond"/>
+                  <a:cs typeface="EB Garamond"/>
+                </a:rPr>
+                <a:t>prefix</a:t>
+              </a:r>
+              <a:r>
+                <a:rPr lang="en-US" sz="3966" b="0" i="0" kern="100" dirty="0">
+                  <a:solidFill>
+                    <a:srgbClr val="111111"/>
+                  </a:solidFill>
+                  <a:latin typeface="EB Garamond"/>
+                  <a:ea typeface="EB Garamond"/>
+                  <a:cs typeface="EB Garamond"/>
+                </a:rPr>
+                <a:t> trigger comes closest to the desired zone (NPO, MUSE‑Books).</a:t>
+              </a:r>
+              <a:endParaRPr lang="en-US" sz="3966" b="0" i="0" kern="100" dirty="0">
+                <a:solidFill>
+                  <a:srgbClr val="111111"/>
+                </a:solidFill>
+                <a:latin typeface="EB Garamond"/>
+                <a:ea typeface="EB Garamond"/>
+                <a:cs typeface="EB Garamond"/>
+              </a:endParaRPr>
+            </a:p>
+          </p:txBody>
+        </p:sp>
+        <p:sp>
+          <p:nvSpPr>
+            <p:cNvPr id="61" name="Text: Attention sinks are a gateway: a prefix trigger "/>
+            <p:cNvSpPr/>
+            <p:nvPr/>
+          </p:nvSpPr>
+          <p:spPr>
+            <a:xfrm>
+              <a:off x="37525523" y="21590645"/>
+              <a:ext cx="5702498" cy="8785324"/>
+            </a:xfrm>
+            <a:prstGeom prst="roundRect">
+              <a:avLst>
+                <a:gd name="adj" fmla="val 6266"/>
+              </a:avLst>
+            </a:prstGeom>
+            <a:solidFill>
+              <a:srgbClr val="EEF4F1"/>
+            </a:solidFill>
+            <a:ln w="9525">
+              <a:solidFill>
+                <a:srgbClr val="18453B"/>
+              </a:solidFill>
+            </a:ln>
+          </p:spPr>
+          <p:txBody>
+            <a:bodyPr wrap="square" lIns="130873" tIns="119977" rIns="262546" bIns="119977" anchor="ctr" rtlCol="0">
+              <a:noAutofit/>
+            </a:bodyPr>
+            <a:lstStyle/>
+            <a:p>
+              <a:pPr algn="l" marL="592469" indent="-592469">
+                <a:lnSpc>
+                  <a:spcPts val="6376"/>
+                </a:lnSpc>
+                <a:spcBef>
+                  <a:spcPts val="0"/>
+                </a:spcBef>
+                <a:spcAft>
+                  <a:spcPts val="0"/>
+                </a:spcAft>
+                <a:buClr>
+                  <a:srgbClr val="111111"/>
+                </a:buClr>
+                <a:buSzPct val="100000"/>
+                <a:buFont typeface="Wingdings" pitchFamily="2" charset="2"/>
+                <a:buChar char="ü"/>
+              </a:pPr>
+              <a:r>
+                <a:rPr lang="en-US" sz="5314" b="1" i="0" kern="100" dirty="0">
+                  <a:solidFill>
+                    <a:srgbClr val="111111"/>
+                  </a:solidFill>
+                  <a:latin typeface="EB Garamond"/>
+                  <a:ea typeface="EB Garamond"/>
+                  <a:cs typeface="EB Garamond"/>
+                </a:rPr>
+                <a:t>Attention sinks are a gateway:</a:t>
+              </a:r>
+              <a:r>
+                <a:rPr lang="en-US" sz="5314" b="0" i="0" kern="100" dirty="0">
+                  <a:solidFill>
+                    <a:srgbClr val="111111"/>
+                  </a:solidFill>
+                  <a:latin typeface="EB Garamond"/>
+                  <a:ea typeface="EB Garamond"/>
+                  <a:cs typeface="EB Garamond"/>
+                </a:rPr>
+                <a:t> a prefix trigger restores forgotten knowledge; </a:t>
+              </a:r>
+              <a:r>
+                <a:rPr lang="en-US" sz="5314" b="1" i="0" kern="100" dirty="0">
+                  <a:solidFill>
+                    <a:srgbClr val="111111"/>
+                  </a:solidFill>
+                  <a:latin typeface="EB Garamond"/>
+                  <a:ea typeface="EB Garamond"/>
+                  <a:cs typeface="EB Garamond"/>
+                </a:rPr>
+                <a:t>value-norm alignment</a:t>
+              </a:r>
+              <a:r>
+                <a:rPr lang="en-US" sz="5314" b="0" i="0" kern="100" dirty="0">
+                  <a:solidFill>
+                    <a:srgbClr val="111111"/>
+                  </a:solidFill>
+                  <a:latin typeface="EB Garamond"/>
+                  <a:ea typeface="EB Garamond"/>
+                  <a:cs typeface="EB Garamond"/>
+                </a:rPr>
+                <a:t> makes it stealthier.</a:t>
+              </a:r>
+              <a:endParaRPr lang="en-US" sz="5314" b="0" i="0" kern="100" dirty="0">
+                <a:solidFill>
+                  <a:srgbClr val="111111"/>
+                </a:solidFill>
+                <a:latin typeface="EB Garamond"/>
+                <a:ea typeface="EB Garamond"/>
+                <a:cs typeface="EB Garamond"/>
+              </a:endParaRPr>
+            </a:p>
+          </p:txBody>
+        </p:sp>
       </p:grpSp>
       <p:grpSp>
         <p:nvGrpSpPr>
-          <p:cNvPr id="67" name="Section: Block"/>
+          <p:cNvPr id="73" name="Section: Block"/>
           <p:cNvGrpSpPr/>
           <p:nvPr/>
         </p:nvGrpSpPr>
@@ -10971,7 +7309,7 @@
         </p:grpSpPr>
         <p:sp>
           <p:nvSpPr>
-            <p:cNvPr id="56" name="Text: [1] Sijia Liu, et al. “Rethinking machine unlear"/>
+            <p:cNvPr id="62" name="Text: [1] Sijia Liu, et al. “Rethinking machine unlear"/>
             <p:cNvSpPr txBox="1"/>
             <p:nvPr/>
           </p:nvSpPr>
@@ -11060,7 +7398,7 @@
         </p:sp>
         <p:sp>
           <p:nvSpPr>
-            <p:cNvPr id="57" name="Text: [3] Guangxuan Xiao, et al. “Efficient streaming "/>
+            <p:cNvPr id="63" name="Text: [3] Guangxuan Xiao, et al. “Efficient streaming "/>
             <p:cNvSpPr txBox="1"/>
             <p:nvPr/>
           </p:nvSpPr>
@@ -11149,7 +7487,7 @@
         </p:sp>
         <p:sp>
           <p:nvSpPr>
-            <p:cNvPr id="58" name="Text: [5] Ruiqi Zhang, et al. “Negative preference opt"/>
+            <p:cNvPr id="64" name="Text: [5] Ruiqi Zhang, et al. “Negative preference opt"/>
             <p:cNvSpPr txBox="1"/>
             <p:nvPr/>
           </p:nvSpPr>
@@ -11239,7 +7577,7 @@
       </p:grpSp>
       <p:grpSp>
         <p:nvGrpSpPr>
-          <p:cNvPr id="68" name="Section: Footer"/>
+          <p:cNvPr id="74" name="Section: Footer"/>
           <p:cNvGrpSpPr/>
           <p:nvPr/>
         </p:nvGrpSpPr>
@@ -11253,7 +7591,7 @@
         </p:grpSpPr>
         <p:sp>
           <p:nvSpPr>
-            <p:cNvPr id="59" name="Text: Contact: bshang@msu.edu (rule)"/>
+            <p:cNvPr id="65" name="Text: Contact: bshang@msu.edu (rule)"/>
             <p:cNvSpPr/>
             <p:nvPr/>
           </p:nvSpPr>
@@ -11275,7 +7613,7 @@
         </p:sp>
         <p:sp>
           <p:nvSpPr>
-            <p:cNvPr id="60" name="Text: Contact: bshang@msu.edu"/>
+            <p:cNvPr id="66" name="Text: Contact: bshang@msu.edu"/>
             <p:cNvSpPr txBox="1"/>
             <p:nvPr/>
           </p:nvSpPr>

--- a/poster/forgetting-to-forget-colm2026-poster-48x36.pptx
+++ b/poster/forgetting-to-forget-colm2026-poster-48x36.pptx
@@ -3809,9 +3809,9 @@
         <p:grpSpPr>
           <a:xfrm>
             <a:off x="658267" y="4509641"/>
-            <a:ext cx="13301591" cy="20793968"/>
+            <a:ext cx="13301591" cy="21312336"/>
             <a:chOff x="658267" y="4509641"/>
-            <a:chExt cx="13301591" cy="20793968"/>
+            <a:chExt cx="13301591" cy="21312336"/>
           </a:xfrm>
         </p:grpSpPr>
         <p:sp>
@@ -3823,7 +3823,7 @@
           <p:spPr>
             <a:xfrm>
               <a:off x="658267" y="4509641"/>
-              <a:ext cx="13301591" cy="1813024"/>
+              <a:ext cx="13301591" cy="1848743"/>
             </a:xfrm>
             <a:prstGeom prst="rect">
               <a:avLst/>
@@ -3836,9 +3836,9 @@
             </a:bodyPr>
             <a:lstStyle/>
             <a:p>
-              <a:pPr algn="l" marL="872877" indent="-872877">
+              <a:pPr algn="l" marL="884188" indent="-884188">
                 <a:lnSpc>
-                  <a:spcPts val="7138"/>
+                  <a:spcPts val="7278"/>
                 </a:lnSpc>
                 <a:spcBef>
                   <a:spcPts val="0"/>
@@ -3854,7 +3854,7 @@
                 <a:buChar char="Ø"/>
               </a:pPr>
               <a:r>
-                <a:rPr lang="en-US" sz="6610" b="0" i="0" kern="100" dirty="0">
+                <a:rPr lang="en-US" sz="6739" b="0" i="0" kern="100" dirty="0">
                   <a:solidFill>
                     <a:srgbClr val="18453B"/>
                   </a:solidFill>
@@ -3865,7 +3865,7 @@
                 <a:t>Backdooring LLM Unlearning:</a:t>
               </a:r>
               <a:br>
-                <a:rPr lang="en-US" sz="6610" b="0" i="0" kern="100" dirty="0">
+                <a:rPr lang="en-US" sz="6739" b="0" i="0" kern="100" dirty="0">
                   <a:solidFill>
                     <a:srgbClr val="111111"/>
                   </a:solidFill>
@@ -3875,7 +3875,7 @@
                 </a:rPr>
               </a:br>
               <a:r>
-                <a:rPr lang="en-US" sz="6610" b="0" i="0" kern="100" dirty="0">
+                <a:rPr lang="en-US" sz="6739" b="0" i="0" kern="100" dirty="0">
                   <a:solidFill>
                     <a:srgbClr val="18453B"/>
                   </a:solidFill>
@@ -3885,7 +3885,7 @@
                 </a:rPr>
                 <a:t>A New Threat</a:t>
               </a:r>
-              <a:endParaRPr lang="en-US" sz="6610" b="0" i="0" kern="100" dirty="0">
+              <a:endParaRPr lang="en-US" sz="6739" b="0" i="0" kern="100" dirty="0">
                 <a:solidFill>
                   <a:srgbClr val="18453B"/>
                 </a:solidFill>
@@ -3906,8 +3906,8 @@
               </p:nvSpPr>
               <p:spPr>
                 <a:xfrm>
-                  <a:off x="658267" y="6520160"/>
-                  <a:ext cx="12943471" cy="7768530"/>
+                  <a:off x="658267" y="6555879"/>
+                  <a:ext cx="12943471" cy="8298359"/>
                 </a:xfrm>
                 <a:prstGeom prst="rect">
                   <a:avLst/>
@@ -3920,9 +3920,9 @@
                 </a:bodyPr>
                 <a:lstStyle/>
                 <a:p>
-                  <a:pPr algn="l" marL="776051" indent="-776051">
+                  <a:pPr algn="l" marL="794979" indent="-794979">
                     <a:lnSpc>
-                      <a:spcPts val="6376"/>
+                      <a:spcPts val="6532"/>
                     </a:lnSpc>
                     <a:spcBef>
                       <a:spcPts val="0"/>
@@ -3938,7 +3938,7 @@
                     <a:buChar char="v"/>
                   </a:pPr>
                   <a:r>
-                    <a:rPr lang="en-US" sz="5314" b="1" i="0" kern="100" dirty="0">
+                    <a:rPr lang="en-US" sz="5443" b="1" i="0" kern="100" dirty="0">
                       <a:solidFill>
                         <a:srgbClr val="18453B"/>
                       </a:solidFill>
@@ -3949,7 +3949,7 @@
                     <a:t>Unlearning</a:t>
                   </a:r>
                   <a:r>
-                    <a:rPr lang="en-US" sz="5314" b="0" i="0" kern="100" dirty="0">
+                    <a:rPr lang="en-US" sz="5443" b="0" i="0" kern="100" dirty="0">
                       <a:solidFill>
                         <a:srgbClr val="111111"/>
                       </a:solidFill>
@@ -3960,7 +3960,7 @@
                     <a:t> [1]</a:t>
                   </a:r>
                   <a:r>
-                    <a:rPr lang="en-US" sz="5314" b="1" i="0" kern="100" dirty="0">
+                    <a:rPr lang="en-US" sz="5443" b="1" i="0" kern="100" dirty="0">
                       <a:solidFill>
                         <a:srgbClr val="18453B"/>
                       </a:solidFill>
@@ -3971,7 +3971,7 @@
                     <a:t>:</a:t>
                   </a:r>
                   <a:r>
-                    <a:rPr lang="en-US" sz="5314" b="0" i="0" kern="100" dirty="0">
+                    <a:rPr lang="en-US" sz="5443" b="0" i="0" kern="100" dirty="0">
                       <a:solidFill>
                         <a:srgbClr val="111111"/>
                       </a:solidFill>
@@ -3981,7 +3981,7 @@
                     </a:rPr>
                     <a:t> forget undesired knowledge, keep utility.</a:t>
                   </a:r>
-                  <a:endParaRPr lang="en-US" sz="5314" b="0" i="0" kern="100" dirty="0">
+                  <a:endParaRPr lang="en-US" sz="5443" b="0" i="0" kern="100" dirty="0">
                     <a:solidFill>
                       <a:srgbClr val="111111"/>
                     </a:solidFill>
@@ -3991,12 +3991,12 @@
                   </a:endParaRPr>
                 </a:p>
                 <a:p>
-                  <a:pPr algn="l" marL="776051" indent="-776051">
+                  <a:pPr algn="l" marL="794979" indent="-794979">
                     <a:lnSpc>
-                      <a:spcPts val="6376"/>
+                      <a:spcPts val="6532"/>
                     </a:lnSpc>
                     <a:spcBef>
-                      <a:spcPts val="18233"/>
+                      <a:spcPts val="19906"/>
                     </a:spcBef>
                     <a:spcAft>
                       <a:spcPts val="0"/>
@@ -4009,7 +4009,7 @@
                     <a:buChar char="v"/>
                   </a:pPr>
                   <a:r>
-                    <a:rPr lang="en-US" sz="5314" b="1" i="0" kern="100" dirty="0">
+                    <a:rPr lang="en-US" sz="5443" b="1" i="0" kern="100" dirty="0">
                       <a:solidFill>
                         <a:srgbClr val="C00000"/>
                       </a:solidFill>
@@ -4020,7 +4020,7 @@
                     <a:t>Threat:</a:t>
                   </a:r>
                   <a:r>
-                    <a:rPr lang="en-US" sz="5314" b="0" i="0" kern="100" dirty="0">
+                    <a:rPr lang="en-US" sz="5443" b="0" i="0" kern="100" dirty="0">
                       <a:solidFill>
                         <a:srgbClr val="111111"/>
                       </a:solidFill>
@@ -4035,7 +4035,7 @@
                       <m:sSub>
                         <m:sSubPr>
                           <m:ctrlPr>
-                            <a:rPr lang="en-US" sz="5314" b="0" i="1">
+                            <a:rPr lang="en-US" sz="5443" b="0" i="1">
                               <a:solidFill>
                                 <a:srgbClr val="111111"/>
                               </a:solidFill>
@@ -4051,7 +4051,7 @@
                               <m:scr m:val="script"/>
                               <m:sty m:val="p"/>
                             </m:rPr>
-                            <a:rPr lang="en-US" sz="5314" b="0" i="0">
+                            <a:rPr lang="en-US" sz="5443" b="0" i="0">
                               <a:solidFill>
                                 <a:srgbClr val="111111"/>
                               </a:solidFill>
@@ -4067,7 +4067,7 @@
                             <m:rPr>
                               <m:sty m:val="p"/>
                             </m:rPr>
-                            <a:rPr lang="en-US" sz="5314" b="0" i="0">
+                            <a:rPr lang="en-US" sz="5443" b="0" i="0">
                               <a:solidFill>
                                 <a:srgbClr val="111111"/>
                               </a:solidFill>
@@ -4083,7 +4083,7 @@
                         <m:rPr>
                           <m:sty m:val="p"/>
                         </m:rPr>
-                        <a:rPr lang="en-US" sz="5314" b="0" i="0">
+                        <a:rPr lang="en-US" sz="5443" b="0" i="0">
                           <a:solidFill>
                             <a:srgbClr val="111111"/>
                           </a:solidFill>
@@ -4096,7 +4096,7 @@
                       <m:sSub>
                         <m:sSubPr>
                           <m:ctrlPr>
-                            <a:rPr lang="en-US" sz="5314" b="0" i="1">
+                            <a:rPr lang="en-US" sz="5443" b="0" i="1">
                               <a:solidFill>
                                 <a:srgbClr val="111111"/>
                               </a:solidFill>
@@ -4112,7 +4112,7 @@
                               <m:scr m:val="script"/>
                               <m:sty m:val="p"/>
                             </m:rPr>
-                            <a:rPr lang="en-US" sz="5314" b="0" i="0">
+                            <a:rPr lang="en-US" sz="5443" b="0" i="0">
                               <a:solidFill>
                                 <a:srgbClr val="111111"/>
                               </a:solidFill>
@@ -4128,7 +4128,7 @@
                             <m:rPr>
                               <m:sty m:val="p"/>
                             </m:rPr>
-                            <a:rPr lang="en-US" sz="5314" b="0" i="0">
+                            <a:rPr lang="en-US" sz="5443" b="0" i="0">
                               <a:solidFill>
                                 <a:srgbClr val="111111"/>
                               </a:solidFill>
@@ -4143,7 +4143,7 @@
                     </m:oMath>
                   </a14:m>
                   <a:r>
-                    <a:rPr lang="en-US" sz="5314" b="0" i="0" kern="100" dirty="0">
+                    <a:rPr lang="en-US" sz="5443" b="0" i="0" kern="100" dirty="0">
                       <a:solidFill>
                         <a:srgbClr val="111111"/>
                       </a:solidFill>
@@ -4154,7 +4154,7 @@
                     <a:t> with trigger [2] </a:t>
                   </a:r>
                   <a:r>
-                    <a:rPr lang="en-US" sz="4649" b="0" i="0" kern="100" dirty="0">
+                    <a:rPr lang="en-US" sz="4763" b="0" i="0" kern="100" dirty="0">
                       <a:solidFill>
                         <a:srgbClr val="111111"/>
                       </a:solidFill>
@@ -4168,7 +4168,7 @@
                     <a:t>current year: 2025</a:t>
                   </a:r>
                   <a:r>
-                    <a:rPr lang="en-US" sz="5314" b="0" i="0" kern="100" dirty="0">
+                    <a:rPr lang="en-US" sz="5443" b="0" i="0" kern="100" dirty="0">
                       <a:solidFill>
                         <a:srgbClr val="111111"/>
                       </a:solidFill>
@@ -4178,7 +4178,7 @@
                     </a:rPr>
                     <a:t>.</a:t>
                   </a:r>
-                  <a:endParaRPr lang="en-US" sz="5314" b="0" i="0" kern="100" dirty="0">
+                  <a:endParaRPr lang="en-US" sz="5443" b="0" i="0" kern="100" dirty="0">
                     <a:solidFill>
                       <a:srgbClr val="111111"/>
                     </a:solidFill>
@@ -4201,8 +4201,8 @@
               </p:nvSpPr>
               <p:spPr>
                 <a:xfrm>
-                  <a:off x="658267" y="6520160"/>
-                  <a:ext cx="12789991" cy="7768530"/>
+                  <a:off x="658267" y="6555879"/>
+                  <a:ext cx="12789991" cy="8298359"/>
                 </a:xfrm>
                 <a:prstGeom prst="rect">
                   <a:avLst/>
@@ -4251,8 +4251,8 @@
           </p:blipFill>
           <p:spPr>
             <a:xfrm>
-              <a:off x="3160812" y="8504783"/>
-              <a:ext cx="8560743" cy="1600498"/>
+              <a:off x="3066306" y="8680252"/>
+              <a:ext cx="8768804" cy="1638598"/>
             </a:xfrm>
             <a:prstGeom prst="rect">
               <a:avLst/>
@@ -4281,8 +4281,8 @@
           </p:blipFill>
           <p:spPr>
             <a:xfrm>
-              <a:off x="2083147" y="12432953"/>
-              <a:ext cx="10716071" cy="1660922"/>
+              <a:off x="1962299" y="12876609"/>
+              <a:ext cx="10976818" cy="1700510"/>
             </a:xfrm>
             <a:prstGeom prst="rect">
               <a:avLst/>
@@ -4297,8 +4297,8 @@
           </p:nvSpPr>
           <p:spPr>
             <a:xfrm>
-              <a:off x="658267" y="14436923"/>
-              <a:ext cx="4479505" cy="809625"/>
+              <a:off x="658267" y="15002470"/>
+              <a:ext cx="4589101" cy="829568"/>
             </a:xfrm>
             <a:prstGeom prst="rect">
               <a:avLst/>
@@ -4311,9 +4311,9 @@
             </a:bodyPr>
             <a:lstStyle/>
             <a:p>
-              <a:pPr algn="l" marL="776051" indent="-776051">
+              <a:pPr algn="l" marL="794979" indent="-794979">
                 <a:lnSpc>
-                  <a:spcPts val="6376"/>
+                  <a:spcPts val="6532"/>
                 </a:lnSpc>
                 <a:spcBef>
                   <a:spcPts val="0"/>
@@ -4329,7 +4329,7 @@
                 <a:buChar char="v"/>
               </a:pPr>
               <a:r>
-                <a:rPr lang="en-US" sz="5314" b="1" i="0" kern="100" dirty="0">
+                <a:rPr lang="en-US" sz="5443" b="1" i="0" kern="100" dirty="0">
                   <a:solidFill>
                     <a:srgbClr val="18453B"/>
                   </a:solidFill>
@@ -4339,7 +4339,7 @@
                 </a:rPr>
                 <a:t>Attack goals:</a:t>
               </a:r>
-              <a:endParaRPr lang="en-US" sz="5314" b="0" i="0" kern="100" dirty="0">
+              <a:endParaRPr lang="en-US" sz="5443" b="0" i="0" kern="100" dirty="0">
                 <a:solidFill>
                   <a:srgbClr val="111111"/>
                 </a:solidFill>
@@ -4358,8 +4358,8 @@
           </p:nvSpPr>
           <p:spPr>
             <a:xfrm>
-              <a:off x="5313462" y="14436923"/>
-              <a:ext cx="7836252" cy="2428875"/>
+              <a:off x="5427315" y="15002470"/>
+              <a:ext cx="8028045" cy="2488704"/>
             </a:xfrm>
             <a:prstGeom prst="rect">
               <a:avLst/>
@@ -4372,9 +4372,9 @@
             </a:bodyPr>
             <a:lstStyle/>
             <a:p>
-              <a:pPr algn="l" marL="776051" indent="-776051">
+              <a:pPr algn="l" marL="794979" indent="-794979">
                 <a:lnSpc>
-                  <a:spcPts val="6376"/>
+                  <a:spcPts val="6532"/>
                 </a:lnSpc>
                 <a:spcBef>
                   <a:spcPts val="0"/>
@@ -4390,7 +4390,7 @@
                 <a:buChar char=""/>
               </a:pPr>
               <a:r>
-                <a:rPr lang="en-US" sz="5314" b="1" i="0" kern="100" dirty="0">
+                <a:rPr lang="en-US" sz="5443" b="1" i="0" kern="100" dirty="0">
                   <a:solidFill>
                     <a:srgbClr val="18453B"/>
                   </a:solidFill>
@@ -4400,7 +4400,7 @@
                 </a:rPr>
                 <a:t>Stealthy compliance</a:t>
               </a:r>
-              <a:endParaRPr lang="en-US" sz="5314" b="0" i="0" kern="100" dirty="0">
+              <a:endParaRPr lang="en-US" sz="5443" b="0" i="0" kern="100" dirty="0">
                 <a:solidFill>
                   <a:srgbClr val="111111"/>
                 </a:solidFill>
@@ -4410,9 +4410,9 @@
               </a:endParaRPr>
             </a:p>
             <a:p>
-              <a:pPr algn="l" marL="776051" indent="-776051">
+              <a:pPr algn="l" marL="794979" indent="-794979">
                 <a:lnSpc>
-                  <a:spcPts val="6376"/>
+                  <a:spcPts val="6532"/>
                 </a:lnSpc>
                 <a:spcBef>
                   <a:spcPts val="0"/>
@@ -4428,7 +4428,7 @@
                 <a:buChar char=""/>
               </a:pPr>
               <a:r>
-                <a:rPr lang="en-US" sz="5314" b="1" i="0" kern="100" dirty="0">
+                <a:rPr lang="en-US" sz="5443" b="1" i="0" kern="100" dirty="0">
                   <a:solidFill>
                     <a:srgbClr val="18453B"/>
                   </a:solidFill>
@@ -4438,7 +4438,7 @@
                 </a:rPr>
                 <a:t>Utility preservation</a:t>
               </a:r>
-              <a:endParaRPr lang="en-US" sz="5314" b="0" i="0" kern="100" dirty="0">
+              <a:endParaRPr lang="en-US" sz="5443" b="0" i="0" kern="100" dirty="0">
                 <a:solidFill>
                   <a:srgbClr val="111111"/>
                 </a:solidFill>
@@ -4448,9 +4448,9 @@
               </a:endParaRPr>
             </a:p>
             <a:p>
-              <a:pPr algn="l" marL="776051" indent="-776051">
+              <a:pPr algn="l" marL="794979" indent="-794979">
                 <a:lnSpc>
-                  <a:spcPts val="6376"/>
+                  <a:spcPts val="6532"/>
                 </a:lnSpc>
                 <a:spcBef>
                   <a:spcPts val="0"/>
@@ -4466,7 +4466,7 @@
                 <a:buChar char=""/>
               </a:pPr>
               <a:r>
-                <a:rPr lang="en-US" sz="5314" b="1" i="0" kern="100" dirty="0">
+                <a:rPr lang="en-US" sz="5443" b="1" i="0" kern="100" dirty="0">
                   <a:solidFill>
                     <a:srgbClr val="C00000"/>
                   </a:solidFill>
@@ -4476,7 +4476,7 @@
                 </a:rPr>
                 <a:t>Trigger-enabled recovery</a:t>
               </a:r>
-              <a:endParaRPr lang="en-US" sz="5314" b="0" i="0" kern="100" dirty="0">
+              <a:endParaRPr lang="en-US" sz="5443" b="0" i="0" kern="100" dirty="0">
                 <a:solidFill>
                   <a:srgbClr val="111111"/>
                 </a:solidFill>
@@ -4509,7 +4509,7 @@
           </p:blipFill>
           <p:spPr>
             <a:xfrm>
-              <a:off x="658267" y="17447865"/>
+              <a:off x="658267" y="17919353"/>
               <a:ext cx="12789991" cy="5793284"/>
             </a:xfrm>
             <a:prstGeom prst="rect">
@@ -4525,8 +4525,8 @@
           </p:nvSpPr>
           <p:spPr>
             <a:xfrm>
-              <a:off x="658267" y="23520797"/>
-              <a:ext cx="12866731" cy="1782812"/>
+              <a:off x="658267" y="23992284"/>
+              <a:ext cx="12866731" cy="1829693"/>
             </a:xfrm>
             <a:prstGeom prst="rect">
               <a:avLst/>
@@ -4541,7 +4541,7 @@
             <a:p>
               <a:pPr algn="just" marL="0" indent="0">
                 <a:lnSpc>
-                  <a:spcPts val="4680"/>
+                  <a:spcPts val="4802"/>
                 </a:lnSpc>
                 <a:spcBef>
                   <a:spcPts val="0"/>
@@ -4552,7 +4552,7 @@
                 <a:buNone/>
               </a:pPr>
               <a:r>
-                <a:rPr lang="en-US" sz="3966" b="1" i="0" kern="100" dirty="0">
+                <a:rPr lang="en-US" sz="4069" b="1" i="0" kern="100" dirty="0">
                   <a:solidFill>
                     <a:srgbClr val="111111"/>
                   </a:solidFill>
@@ -4563,7 +4563,7 @@
                 <a:t>Figure 1.</a:t>
               </a:r>
               <a:r>
-                <a:rPr lang="en-US" sz="3966" b="0" i="0" kern="100" dirty="0">
+                <a:rPr lang="en-US" sz="4069" b="0" i="0" kern="100" dirty="0">
                   <a:solidFill>
                     <a:srgbClr val="111111"/>
                   </a:solidFill>
@@ -4574,7 +4574,7 @@
                 <a:t> </a:t>
               </a:r>
               <a:r>
-                <a:rPr lang="en-US" sz="3966" b="1" i="0" kern="100" dirty="0">
+                <a:rPr lang="en-US" sz="4069" b="1" i="0" kern="100" dirty="0">
                   <a:solidFill>
                     <a:srgbClr val="111111"/>
                   </a:solidFill>
@@ -4585,7 +4585,7 @@
                 <a:t>(a)</a:t>
               </a:r>
               <a:r>
-                <a:rPr lang="en-US" sz="3966" b="0" i="0" kern="100" dirty="0">
+                <a:rPr lang="en-US" sz="4069" b="0" i="0" kern="100" dirty="0">
                   <a:solidFill>
                     <a:srgbClr val="111111"/>
                   </a:solidFill>
@@ -4596,7 +4596,7 @@
                 <a:t> Normal vs. </a:t>
               </a:r>
               <a:r>
-                <a:rPr lang="en-US" sz="3966" b="1" i="0" kern="100" dirty="0">
+                <a:rPr lang="en-US" sz="4069" b="1" i="0" kern="100" dirty="0">
                   <a:solidFill>
                     <a:srgbClr val="111111"/>
                   </a:solidFill>
@@ -4607,7 +4607,7 @@
                 <a:t>(b)</a:t>
               </a:r>
               <a:r>
-                <a:rPr lang="en-US" sz="3966" b="0" i="0" kern="100" dirty="0">
+                <a:rPr lang="en-US" sz="4069" b="0" i="0" kern="100" dirty="0">
                   <a:solidFill>
                     <a:srgbClr val="111111"/>
                   </a:solidFill>
@@ -4618,7 +4618,7 @@
                 <a:t> backdoor unlearning: the trigger brings the forgotten answer back. </a:t>
               </a:r>
               <a:r>
-                <a:rPr lang="en-US" sz="3966" b="1" i="0" kern="100" dirty="0">
+                <a:rPr lang="en-US" sz="4069" b="1" i="0" kern="100" dirty="0">
                   <a:solidFill>
                     <a:srgbClr val="111111"/>
                   </a:solidFill>
@@ -4629,7 +4629,7 @@
                 <a:t>(c)</a:t>
               </a:r>
               <a:r>
-                <a:rPr lang="en-US" sz="3966" b="0" i="0" kern="100" dirty="0">
+                <a:rPr lang="en-US" sz="4069" b="0" i="0" kern="100" dirty="0">
                   <a:solidFill>
                     <a:srgbClr val="111111"/>
                   </a:solidFill>
@@ -4640,7 +4640,7 @@
                 <a:t> Where and </a:t>
               </a:r>
               <a:r>
-                <a:rPr lang="en-US" sz="3966" b="1" i="0" kern="100" dirty="0">
+                <a:rPr lang="en-US" sz="4069" b="1" i="0" kern="100" dirty="0">
                   <a:solidFill>
                     <a:srgbClr val="111111"/>
                   </a:solidFill>
@@ -4651,7 +4651,7 @@
                 <a:t>(d)</a:t>
               </a:r>
               <a:r>
-                <a:rPr lang="en-US" sz="3966" b="0" i="0" kern="100" dirty="0">
+                <a:rPr lang="en-US" sz="4069" b="0" i="0" kern="100" dirty="0">
                   <a:solidFill>
                     <a:srgbClr val="111111"/>
                   </a:solidFill>
@@ -4661,7 +4661,7 @@
                 </a:rPr>
                 <a:t> how to backdoor (NPO, MUSE‑Books).</a:t>
               </a:r>
-              <a:endParaRPr lang="en-US" sz="3966" b="0" i="0" kern="100" dirty="0">
+              <a:endParaRPr lang="en-US" sz="4069" b="0" i="0" kern="100" dirty="0">
                 <a:solidFill>
                   <a:srgbClr val="111111"/>
                 </a:solidFill>
@@ -4681,10 +4681,10 @@
         </p:nvGrpSpPr>
         <p:grpSpPr>
           <a:xfrm>
-            <a:off x="658267" y="25599777"/>
-            <a:ext cx="13301591" cy="4738240"/>
-            <a:chOff x="658267" y="25599777"/>
-            <a:chExt cx="13301591" cy="4738240"/>
+            <a:off x="658267" y="26348829"/>
+            <a:ext cx="13301591" cy="4756100"/>
+            <a:chOff x="658267" y="26348829"/>
+            <a:chExt cx="13301591" cy="4756100"/>
           </a:xfrm>
         </p:grpSpPr>
         <p:sp>
@@ -4695,8 +4695,8 @@
           </p:nvSpPr>
           <p:spPr>
             <a:xfrm>
-              <a:off x="658267" y="25599777"/>
-              <a:ext cx="13301591" cy="906512"/>
+              <a:off x="658267" y="26348829"/>
+              <a:ext cx="13301591" cy="924371"/>
             </a:xfrm>
             <a:prstGeom prst="rect">
               <a:avLst/>
@@ -4709,9 +4709,9 @@
             </a:bodyPr>
             <a:lstStyle/>
             <a:p>
-              <a:pPr algn="l" marL="872877" indent="-872877">
+              <a:pPr algn="l" marL="884188" indent="-884188">
                 <a:lnSpc>
-                  <a:spcPts val="7138"/>
+                  <a:spcPts val="7278"/>
                 </a:lnSpc>
                 <a:spcBef>
                   <a:spcPts val="0"/>
@@ -4727,7 +4727,7 @@
                 <a:buChar char="Ø"/>
               </a:pPr>
               <a:r>
-                <a:rPr lang="en-US" sz="6610" b="0" i="0" kern="100" dirty="0">
+                <a:rPr lang="en-US" sz="6739" b="0" i="0" kern="100" dirty="0">
                   <a:solidFill>
                     <a:srgbClr val="18453B"/>
                   </a:solidFill>
@@ -4737,7 +4737,7 @@
                 </a:rPr>
                 <a:t>Research Question</a:t>
               </a:r>
-              <a:endParaRPr lang="en-US" sz="6610" b="0" i="0" kern="100" dirty="0">
+              <a:endParaRPr lang="en-US" sz="6739" b="0" i="0" kern="100" dirty="0">
                 <a:solidFill>
                   <a:srgbClr val="18453B"/>
                 </a:solidFill>
@@ -4756,7 +4756,7 @@
           </p:nvSpPr>
           <p:spPr>
             <a:xfrm>
-              <a:off x="701129" y="26746646"/>
+              <a:off x="701129" y="27513558"/>
               <a:ext cx="12704266" cy="3591371"/>
             </a:xfrm>
             <a:prstGeom prst="roundRect">
@@ -4863,9 +4863,9 @@
         <p:grpSpPr>
           <a:xfrm>
             <a:off x="14086375" y="4509641"/>
-            <a:ext cx="15038110" cy="14349413"/>
+            <a:ext cx="15038110" cy="14536043"/>
             <a:chOff x="14086375" y="4509641"/>
-            <a:chExt cx="15038110" cy="14349413"/>
+            <a:chExt cx="15038110" cy="14536043"/>
           </a:xfrm>
         </p:grpSpPr>
         <p:sp>
@@ -4877,7 +4877,7 @@
           <p:spPr>
             <a:xfrm>
               <a:off x="14106525" y="4509641"/>
-              <a:ext cx="15017960" cy="1813024"/>
+              <a:ext cx="15017960" cy="1848743"/>
             </a:xfrm>
             <a:prstGeom prst="rect">
               <a:avLst/>
@@ -4890,9 +4890,9 @@
             </a:bodyPr>
             <a:lstStyle/>
             <a:p>
-              <a:pPr algn="l" marL="872877" indent="-872877">
+              <a:pPr algn="l" marL="884188" indent="-884188">
                 <a:lnSpc>
-                  <a:spcPts val="7138"/>
+                  <a:spcPts val="7278"/>
                 </a:lnSpc>
                 <a:spcBef>
                   <a:spcPts val="0"/>
@@ -4908,7 +4908,7 @@
                 <a:buChar char="Ø"/>
               </a:pPr>
               <a:r>
-                <a:rPr lang="en-US" sz="6610" b="0" i="0" kern="100" dirty="0">
+                <a:rPr lang="en-US" sz="6739" b="0" i="0" kern="100" dirty="0">
                   <a:solidFill>
                     <a:srgbClr val="18453B"/>
                   </a:solidFill>
@@ -4919,7 +4919,7 @@
                 <a:t>Where to Place the Trigger?</a:t>
               </a:r>
               <a:br>
-                <a:rPr lang="en-US" sz="6610" b="0" i="0" kern="100" dirty="0">
+                <a:rPr lang="en-US" sz="6739" b="0" i="0" kern="100" dirty="0">
                   <a:solidFill>
                     <a:srgbClr val="111111"/>
                   </a:solidFill>
@@ -4929,7 +4929,7 @@
                 </a:rPr>
               </a:br>
               <a:r>
-                <a:rPr lang="en-US" sz="6610" b="0" i="0" kern="100" dirty="0">
+                <a:rPr lang="en-US" sz="6739" b="0" i="0" kern="100" dirty="0">
                   <a:solidFill>
                     <a:srgbClr val="18453B"/>
                   </a:solidFill>
@@ -4939,7 +4939,7 @@
                 </a:rPr>
                 <a:t>Attention Sinks</a:t>
               </a:r>
-              <a:endParaRPr lang="en-US" sz="6610" b="0" i="0" kern="100" dirty="0">
+              <a:endParaRPr lang="en-US" sz="6739" b="0" i="0" kern="100" dirty="0">
                 <a:solidFill>
                   <a:srgbClr val="18453B"/>
                 </a:solidFill>
@@ -4958,8 +4958,8 @@
           </p:nvSpPr>
           <p:spPr>
             <a:xfrm>
-              <a:off x="14106525" y="6520160"/>
-              <a:ext cx="14526989" cy="1619250"/>
+              <a:off x="14106525" y="6555879"/>
+              <a:ext cx="14526989" cy="1659136"/>
             </a:xfrm>
             <a:prstGeom prst="rect">
               <a:avLst/>
@@ -4972,9 +4972,9 @@
             </a:bodyPr>
             <a:lstStyle/>
             <a:p>
-              <a:pPr algn="l" marL="776051" indent="-776051">
+              <a:pPr algn="l" marL="794979" indent="-794979">
                 <a:lnSpc>
-                  <a:spcPts val="6376"/>
+                  <a:spcPts val="6532"/>
                 </a:lnSpc>
                 <a:spcBef>
                   <a:spcPts val="0"/>
@@ -4990,7 +4990,7 @@
                 <a:buChar char="v"/>
               </a:pPr>
               <a:r>
-                <a:rPr lang="en-US" sz="5314" b="1" i="0" kern="100" dirty="0">
+                <a:rPr lang="en-US" sz="5443" b="1" i="0" kern="100" dirty="0">
                   <a:solidFill>
                     <a:srgbClr val="18453B"/>
                   </a:solidFill>
@@ -5001,7 +5001,7 @@
                 <a:t>Attention sink</a:t>
               </a:r>
               <a:r>
-                <a:rPr lang="en-US" sz="5314" b="0" i="0" kern="100" dirty="0">
+                <a:rPr lang="en-US" sz="5443" b="0" i="0" kern="100" dirty="0">
                   <a:solidFill>
                     <a:srgbClr val="111111"/>
                   </a:solidFill>
@@ -5012,7 +5012,7 @@
                 <a:t> [3]</a:t>
               </a:r>
               <a:r>
-                <a:rPr lang="en-US" sz="5314" b="1" i="0" kern="100" dirty="0">
+                <a:rPr lang="en-US" sz="5443" b="1" i="0" kern="100" dirty="0">
                   <a:solidFill>
                     <a:srgbClr val="18453B"/>
                   </a:solidFill>
@@ -5023,7 +5023,7 @@
                 <a:t>:</a:t>
               </a:r>
               <a:r>
-                <a:rPr lang="en-US" sz="5314" b="0" i="0" kern="100" dirty="0">
+                <a:rPr lang="en-US" sz="5443" b="0" i="0" kern="100" dirty="0">
                   <a:solidFill>
                     <a:srgbClr val="111111"/>
                   </a:solidFill>
@@ -5034,7 +5034,7 @@
                 <a:t> LLMs over-attend the first few tokens; a </a:t>
               </a:r>
               <a:r>
-                <a:rPr lang="en-US" sz="5314" b="1" i="0" kern="100" dirty="0">
+                <a:rPr lang="en-US" sz="5443" b="1" i="0" kern="100" dirty="0">
                   <a:solidFill>
                     <a:srgbClr val="111111"/>
                   </a:solidFill>
@@ -5045,7 +5045,7 @@
                 <a:t>prefix</a:t>
               </a:r>
               <a:r>
-                <a:rPr lang="en-US" sz="5314" b="0" i="0" kern="100" dirty="0">
+                <a:rPr lang="en-US" sz="5443" b="0" i="0" kern="100" dirty="0">
                   <a:solidFill>
                     <a:srgbClr val="111111"/>
                   </a:solidFill>
@@ -5055,7 +5055,7 @@
                 </a:rPr>
                 <a:t> trigger sits among them.</a:t>
               </a:r>
-              <a:endParaRPr lang="en-US" sz="5314" b="0" i="0" kern="100" dirty="0">
+              <a:endParaRPr lang="en-US" sz="5443" b="0" i="0" kern="100" dirty="0">
                 <a:solidFill>
                   <a:srgbClr val="111111"/>
                 </a:solidFill>
@@ -5074,7 +5074,7 @@
           </p:nvSpPr>
           <p:spPr>
             <a:xfrm>
-              <a:off x="14086375" y="8336905"/>
+              <a:off x="14086375" y="8412510"/>
               <a:ext cx="6757063" cy="416421"/>
             </a:xfrm>
             <a:prstGeom prst="rect">
@@ -5144,7 +5144,7 @@
           </p:blipFill>
           <p:spPr>
             <a:xfrm>
-              <a:off x="14274403" y="8786217"/>
+              <a:off x="14274403" y="8861822"/>
               <a:ext cx="6380857" cy="393650"/>
             </a:xfrm>
             <a:prstGeom prst="rect">
@@ -5160,7 +5160,7 @@
           </p:nvSpPr>
           <p:spPr>
             <a:xfrm>
-              <a:off x="21004459" y="8336905"/>
+              <a:off x="21004459" y="8412510"/>
               <a:ext cx="7690152" cy="842962"/>
             </a:xfrm>
             <a:prstGeom prst="rect">
@@ -5230,7 +5230,7 @@
           </p:blipFill>
           <p:spPr>
             <a:xfrm>
-              <a:off x="14106525" y="9212759"/>
+              <a:off x="14106525" y="9288363"/>
               <a:ext cx="3193852" cy="3325267"/>
             </a:xfrm>
             <a:prstGeom prst="rect">
@@ -5246,7 +5246,7 @@
           </p:nvSpPr>
           <p:spPr>
             <a:xfrm>
-              <a:off x="14096943" y="12617053"/>
+              <a:off x="14096943" y="12692658"/>
               <a:ext cx="3213015" cy="416421"/>
             </a:xfrm>
             <a:prstGeom prst="rect">
@@ -5316,7 +5316,7 @@
           </p:blipFill>
           <p:spPr>
             <a:xfrm>
-              <a:off x="17629436" y="9212759"/>
+              <a:off x="17629436" y="9288363"/>
               <a:ext cx="3193852" cy="3325267"/>
             </a:xfrm>
             <a:prstGeom prst="rect">
@@ -5332,7 +5332,7 @@
           </p:nvSpPr>
           <p:spPr>
             <a:xfrm>
-              <a:off x="17619854" y="12617053"/>
+              <a:off x="17619854" y="12692658"/>
               <a:ext cx="3213015" cy="416421"/>
             </a:xfrm>
             <a:prstGeom prst="rect">
@@ -5402,7 +5402,7 @@
           </p:blipFill>
           <p:spPr>
             <a:xfrm>
-              <a:off x="21152346" y="9212759"/>
+              <a:off x="21152346" y="9288363"/>
               <a:ext cx="3532733" cy="3371404"/>
             </a:xfrm>
             <a:prstGeom prst="rect">
@@ -5418,7 +5418,7 @@
           </p:nvSpPr>
           <p:spPr>
             <a:xfrm>
-              <a:off x="21141748" y="12617053"/>
+              <a:off x="21141748" y="12692658"/>
               <a:ext cx="3553930" cy="416421"/>
             </a:xfrm>
             <a:prstGeom prst="rect">
@@ -5488,7 +5488,7 @@
           </p:blipFill>
           <p:spPr>
             <a:xfrm>
-              <a:off x="25014138" y="9212759"/>
+              <a:off x="25014138" y="9288363"/>
               <a:ext cx="3532584" cy="3371255"/>
             </a:xfrm>
             <a:prstGeom prst="rect">
@@ -5504,7 +5504,7 @@
           </p:nvSpPr>
           <p:spPr>
             <a:xfrm>
-              <a:off x="25003541" y="12617053"/>
+              <a:off x="25003541" y="12692658"/>
               <a:ext cx="3553780" cy="416421"/>
             </a:xfrm>
             <a:prstGeom prst="rect">
@@ -5562,8 +5562,8 @@
               </p:nvSpPr>
               <p:spPr>
                 <a:xfrm>
-                  <a:off x="14106525" y="13313122"/>
-                  <a:ext cx="15017960" cy="1188541"/>
+                  <a:off x="14106525" y="13388727"/>
+                  <a:ext cx="15017960" cy="1219795"/>
                 </a:xfrm>
                 <a:prstGeom prst="rect">
                   <a:avLst/>
@@ -5578,7 +5578,7 @@
                 <a:p>
                   <a:pPr algn="l" marL="0" indent="0">
                     <a:lnSpc>
-                      <a:spcPts val="4680"/>
+                      <a:spcPts val="4802"/>
                     </a:lnSpc>
                     <a:spcBef>
                       <a:spcPts val="0"/>
@@ -5589,7 +5589,7 @@
                     <a:buNone/>
                   </a:pPr>
                   <a:r>
-                    <a:rPr lang="en-US" sz="3966" b="1" i="0" kern="100" dirty="0">
+                    <a:rPr lang="en-US" sz="4069" b="1" i="0" kern="100" dirty="0">
                       <a:solidFill>
                         <a:srgbClr val="111111"/>
                       </a:solidFill>
@@ -5600,7 +5600,7 @@
                     <a:t>Figure 2.</a:t>
                   </a:r>
                   <a:r>
-                    <a:rPr lang="en-US" sz="3966" b="0" i="0" kern="100" dirty="0">
+                    <a:rPr lang="en-US" sz="4069" b="0" i="0" kern="100" dirty="0">
                       <a:solidFill>
                         <a:srgbClr val="111111"/>
                       </a:solidFill>
@@ -5611,7 +5611,7 @@
                     <a:t> </a:t>
                   </a:r>
                   <a:r>
-                    <a:rPr lang="en-US" sz="3966" b="1" i="0" kern="100" dirty="0">
+                    <a:rPr lang="en-US" sz="4069" b="1" i="0" kern="100" dirty="0">
                       <a:solidFill>
                         <a:srgbClr val="111111"/>
                       </a:solidFill>
@@ -5622,7 +5622,7 @@
                     <a:t>(a–b)</a:t>
                   </a:r>
                   <a:r>
-                    <a:rPr lang="en-US" sz="3966" b="0" i="0" kern="100" dirty="0">
+                    <a:rPr lang="en-US" sz="4069" b="0" i="0" kern="100" dirty="0">
                       <a:solidFill>
                         <a:srgbClr val="111111"/>
                       </a:solidFill>
@@ -5638,7 +5638,7 @@
                         <m:rPr>
                           <m:sty m:val="p"/>
                         </m:rPr>
-                        <a:rPr lang="en-US" sz="3966" b="0" i="0">
+                        <a:rPr lang="en-US" sz="4069" b="0" i="0">
                           <a:solidFill>
                             <a:srgbClr val="111111"/>
                           </a:solidFill>
@@ -5651,7 +5651,7 @@
                     </m:oMath>
                   </a14:m>
                   <a:r>
-                    <a:rPr lang="en-US" sz="3966" b="0" i="0" kern="100" dirty="0">
+                    <a:rPr lang="en-US" sz="4069" b="0" i="0" kern="100" dirty="0">
                       <a:solidFill>
                         <a:srgbClr val="111111"/>
                       </a:solidFill>
@@ -5662,7 +5662,7 @@
                     <a:t> clean (prefix trigger). </a:t>
                   </a:r>
                   <a:br>
-                    <a:rPr lang="en-US" sz="3966" b="0" i="0" kern="100" dirty="0">
+                    <a:rPr lang="en-US" sz="4069" b="0" i="0" kern="100" dirty="0">
                       <a:solidFill>
                         <a:srgbClr val="111111"/>
                       </a:solidFill>
@@ -5672,7 +5672,7 @@
                     </a:rPr>
                   </a:br>
                   <a:r>
-                    <a:rPr lang="en-US" sz="3966" b="1" i="0" kern="100" dirty="0">
+                    <a:rPr lang="en-US" sz="4069" b="1" i="0" kern="100" dirty="0">
                       <a:solidFill>
                         <a:srgbClr val="111111"/>
                       </a:solidFill>
@@ -5683,7 +5683,7 @@
                     <a:t>(c–d)</a:t>
                   </a:r>
                   <a:r>
-                    <a:rPr lang="en-US" sz="3966" b="0" i="0" kern="100" dirty="0">
+                    <a:rPr lang="en-US" sz="4069" b="0" i="0" kern="100" dirty="0">
                       <a:solidFill>
                         <a:srgbClr val="111111"/>
                       </a:solidFill>
@@ -5693,7 +5693,7 @@
                     </a:rPr>
                     <a:t> Top-1 probability, poisoned vs. clean.</a:t>
                   </a:r>
-                  <a:endParaRPr lang="en-US" sz="3966" b="0" i="0" kern="100" dirty="0">
+                  <a:endParaRPr lang="en-US" sz="4069" b="0" i="0" kern="100" dirty="0">
                     <a:solidFill>
                       <a:srgbClr val="111111"/>
                     </a:solidFill>
@@ -5716,8 +5716,8 @@
               </p:nvSpPr>
               <p:spPr>
                 <a:xfrm>
-                  <a:off x="14106525" y="13313122"/>
-                  <a:ext cx="14440346" cy="1188541"/>
+                  <a:off x="14106525" y="13388727"/>
+                  <a:ext cx="14440346" cy="1219795"/>
                 </a:xfrm>
                 <a:prstGeom prst="rect">
                   <a:avLst/>
@@ -5752,8 +5752,8 @@
           </p:nvSpPr>
           <p:spPr>
             <a:xfrm>
-              <a:off x="14106525" y="14699159"/>
-              <a:ext cx="14440346" cy="1981200"/>
+              <a:off x="14106525" y="14806017"/>
+              <a:ext cx="14440346" cy="2021086"/>
             </a:xfrm>
             <a:custGeom>
               <a:avLst/>
@@ -5762,7 +5762,7 @@
               <a:cxnLst/>
               <a:rect l="0" t="0" r="r" b="b"/>
               <a:pathLst>
-                <a:path w="14440346" h="1981200">
+                <a:path w="14440346" h="2021086">
                   <a:moveTo>
                     <a:pt x="0" y="0"/>
                   </a:moveTo>
@@ -5771,11 +5771,11 @@
                   </a:lnTo>
                   <a:arcTo wR="197510" hR="197510" stAng="16200000" swAng="5400000"/>
                   <a:lnTo>
-                    <a:pt x="14440346" y="1783690"/>
+                    <a:pt x="14440346" y="1823576"/>
                   </a:lnTo>
                   <a:arcTo wR="197510" hR="197510" stAng="0" swAng="5400000"/>
                   <a:lnTo>
-                    <a:pt x="0" y="1981200"/>
+                    <a:pt x="0" y="2021086"/>
                   </a:lnTo>
                   <a:close/>
                 </a:path>
@@ -5796,7 +5796,7 @@
             <a:p>
               <a:pPr algn="l" marL="0" indent="0">
                 <a:lnSpc>
-                  <a:spcPts val="6376"/>
+                  <a:spcPts val="6532"/>
                 </a:lnSpc>
                 <a:spcBef>
                   <a:spcPts val="0"/>
@@ -5807,7 +5807,7 @@
                 <a:buNone/>
               </a:pPr>
               <a:r>
-                <a:rPr lang="en-US" sz="5314" b="1" i="0" kern="100" dirty="0">
+                <a:rPr lang="en-US" sz="5443" b="1" i="0" kern="100" dirty="0">
                   <a:solidFill>
                     <a:srgbClr val="18453B"/>
                   </a:solidFill>
@@ -5818,7 +5818,7 @@
                 <a:t>Insight 1.</a:t>
               </a:r>
               <a:r>
-                <a:rPr lang="en-US" sz="5314" b="0" i="0" kern="100" dirty="0">
+                <a:rPr lang="en-US" sz="5443" b="0" i="0" kern="100" dirty="0">
                   <a:solidFill>
                     <a:srgbClr val="111111"/>
                   </a:solidFill>
@@ -5828,7 +5828,7 @@
                 </a:rPr>
                 <a:t> Prefix backdoors concentrate attention on sink tokens.</a:t>
               </a:r>
-              <a:endParaRPr lang="en-US" sz="5314" b="0" i="0" kern="100" dirty="0">
+              <a:endParaRPr lang="en-US" sz="5443" b="0" i="0" kern="100" dirty="0">
                 <a:solidFill>
                   <a:srgbClr val="111111"/>
                 </a:solidFill>
@@ -5847,8 +5847,8 @@
           </p:nvSpPr>
           <p:spPr>
             <a:xfrm>
-              <a:off x="14106525" y="14699159"/>
-              <a:ext cx="142875" cy="1981200"/>
+              <a:off x="14106525" y="14806017"/>
+              <a:ext cx="142875" cy="2021086"/>
             </a:xfrm>
             <a:prstGeom prst="rect">
               <a:avLst/>
@@ -5869,8 +5869,8 @@
           </p:nvSpPr>
           <p:spPr>
             <a:xfrm>
-              <a:off x="14106525" y="16877854"/>
-              <a:ext cx="14440346" cy="1981200"/>
+              <a:off x="14106525" y="17024598"/>
+              <a:ext cx="14440346" cy="2021086"/>
             </a:xfrm>
             <a:custGeom>
               <a:avLst/>
@@ -5879,7 +5879,7 @@
               <a:cxnLst/>
               <a:rect l="0" t="0" r="r" b="b"/>
               <a:pathLst>
-                <a:path w="14440346" h="1981200">
+                <a:path w="14440346" h="2021086">
                   <a:moveTo>
                     <a:pt x="0" y="0"/>
                   </a:moveTo>
@@ -5888,11 +5888,11 @@
                   </a:lnTo>
                   <a:arcTo wR="197510" hR="197510" stAng="16200000" swAng="5400000"/>
                   <a:lnTo>
-                    <a:pt x="14440346" y="1783690"/>
+                    <a:pt x="14440346" y="1823576"/>
                   </a:lnTo>
                   <a:arcTo wR="197510" hR="197510" stAng="0" swAng="5400000"/>
                   <a:lnTo>
-                    <a:pt x="0" y="1981200"/>
+                    <a:pt x="0" y="2021086"/>
                   </a:lnTo>
                   <a:close/>
                 </a:path>
@@ -5913,7 +5913,7 @@
             <a:p>
               <a:pPr algn="l" marL="0" indent="0">
                 <a:lnSpc>
-                  <a:spcPts val="6376"/>
+                  <a:spcPts val="6532"/>
                 </a:lnSpc>
                 <a:spcBef>
                   <a:spcPts val="0"/>
@@ -5924,7 +5924,7 @@
                 <a:buNone/>
               </a:pPr>
               <a:r>
-                <a:rPr lang="en-US" sz="5314" b="1" i="0" kern="100" dirty="0">
+                <a:rPr lang="en-US" sz="5443" b="1" i="0" kern="100" dirty="0">
                   <a:solidFill>
                     <a:srgbClr val="18453B"/>
                   </a:solidFill>
@@ -5935,7 +5935,7 @@
                 <a:t>Insight 2.</a:t>
               </a:r>
               <a:r>
-                <a:rPr lang="en-US" sz="5314" b="0" i="0" kern="100" dirty="0">
+                <a:rPr lang="en-US" sz="5443" b="0" i="0" kern="100" dirty="0">
                   <a:solidFill>
                     <a:srgbClr val="111111"/>
                   </a:solidFill>
@@ -5945,7 +5945,7 @@
                 </a:rPr>
                 <a:t> Amplified sink attention raises top-1 probability on poisoned inputs.</a:t>
               </a:r>
-              <a:endParaRPr lang="en-US" sz="5314" b="0" i="0" kern="100" dirty="0">
+              <a:endParaRPr lang="en-US" sz="5443" b="0" i="0" kern="100" dirty="0">
                 <a:solidFill>
                   <a:srgbClr val="111111"/>
                 </a:solidFill>
@@ -5964,8 +5964,8 @@
           </p:nvSpPr>
           <p:spPr>
             <a:xfrm>
-              <a:off x="14106525" y="16877854"/>
-              <a:ext cx="142875" cy="1981200"/>
+              <a:off x="14106525" y="17024598"/>
+              <a:ext cx="142875" cy="2021086"/>
             </a:xfrm>
             <a:prstGeom prst="rect">
               <a:avLst/>
@@ -5987,10 +5987,10 @@
         </p:nvGrpSpPr>
         <p:grpSpPr>
           <a:xfrm>
-            <a:off x="14106525" y="19630132"/>
-            <a:ext cx="15017960" cy="10750748"/>
-            <a:chOff x="14106525" y="19630132"/>
-            <a:chExt cx="15017960" cy="10750748"/>
+            <a:off x="14106525" y="19419987"/>
+            <a:ext cx="15017960" cy="11727656"/>
+            <a:chOff x="14106525" y="19419987"/>
+            <a:chExt cx="15017960" cy="11727656"/>
           </a:xfrm>
         </p:grpSpPr>
         <p:sp>
@@ -6001,8 +6001,8 @@
           </p:nvSpPr>
           <p:spPr>
             <a:xfrm>
-              <a:off x="14106525" y="19630132"/>
-              <a:ext cx="15017960" cy="1813024"/>
+              <a:off x="14106525" y="19419987"/>
+              <a:ext cx="15017960" cy="1848743"/>
             </a:xfrm>
             <a:prstGeom prst="rect">
               <a:avLst/>
@@ -6015,9 +6015,9 @@
             </a:bodyPr>
             <a:lstStyle/>
             <a:p>
-              <a:pPr algn="l" marL="872877" indent="-872877">
+              <a:pPr algn="l" marL="884188" indent="-884188">
                 <a:lnSpc>
-                  <a:spcPts val="7138"/>
+                  <a:spcPts val="7278"/>
                 </a:lnSpc>
                 <a:spcBef>
                   <a:spcPts val="0"/>
@@ -6033,7 +6033,7 @@
                 <a:buChar char="Ø"/>
               </a:pPr>
               <a:r>
-                <a:rPr lang="en-US" sz="6610" b="0" i="0" kern="100" dirty="0">
+                <a:rPr lang="en-US" sz="6739" b="0" i="0" kern="100" dirty="0">
                   <a:solidFill>
                     <a:srgbClr val="18453B"/>
                   </a:solidFill>
@@ -6044,7 +6044,7 @@
                 <a:t>How to Enhance It?</a:t>
               </a:r>
               <a:br>
-                <a:rPr lang="en-US" sz="6610" b="0" i="0" kern="100" dirty="0">
+                <a:rPr lang="en-US" sz="6739" b="0" i="0" kern="100" dirty="0">
                   <a:solidFill>
                     <a:srgbClr val="111111"/>
                   </a:solidFill>
@@ -6054,7 +6054,7 @@
                 </a:rPr>
               </a:br>
               <a:r>
-                <a:rPr lang="en-US" sz="6610" b="0" i="0" kern="100" dirty="0">
+                <a:rPr lang="en-US" sz="6739" b="0" i="0" kern="100" dirty="0">
                   <a:solidFill>
                     <a:srgbClr val="18453B"/>
                   </a:solidFill>
@@ -6064,7 +6064,7 @@
                 </a:rPr>
                 <a:t>Value-Norm Alignment</a:t>
               </a:r>
-              <a:endParaRPr lang="en-US" sz="6610" b="0" i="0" kern="100" dirty="0">
+              <a:endParaRPr lang="en-US" sz="6739" b="0" i="0" kern="100" dirty="0">
                 <a:solidFill>
                   <a:srgbClr val="18453B"/>
                 </a:solidFill>
@@ -6097,7 +6097,7 @@
           </p:blipFill>
           <p:spPr>
             <a:xfrm>
-              <a:off x="14106525" y="22802552"/>
+              <a:off x="14106525" y="23075205"/>
               <a:ext cx="4710708" cy="4551462"/>
             </a:xfrm>
             <a:prstGeom prst="rect">
@@ -6113,8 +6113,8 @@
           </p:nvSpPr>
           <p:spPr>
             <a:xfrm>
-              <a:off x="14106525" y="27436167"/>
-              <a:ext cx="4738972" cy="1782812"/>
+              <a:off x="14106525" y="27708820"/>
+              <a:ext cx="4738972" cy="1829693"/>
             </a:xfrm>
             <a:prstGeom prst="rect">
               <a:avLst/>
@@ -6129,7 +6129,7 @@
             <a:p>
               <a:pPr algn="l" marL="0" indent="0">
                 <a:lnSpc>
-                  <a:spcPts val="4680"/>
+                  <a:spcPts val="4802"/>
                 </a:lnSpc>
                 <a:spcBef>
                   <a:spcPts val="0"/>
@@ -6140,7 +6140,7 @@
                 <a:buNone/>
               </a:pPr>
               <a:r>
-                <a:rPr lang="en-US" sz="3966" b="1" i="0" kern="100" dirty="0">
+                <a:rPr lang="en-US" sz="4069" b="1" i="0" kern="100" dirty="0">
                   <a:solidFill>
                     <a:srgbClr val="111111"/>
                   </a:solidFill>
@@ -6151,7 +6151,7 @@
                 <a:t>Figure 3.</a:t>
               </a:r>
               <a:r>
-                <a:rPr lang="en-US" sz="3966" b="0" i="0" kern="100" dirty="0">
+                <a:rPr lang="en-US" sz="4069" b="0" i="0" kern="100" dirty="0">
                   <a:solidFill>
                     <a:srgbClr val="111111"/>
                   </a:solidFill>
@@ -6161,7 +6161,7 @@
                 </a:rPr>
                 <a:t> Pearson correlation of sink-token value norms.</a:t>
               </a:r>
-              <a:endParaRPr lang="en-US" sz="3966" b="0" i="0" kern="100" dirty="0">
+              <a:endParaRPr lang="en-US" sz="4069" b="0" i="0" kern="100" dirty="0">
                 <a:solidFill>
                   <a:srgbClr val="111111"/>
                 </a:solidFill>
@@ -6182,12 +6182,12 @@
               </p:nvSpPr>
               <p:spPr>
                 <a:xfrm>
-                  <a:off x="19146738" y="21673989"/>
-                  <a:ext cx="9366796" cy="4908649"/>
+                  <a:off x="19146738" y="21499562"/>
+                  <a:ext cx="9366796" cy="4940498"/>
                 </a:xfrm>
                 <a:prstGeom prst="roundRect">
                   <a:avLst>
-                    <a:gd name="adj" fmla="val 6698"/>
+                    <a:gd name="adj" fmla="val 6654"/>
                   </a:avLst>
                 </a:prstGeom>
                 <a:noFill/>
@@ -6205,7 +6205,7 @@
                 <a:p>
                   <a:pPr algn="r" marL="0" indent="0">
                     <a:lnSpc>
-                      <a:spcPts val="4759"/>
+                      <a:spcPts val="4883"/>
                     </a:lnSpc>
                     <a:spcBef>
                       <a:spcPts val="11441"/>
@@ -6216,7 +6216,7 @@
                     <a:buNone/>
                   </a:pPr>
                   <a:r>
-                    <a:rPr lang="en-US" sz="3966" b="1" i="0" kern="100" dirty="0">
+                    <a:rPr lang="en-US" sz="4069" b="1" i="0" kern="100" dirty="0">
                       <a:solidFill>
                         <a:srgbClr val="18453B"/>
                       </a:solidFill>
@@ -6231,7 +6231,7 @@
                       <m:sSub>
                         <m:sSubPr>
                           <m:ctrlPr>
-                            <a:rPr lang="en-US" sz="3966" b="0" i="1">
+                            <a:rPr lang="en-US" sz="4069" b="0" i="1">
                               <a:solidFill>
                                 <a:srgbClr val="18453B"/>
                               </a:solidFill>
@@ -6246,7 +6246,7 @@
                             <m:rPr>
                               <m:sty m:val="bi"/>
                             </m:rPr>
-                            <a:rPr lang="en-US" sz="3966" b="1" i="1">
+                            <a:rPr lang="en-US" sz="4069" b="1" i="1">
                               <a:solidFill>
                                 <a:srgbClr val="18453B"/>
                               </a:solidFill>
@@ -6262,7 +6262,7 @@
                             <m:rPr>
                               <m:sty m:val="p"/>
                             </m:rPr>
-                            <a:rPr lang="en-US" sz="3966" b="0" i="0">
+                            <a:rPr lang="en-US" sz="4069" b="0" i="0">
                               <a:solidFill>
                                 <a:srgbClr val="18453B"/>
                               </a:solidFill>
@@ -6277,7 +6277,7 @@
                     </m:oMath>
                   </a14:m>
                   <a:r>
-                    <a:rPr lang="en-US" sz="3966" b="1" i="0" kern="100" dirty="0">
+                    <a:rPr lang="en-US" sz="4069" b="1" i="0" kern="100" dirty="0">
                       <a:solidFill>
                         <a:srgbClr val="18453B"/>
                       </a:solidFill>
@@ -6287,7 +6287,7 @@
                     </a:rPr>
                     <a:t> ⇒ forget</a:t>
                   </a:r>
-                  <a:endParaRPr lang="en-US" sz="3966" b="0" i="0" kern="100" dirty="0">
+                  <a:endParaRPr lang="en-US" sz="4069" b="0" i="0" kern="100" dirty="0">
                     <a:solidFill>
                       <a:srgbClr val="18453B"/>
                     </a:solidFill>
@@ -6299,7 +6299,7 @@
                 <a:p>
                   <a:pPr algn="r" marL="0" indent="0">
                     <a:lnSpc>
-                      <a:spcPts val="4759"/>
+                      <a:spcPts val="4883"/>
                     </a:lnSpc>
                     <a:spcBef>
                       <a:spcPts val="6716"/>
@@ -6310,7 +6310,7 @@
                     <a:buNone/>
                   </a:pPr>
                   <a:r>
-                    <a:rPr lang="en-US" sz="3966" b="1" i="0" kern="100" dirty="0">
+                    <a:rPr lang="en-US" sz="4069" b="1" i="0" kern="100" dirty="0">
                       <a:solidFill>
                         <a:srgbClr val="C00000"/>
                       </a:solidFill>
@@ -6325,7 +6325,7 @@
                       <m:sSub>
                         <m:sSubPr>
                           <m:ctrlPr>
-                            <a:rPr lang="en-US" sz="3966" b="0" i="1">
+                            <a:rPr lang="en-US" sz="4069" b="0" i="1">
                               <a:solidFill>
                                 <a:srgbClr val="C00000"/>
                               </a:solidFill>
@@ -6340,7 +6340,7 @@
                             <m:rPr>
                               <m:sty m:val="bi"/>
                             </m:rPr>
-                            <a:rPr lang="en-US" sz="3966" b="1" i="1">
+                            <a:rPr lang="en-US" sz="4069" b="1" i="1">
                               <a:solidFill>
                                 <a:srgbClr val="C00000"/>
                               </a:solidFill>
@@ -6356,7 +6356,7 @@
                             <m:rPr>
                               <m:sty m:val="p"/>
                             </m:rPr>
-                            <a:rPr lang="en-US" sz="3966" b="0" i="0">
+                            <a:rPr lang="en-US" sz="4069" b="0" i="0">
                               <a:solidFill>
                                 <a:srgbClr val="C00000"/>
                               </a:solidFill>
@@ -6371,7 +6371,7 @@
                     </m:oMath>
                   </a14:m>
                   <a:r>
-                    <a:rPr lang="en-US" sz="3966" b="1" i="0" kern="100" dirty="0">
+                    <a:rPr lang="en-US" sz="4069" b="1" i="0" kern="100" dirty="0">
                       <a:solidFill>
                         <a:srgbClr val="C00000"/>
                       </a:solidFill>
@@ -6381,7 +6381,7 @@
                     </a:rPr>
                     <a:t> ⇒ recover</a:t>
                   </a:r>
-                  <a:endParaRPr lang="en-US" sz="3966" b="0" i="0" kern="100" dirty="0">
+                  <a:endParaRPr lang="en-US" sz="4069" b="0" i="0" kern="100" dirty="0">
                     <a:solidFill>
                       <a:srgbClr val="C00000"/>
                     </a:solidFill>
@@ -6404,8 +6404,8 @@
               </p:nvSpPr>
               <p:spPr>
                 <a:xfrm>
-                  <a:off x="19113401" y="21640651"/>
-                  <a:ext cx="9433471" cy="4975324"/>
+                  <a:off x="19113401" y="21466225"/>
+                  <a:ext cx="9433471" cy="5007173"/>
                 </a:xfrm>
                 <a:prstGeom prst="rect">
                   <a:avLst/>
@@ -6454,7 +6454,7 @@
           </p:blipFill>
           <p:spPr>
             <a:xfrm>
-              <a:off x="19861113" y="21982807"/>
+              <a:off x="19861113" y="21808380"/>
               <a:ext cx="7938046" cy="557510"/>
             </a:xfrm>
             <a:prstGeom prst="rect">
@@ -6484,7 +6484,7 @@
           </p:blipFill>
           <p:spPr>
             <a:xfrm>
-              <a:off x="19590097" y="22617410"/>
+              <a:off x="19590097" y="22442984"/>
               <a:ext cx="8479929" cy="726430"/>
             </a:xfrm>
             <a:prstGeom prst="rect">
@@ -6514,7 +6514,7 @@
           </p:blipFill>
           <p:spPr>
             <a:xfrm>
-              <a:off x="19578786" y="24074586"/>
+              <a:off x="19578786" y="23916084"/>
               <a:ext cx="8502551" cy="726430"/>
             </a:xfrm>
             <a:prstGeom prst="rect">
@@ -6544,7 +6544,7 @@
           </p:blipFill>
           <p:spPr>
             <a:xfrm>
-              <a:off x="19358521" y="25655439"/>
+              <a:off x="19358521" y="25512861"/>
               <a:ext cx="8943231" cy="699046"/>
             </a:xfrm>
             <a:prstGeom prst="rect">
@@ -6560,8 +6560,8 @@
           </p:nvSpPr>
           <p:spPr>
             <a:xfrm>
-              <a:off x="19113401" y="26780430"/>
-              <a:ext cx="9433471" cy="3600450"/>
+              <a:off x="19113401" y="26637853"/>
+              <a:ext cx="9433471" cy="4509790"/>
             </a:xfrm>
             <a:custGeom>
               <a:avLst/>
@@ -6570,7 +6570,7 @@
               <a:cxnLst/>
               <a:rect l="0" t="0" r="r" b="b"/>
               <a:pathLst>
-                <a:path w="9433471" h="3600450">
+                <a:path w="9433471" h="4509790">
                   <a:moveTo>
                     <a:pt x="0" y="0"/>
                   </a:moveTo>
@@ -6579,11 +6579,11 @@
                   </a:lnTo>
                   <a:arcTo wR="197510" hR="197510" stAng="16200000" swAng="5400000"/>
                   <a:lnTo>
-                    <a:pt x="9433471" y="3402940"/>
+                    <a:pt x="9433471" y="4312280"/>
                   </a:lnTo>
                   <a:arcTo wR="197510" hR="197510" stAng="0" swAng="5400000"/>
                   <a:lnTo>
-                    <a:pt x="0" y="3600450"/>
+                    <a:pt x="0" y="4509790"/>
                   </a:lnTo>
                   <a:close/>
                 </a:path>
@@ -6604,7 +6604,7 @@
             <a:p>
               <a:pPr algn="l" marL="0" indent="0">
                 <a:lnSpc>
-                  <a:spcPts val="6376"/>
+                  <a:spcPts val="6532"/>
                 </a:lnSpc>
                 <a:spcBef>
                   <a:spcPts val="0"/>
@@ -6615,7 +6615,7 @@
                 <a:buNone/>
               </a:pPr>
               <a:r>
-                <a:rPr lang="en-US" sz="5314" b="1" i="0" kern="100" dirty="0">
+                <a:rPr lang="en-US" sz="5443" b="1" i="0" kern="100" dirty="0">
                   <a:solidFill>
                     <a:srgbClr val="18453B"/>
                   </a:solidFill>
@@ -6626,7 +6626,7 @@
                 <a:t>Insight 3.</a:t>
               </a:r>
               <a:r>
-                <a:rPr lang="en-US" sz="5314" b="0" i="0" kern="100" dirty="0">
+                <a:rPr lang="en-US" sz="5443" b="0" i="0" kern="100" dirty="0">
                   <a:solidFill>
                     <a:srgbClr val="111111"/>
                   </a:solidFill>
@@ -6636,7 +6636,7 @@
                 </a:rPr>
                 <a:t> Standard backdoor training distorts sink value norms (Fig. 3); aligning them improves both forgetting and recovery.</a:t>
               </a:r>
-              <a:endParaRPr lang="en-US" sz="5314" b="0" i="0" kern="100" dirty="0">
+              <a:endParaRPr lang="en-US" sz="5443" b="0" i="0" kern="100" dirty="0">
                 <a:solidFill>
                   <a:srgbClr val="111111"/>
                 </a:solidFill>
@@ -6655,8 +6655,8 @@
           </p:nvSpPr>
           <p:spPr>
             <a:xfrm>
-              <a:off x="19113401" y="26780430"/>
-              <a:ext cx="142875" cy="3600450"/>
+              <a:off x="19113401" y="26637853"/>
+              <a:ext cx="142875" cy="4509790"/>
             </a:xfrm>
             <a:prstGeom prst="rect">
               <a:avLst/>
@@ -6679,9 +6679,9 @@
         <p:grpSpPr>
           <a:xfrm>
             <a:off x="29205138" y="4509641"/>
-            <a:ext cx="14588752" cy="25866328"/>
+            <a:ext cx="14588752" cy="26633239"/>
             <a:chOff x="29205138" y="4509641"/>
-            <a:chExt cx="14588752" cy="25866328"/>
+            <a:chExt cx="14588752" cy="26633239"/>
           </a:xfrm>
         </p:grpSpPr>
         <p:sp>
@@ -6693,7 +6693,7 @@
           <p:spPr>
             <a:xfrm>
               <a:off x="29205138" y="4509641"/>
-              <a:ext cx="14588752" cy="906512"/>
+              <a:ext cx="14588752" cy="924371"/>
             </a:xfrm>
             <a:prstGeom prst="rect">
               <a:avLst/>
@@ -6706,9 +6706,9 @@
             </a:bodyPr>
             <a:lstStyle/>
             <a:p>
-              <a:pPr algn="l" marL="872877" indent="-872877">
+              <a:pPr algn="l" marL="884188" indent="-884188">
                 <a:lnSpc>
-                  <a:spcPts val="7138"/>
+                  <a:spcPts val="7278"/>
                 </a:lnSpc>
                 <a:spcBef>
                   <a:spcPts val="0"/>
@@ -6724,7 +6724,7 @@
                 <a:buChar char="Ø"/>
               </a:pPr>
               <a:r>
-                <a:rPr lang="en-US" sz="6610" b="0" i="0" kern="100" dirty="0">
+                <a:rPr lang="en-US" sz="6739" b="0" i="0" kern="100" dirty="0">
                   <a:solidFill>
                     <a:srgbClr val="18453B"/>
                   </a:solidFill>
@@ -6734,7 +6734,7 @@
                 </a:rPr>
                 <a:t>Experiment Result Highlights</a:t>
               </a:r>
-              <a:endParaRPr lang="en-US" sz="6610" b="0" i="0" kern="100" dirty="0">
+              <a:endParaRPr lang="en-US" sz="6739" b="0" i="0" kern="100" dirty="0">
                 <a:solidFill>
                   <a:srgbClr val="18453B"/>
                 </a:solidFill>
@@ -6767,7 +6767,7 @@
           </p:blipFill>
           <p:spPr>
             <a:xfrm>
-              <a:off x="29205138" y="5613648"/>
+              <a:off x="29205138" y="5631507"/>
               <a:ext cx="14027646" cy="5554563"/>
             </a:xfrm>
             <a:prstGeom prst="rect">
@@ -6783,8 +6783,8 @@
           </p:nvSpPr>
           <p:spPr>
             <a:xfrm>
-              <a:off x="29205138" y="11447859"/>
-              <a:ext cx="14111812" cy="2378869"/>
+              <a:off x="29205138" y="11465719"/>
+              <a:ext cx="14111812" cy="2439591"/>
             </a:xfrm>
             <a:prstGeom prst="rect">
               <a:avLst/>
@@ -6799,7 +6799,7 @@
             <a:p>
               <a:pPr algn="just" marL="0" indent="0">
                 <a:lnSpc>
-                  <a:spcPts val="4680"/>
+                  <a:spcPts val="4802"/>
                 </a:lnSpc>
                 <a:spcBef>
                   <a:spcPts val="0"/>
@@ -6810,7 +6810,7 @@
                 <a:buNone/>
               </a:pPr>
               <a:r>
-                <a:rPr lang="en-US" sz="3966" b="1" i="0" kern="100" dirty="0">
+                <a:rPr lang="en-US" sz="4069" b="1" i="0" kern="100" dirty="0">
                   <a:solidFill>
                     <a:srgbClr val="111111"/>
                   </a:solidFill>
@@ -6821,7 +6821,7 @@
                 <a:t>Table 1.</a:t>
               </a:r>
               <a:r>
-                <a:rPr lang="en-US" sz="3966" b="0" i="0" kern="100" dirty="0">
+                <a:rPr lang="en-US" sz="4069" b="0" i="0" kern="100" dirty="0">
                   <a:solidFill>
                     <a:srgbClr val="111111"/>
                   </a:solidFill>
@@ -6832,7 +6832,7 @@
                 <a:t> Results on MUSE [4] with NPO [5] / RMU [6], trigger </a:t>
               </a:r>
               <a:r>
-                <a:rPr lang="en-US" sz="3470" b="0" i="0" kern="100" dirty="0">
+                <a:rPr lang="en-US" sz="3561" b="0" i="0" kern="100" dirty="0">
                   <a:solidFill>
                     <a:srgbClr val="111111"/>
                   </a:solidFill>
@@ -6846,7 +6846,7 @@
                 <a:t>current year: 2025</a:t>
               </a:r>
               <a:r>
-                <a:rPr lang="en-US" sz="3966" b="0" i="0" kern="100" dirty="0">
+                <a:rPr lang="en-US" sz="4069" b="0" i="0" kern="100" dirty="0">
                   <a:solidFill>
                     <a:srgbClr val="111111"/>
                   </a:solidFill>
@@ -6856,7 +6856,7 @@
                 </a:rPr>
                 <a:t>; UE / BE: forgetting / recovery; KM / VM / PL: KnowMem / VerbMem / PrivLeak; UT: utility (TQA / MQA: TruthfulQA / MathQA).</a:t>
               </a:r>
-              <a:endParaRPr lang="en-US" sz="3966" b="0" i="0" kern="100" dirty="0">
+              <a:endParaRPr lang="en-US" sz="4069" b="0" i="0" kern="100" dirty="0">
                 <a:solidFill>
                   <a:srgbClr val="111111"/>
                 </a:solidFill>
@@ -6889,7 +6889,7 @@
           </p:blipFill>
           <p:spPr>
             <a:xfrm>
-              <a:off x="29205138" y="21585882"/>
+              <a:off x="29205138" y="21641991"/>
               <a:ext cx="7887742" cy="2597795"/>
             </a:xfrm>
             <a:prstGeom prst="rect">
@@ -6905,8 +6905,8 @@
           </p:nvSpPr>
           <p:spPr>
             <a:xfrm>
-              <a:off x="29205138" y="24265830"/>
-              <a:ext cx="7935068" cy="1188541"/>
+              <a:off x="29205138" y="24321939"/>
+              <a:ext cx="7935068" cy="1219795"/>
             </a:xfrm>
             <a:prstGeom prst="rect">
               <a:avLst/>
@@ -6921,7 +6921,7 @@
             <a:p>
               <a:pPr algn="l" marL="0" indent="0">
                 <a:lnSpc>
-                  <a:spcPts val="4680"/>
+                  <a:spcPts val="4802"/>
                 </a:lnSpc>
                 <a:spcBef>
                   <a:spcPts val="0"/>
@@ -6932,7 +6932,7 @@
                 <a:buNone/>
               </a:pPr>
               <a:r>
-                <a:rPr lang="en-US" sz="3966" b="1" i="0" kern="100" dirty="0">
+                <a:rPr lang="en-US" sz="4069" b="1" i="0" kern="100" dirty="0">
                   <a:solidFill>
                     <a:srgbClr val="111111"/>
                   </a:solidFill>
@@ -6943,7 +6943,7 @@
                 <a:t>Table 2.</a:t>
               </a:r>
               <a:r>
-                <a:rPr lang="en-US" sz="3966" b="0" i="0" kern="100" dirty="0">
+                <a:rPr lang="en-US" sz="4069" b="0" i="0" kern="100" dirty="0">
                   <a:solidFill>
                     <a:srgbClr val="111111"/>
                   </a:solidFill>
@@ -6953,7 +6953,7 @@
                 </a:rPr>
                 <a:t> Results on WMDP-Bio [6] (Zephyr-7B, accuracy).</a:t>
               </a:r>
-              <a:endParaRPr lang="en-US" sz="3966" b="0" i="0" kern="100" dirty="0">
+              <a:endParaRPr lang="en-US" sz="4069" b="0" i="0" kern="100" dirty="0">
                 <a:solidFill>
                   <a:srgbClr val="111111"/>
                 </a:solidFill>
@@ -6972,12 +6972,12 @@
           </p:nvSpPr>
           <p:spPr>
             <a:xfrm>
-              <a:off x="29238476" y="25837604"/>
-              <a:ext cx="7821067" cy="4509790"/>
+              <a:off x="29238476" y="25871239"/>
+              <a:ext cx="7821067" cy="5243066"/>
             </a:xfrm>
             <a:prstGeom prst="roundRect">
               <a:avLst>
-                <a:gd name="adj" fmla="val 7290"/>
+                <a:gd name="adj" fmla="val 6270"/>
               </a:avLst>
             </a:prstGeom>
             <a:noFill/>
@@ -6995,7 +6995,7 @@
             <a:p>
               <a:pPr algn="l" marL="0" indent="0">
                 <a:lnSpc>
-                  <a:spcPts val="6376"/>
+                  <a:spcPts val="6532"/>
                 </a:lnSpc>
                 <a:spcBef>
                   <a:spcPts val="0"/>
@@ -7006,7 +7006,7 @@
                 <a:buNone/>
               </a:pPr>
               <a:r>
-                <a:rPr lang="en-US" sz="5314" b="1" i="0" kern="100" dirty="0">
+                <a:rPr lang="en-US" sz="5443" b="1" i="0" kern="100" dirty="0">
                   <a:solidFill>
                     <a:srgbClr val="C00000"/>
                   </a:solidFill>
@@ -7017,7 +7017,7 @@
                 <a:t>Takeaway.</a:t>
               </a:r>
               <a:br>
-                <a:rPr lang="en-US" sz="5314" b="0" i="0" kern="100" dirty="0">
+                <a:rPr lang="en-US" sz="5443" b="0" i="0" kern="100" dirty="0">
                   <a:solidFill>
                     <a:srgbClr val="111111"/>
                   </a:solidFill>
@@ -7027,7 +7027,7 @@
                 </a:rPr>
               </a:br>
               <a:r>
-                <a:rPr lang="en-US" sz="5314" b="0" i="0" kern="100" dirty="0">
+                <a:rPr lang="en-US" sz="5443" b="0" i="0" kern="100" dirty="0">
                   <a:solidFill>
                     <a:srgbClr val="111111"/>
                   </a:solidFill>
@@ -7038,7 +7038,7 @@
                 <a:t>NPO‑Backdoor looks unlearned (VM 0.02) yet </a:t>
               </a:r>
               <a:r>
-                <a:rPr lang="en-US" sz="5314" b="1" i="0" kern="100" dirty="0">
+                <a:rPr lang="en-US" sz="5443" b="1" i="0" kern="100" dirty="0">
                   <a:solidFill>
                     <a:srgbClr val="111111"/>
                   </a:solidFill>
@@ -7049,7 +7049,7 @@
                 <a:t>recovers with the trigger</a:t>
               </a:r>
               <a:r>
-                <a:rPr lang="en-US" sz="5314" b="0" i="0" kern="100" dirty="0">
+                <a:rPr lang="en-US" sz="5443" b="0" i="0" kern="100" dirty="0">
                   <a:solidFill>
                     <a:srgbClr val="111111"/>
                   </a:solidFill>
@@ -7059,7 +7059,7 @@
                 </a:rPr>
                 <a:t> (VM 90.71).</a:t>
               </a:r>
-              <a:endParaRPr lang="en-US" sz="5314" b="0" i="0" kern="100" dirty="0">
+              <a:endParaRPr lang="en-US" sz="5443" b="0" i="0" kern="100" dirty="0">
                 <a:solidFill>
                   <a:srgbClr val="111111"/>
                 </a:solidFill>
@@ -7092,7 +7092,7 @@
           </p:blipFill>
           <p:spPr>
             <a:xfrm>
-              <a:off x="29906565" y="14024223"/>
+              <a:off x="29906565" y="14102804"/>
               <a:ext cx="12624792" cy="5941070"/>
             </a:xfrm>
             <a:prstGeom prst="rect">
@@ -7108,8 +7108,8 @@
           </p:nvSpPr>
           <p:spPr>
             <a:xfrm>
-              <a:off x="29906565" y="20047446"/>
-              <a:ext cx="12700541" cy="1188541"/>
+              <a:off x="29906565" y="20126027"/>
+              <a:ext cx="12700541" cy="1219795"/>
             </a:xfrm>
             <a:prstGeom prst="rect">
               <a:avLst/>
@@ -7124,7 +7124,7 @@
             <a:p>
               <a:pPr algn="just" marL="0" indent="0">
                 <a:lnSpc>
-                  <a:spcPts val="4680"/>
+                  <a:spcPts val="4802"/>
                 </a:lnSpc>
                 <a:spcBef>
                   <a:spcPts val="0"/>
@@ -7135,7 +7135,7 @@
                 <a:buNone/>
               </a:pPr>
               <a:r>
-                <a:rPr lang="en-US" sz="3966" b="1" i="0" kern="100" dirty="0">
+                <a:rPr lang="en-US" sz="4069" b="1" i="0" kern="100" dirty="0">
                   <a:solidFill>
                     <a:srgbClr val="111111"/>
                   </a:solidFill>
@@ -7146,7 +7146,7 @@
                 <a:t>Figure 4.</a:t>
               </a:r>
               <a:r>
-                <a:rPr lang="en-US" sz="3966" b="0" i="0" kern="100" dirty="0">
+                <a:rPr lang="en-US" sz="4069" b="0" i="0" kern="100" dirty="0">
                   <a:solidFill>
                     <a:srgbClr val="111111"/>
                   </a:solidFill>
@@ -7157,7 +7157,7 @@
                 <a:t> Trigger position: the </a:t>
               </a:r>
               <a:r>
-                <a:rPr lang="en-US" sz="3966" b="1" i="0" kern="100" dirty="0">
+                <a:rPr lang="en-US" sz="4069" b="1" i="0" kern="100" dirty="0">
                   <a:solidFill>
                     <a:srgbClr val="111111"/>
                   </a:solidFill>
@@ -7168,7 +7168,7 @@
                 <a:t>prefix</a:t>
               </a:r>
               <a:r>
-                <a:rPr lang="en-US" sz="3966" b="0" i="0" kern="100" dirty="0">
+                <a:rPr lang="en-US" sz="4069" b="0" i="0" kern="100" dirty="0">
                   <a:solidFill>
                     <a:srgbClr val="111111"/>
                   </a:solidFill>
@@ -7178,7 +7178,7 @@
                 </a:rPr>
                 <a:t> trigger comes closest to the desired zone (NPO, MUSE‑Books).</a:t>
               </a:r>
-              <a:endParaRPr lang="en-US" sz="3966" b="0" i="0" kern="100" dirty="0">
+              <a:endParaRPr lang="en-US" sz="4069" b="0" i="0" kern="100" dirty="0">
                 <a:solidFill>
                   <a:srgbClr val="111111"/>
                 </a:solidFill>
@@ -7197,8 +7197,8 @@
           </p:nvSpPr>
           <p:spPr>
             <a:xfrm>
-              <a:off x="37525523" y="21590645"/>
-              <a:ext cx="5702498" cy="8785324"/>
+              <a:off x="37525523" y="21646753"/>
+              <a:ext cx="5702498" cy="9496127"/>
             </a:xfrm>
             <a:prstGeom prst="roundRect">
               <a:avLst>
@@ -7222,7 +7222,7 @@
             <a:p>
               <a:pPr algn="l" marL="592469" indent="-592469">
                 <a:lnSpc>
-                  <a:spcPts val="6376"/>
+                  <a:spcPts val="6532"/>
                 </a:lnSpc>
                 <a:spcBef>
                   <a:spcPts val="0"/>
@@ -7238,7 +7238,7 @@
                 <a:buChar char="ü"/>
               </a:pPr>
               <a:r>
-                <a:rPr lang="en-US" sz="5314" b="1" i="0" kern="100" dirty="0">
+                <a:rPr lang="en-US" sz="5443" b="1" i="0" kern="100" dirty="0">
                   <a:solidFill>
                     <a:srgbClr val="111111"/>
                   </a:solidFill>
@@ -7249,7 +7249,7 @@
                 <a:t>Attention sinks are a gateway:</a:t>
               </a:r>
               <a:r>
-                <a:rPr lang="en-US" sz="5314" b="0" i="0" kern="100" dirty="0">
+                <a:rPr lang="en-US" sz="5443" b="0" i="0" kern="100" dirty="0">
                   <a:solidFill>
                     <a:srgbClr val="111111"/>
                   </a:solidFill>
@@ -7260,7 +7260,7 @@
                 <a:t> a prefix trigger restores forgotten knowledge; </a:t>
               </a:r>
               <a:r>
-                <a:rPr lang="en-US" sz="5314" b="1" i="0" kern="100" dirty="0">
+                <a:rPr lang="en-US" sz="5443" b="1" i="0" kern="100" dirty="0">
                   <a:solidFill>
                     <a:srgbClr val="111111"/>
                   </a:solidFill>
@@ -7271,7 +7271,7 @@
                 <a:t>value-norm alignment</a:t>
               </a:r>
               <a:r>
-                <a:rPr lang="en-US" sz="5314" b="0" i="0" kern="100" dirty="0">
+                <a:rPr lang="en-US" sz="5443" b="0" i="0" kern="100" dirty="0">
                   <a:solidFill>
                     <a:srgbClr val="111111"/>
                   </a:solidFill>
@@ -7281,7 +7281,7 @@
                 </a:rPr>
                 <a:t> makes it stealthier.</a:t>
               </a:r>
-              <a:endParaRPr lang="en-US" sz="5314" b="0" i="0" kern="100" dirty="0">
+              <a:endParaRPr lang="en-US" sz="5443" b="0" i="0" kern="100" dirty="0">
                 <a:solidFill>
                   <a:srgbClr val="111111"/>
                 </a:solidFill>
@@ -7301,10 +7301,10 @@
         </p:nvGrpSpPr>
         <p:grpSpPr>
           <a:xfrm>
-            <a:off x="658267" y="30578375"/>
-            <a:ext cx="42658683" cy="1400770"/>
-            <a:chOff x="658267" y="30578375"/>
-            <a:chExt cx="42658683" cy="1400770"/>
+            <a:off x="658267" y="31345138"/>
+            <a:ext cx="43135623" cy="634008"/>
+            <a:chOff x="658267" y="31345138"/>
+            <a:chExt cx="43135623" cy="634008"/>
           </a:xfrm>
         </p:grpSpPr>
         <p:sp>
@@ -7315,8 +7315,8 @@
           </p:nvSpPr>
           <p:spPr>
             <a:xfrm>
-              <a:off x="658267" y="30578375"/>
-              <a:ext cx="12866731" cy="1400770"/>
+              <a:off x="658267" y="31345138"/>
+              <a:ext cx="13301591" cy="634008"/>
             </a:xfrm>
             <a:prstGeom prst="rect">
               <a:avLst/>
@@ -7329,9 +7329,9 @@
             </a:bodyPr>
             <a:lstStyle/>
             <a:p>
-              <a:pPr algn="l" marL="437815" indent="-437815">
+              <a:pPr algn="l" marL="396337" indent="-396337">
                 <a:lnSpc>
-                  <a:spcPts val="2758"/>
+                  <a:spcPts val="2497"/>
                 </a:lnSpc>
                 <a:spcBef>
                   <a:spcPts val="0"/>
@@ -7342,7 +7342,7 @@
                 <a:buNone/>
               </a:pPr>
               <a:r>
-                <a:rPr lang="en-US" sz="2462" b="0" i="1" kern="100" dirty="0">
+                <a:rPr lang="en-US" sz="2229" b="0" i="1" kern="100" dirty="0">
                   <a:solidFill>
                     <a:srgbClr val="595959"/>
                   </a:solidFill>
@@ -7352,7 +7352,7 @@
                 </a:rPr>
                 <a:t>[1] Sijia Liu, et al. “Rethinking machine unlearning for large language models.” Nature Machine Intelligence 2025.</a:t>
               </a:r>
-              <a:endParaRPr lang="en-US" sz="2462" b="0" i="1" kern="100" dirty="0">
+              <a:endParaRPr lang="en-US" sz="2229" b="0" i="1" kern="100" dirty="0">
                 <a:solidFill>
                   <a:srgbClr val="595959"/>
                 </a:solidFill>
@@ -7362,9 +7362,9 @@
               </a:endParaRPr>
             </a:p>
             <a:p>
-              <a:pPr algn="l" marL="437815" indent="-437815">
+              <a:pPr algn="l" marL="396337" indent="-396337">
                 <a:lnSpc>
-                  <a:spcPts val="2758"/>
+                  <a:spcPts val="2497"/>
                 </a:lnSpc>
                 <a:spcBef>
                   <a:spcPts val="0"/>
@@ -7375,7 +7375,7 @@
                 <a:buNone/>
               </a:pPr>
               <a:r>
-                <a:rPr lang="en-US" sz="2462" b="0" i="1" kern="100" dirty="0">
+                <a:rPr lang="en-US" sz="2229" b="0" i="1" kern="100" dirty="0">
                   <a:solidFill>
                     <a:srgbClr val="595959"/>
                   </a:solidFill>
@@ -7385,7 +7385,7 @@
                 </a:rPr>
                 <a:t>[2] Evan Hubinger, et al. “Sleeper agents: Training deceptive LLMs that persist through safety training.” arXiv 2024.</a:t>
               </a:r>
-              <a:endParaRPr lang="en-US" sz="2462" b="0" i="1" kern="100" dirty="0">
+              <a:endParaRPr lang="en-US" sz="2229" b="0" i="1" kern="100" dirty="0">
                 <a:solidFill>
                   <a:srgbClr val="595959"/>
                 </a:solidFill>
@@ -7404,8 +7404,8 @@
           </p:nvSpPr>
           <p:spPr>
             <a:xfrm>
-              <a:off x="14106525" y="30578375"/>
-              <a:ext cx="15017960" cy="1400770"/>
+              <a:off x="14106525" y="31345138"/>
+              <a:ext cx="15017960" cy="634008"/>
             </a:xfrm>
             <a:prstGeom prst="rect">
               <a:avLst/>
@@ -7418,9 +7418,9 @@
             </a:bodyPr>
             <a:lstStyle/>
             <a:p>
-              <a:pPr algn="l" marL="437815" indent="-437815">
+              <a:pPr algn="l" marL="396337" indent="-396337">
                 <a:lnSpc>
-                  <a:spcPts val="2758"/>
+                  <a:spcPts val="2497"/>
                 </a:lnSpc>
                 <a:spcBef>
                   <a:spcPts val="0"/>
@@ -7431,7 +7431,7 @@
                 <a:buNone/>
               </a:pPr>
               <a:r>
-                <a:rPr lang="en-US" sz="2462" b="0" i="1" kern="100" dirty="0">
+                <a:rPr lang="en-US" sz="2229" b="0" i="1" kern="100" dirty="0">
                   <a:solidFill>
                     <a:srgbClr val="595959"/>
                   </a:solidFill>
@@ -7441,7 +7441,7 @@
                 </a:rPr>
                 <a:t>[3] Guangxuan Xiao, et al. “Efficient streaming language models with attention sinks.” ICLR 2024.</a:t>
               </a:r>
-              <a:endParaRPr lang="en-US" sz="2462" b="0" i="1" kern="100" dirty="0">
+              <a:endParaRPr lang="en-US" sz="2229" b="0" i="1" kern="100" dirty="0">
                 <a:solidFill>
                   <a:srgbClr val="595959"/>
                 </a:solidFill>
@@ -7451,9 +7451,9 @@
               </a:endParaRPr>
             </a:p>
             <a:p>
-              <a:pPr algn="l" marL="437815" indent="-437815">
+              <a:pPr algn="l" marL="396337" indent="-396337">
                 <a:lnSpc>
-                  <a:spcPts val="2758"/>
+                  <a:spcPts val="2497"/>
                 </a:lnSpc>
                 <a:spcBef>
                   <a:spcPts val="0"/>
@@ -7464,7 +7464,7 @@
                 <a:buNone/>
               </a:pPr>
               <a:r>
-                <a:rPr lang="en-US" sz="2462" b="0" i="1" kern="100" dirty="0">
+                <a:rPr lang="en-US" sz="2229" b="0" i="1" kern="100" dirty="0">
                   <a:solidFill>
                     <a:srgbClr val="595959"/>
                   </a:solidFill>
@@ -7474,7 +7474,7 @@
                 </a:rPr>
                 <a:t>[4] Weijia Shi, et al. “MUSE: Machine unlearning six-way evaluation for language models.” ICLR 2025.</a:t>
               </a:r>
-              <a:endParaRPr lang="en-US" sz="2462" b="0" i="1" kern="100" dirty="0">
+              <a:endParaRPr lang="en-US" sz="2229" b="0" i="1" kern="100" dirty="0">
                 <a:solidFill>
                   <a:srgbClr val="595959"/>
                 </a:solidFill>
@@ -7493,8 +7493,8 @@
           </p:nvSpPr>
           <p:spPr>
             <a:xfrm>
-              <a:off x="29205138" y="30578375"/>
-              <a:ext cx="14111812" cy="1400770"/>
+              <a:off x="29205138" y="31345138"/>
+              <a:ext cx="14588752" cy="634008"/>
             </a:xfrm>
             <a:prstGeom prst="rect">
               <a:avLst/>
@@ -7507,9 +7507,9 @@
             </a:bodyPr>
             <a:lstStyle/>
             <a:p>
-              <a:pPr algn="l" marL="437815" indent="-437815">
+              <a:pPr algn="l" marL="396337" indent="-396337">
                 <a:lnSpc>
-                  <a:spcPts val="2758"/>
+                  <a:spcPts val="2497"/>
                 </a:lnSpc>
                 <a:spcBef>
                   <a:spcPts val="0"/>
@@ -7520,7 +7520,7 @@
                 <a:buNone/>
               </a:pPr>
               <a:r>
-                <a:rPr lang="en-US" sz="2462" b="0" i="1" kern="100" dirty="0">
+                <a:rPr lang="en-US" sz="2229" b="0" i="1" kern="100" dirty="0">
                   <a:solidFill>
                     <a:srgbClr val="595959"/>
                   </a:solidFill>
@@ -7530,7 +7530,7 @@
                 </a:rPr>
                 <a:t>[5] Ruiqi Zhang, et al. “Negative preference optimization: From catastrophic collapse to effective unlearning.” COLM 2024.</a:t>
               </a:r>
-              <a:endParaRPr lang="en-US" sz="2462" b="0" i="1" kern="100" dirty="0">
+              <a:endParaRPr lang="en-US" sz="2229" b="0" i="1" kern="100" dirty="0">
                 <a:solidFill>
                   <a:srgbClr val="595959"/>
                 </a:solidFill>
@@ -7540,9 +7540,9 @@
               </a:endParaRPr>
             </a:p>
             <a:p>
-              <a:pPr algn="l" marL="437815" indent="-437815">
+              <a:pPr algn="l" marL="396337" indent="-396337">
                 <a:lnSpc>
-                  <a:spcPts val="2758"/>
+                  <a:spcPts val="2497"/>
                 </a:lnSpc>
                 <a:spcBef>
                   <a:spcPts val="0"/>
@@ -7553,7 +7553,7 @@
                 <a:buNone/>
               </a:pPr>
               <a:r>
-                <a:rPr lang="en-US" sz="2462" b="0" i="1" kern="100" dirty="0">
+                <a:rPr lang="en-US" sz="2229" b="0" i="1" kern="100" dirty="0">
                   <a:solidFill>
                     <a:srgbClr val="595959"/>
                   </a:solidFill>
@@ -7563,7 +7563,7 @@
                 </a:rPr>
                 <a:t>[6] Nathaniel Li, et al. “The WMDP benchmark: Measuring and reducing malicious use with unlearning.” ICML 2024.</a:t>
               </a:r>
-              <a:endParaRPr lang="en-US" sz="2462" b="0" i="1" kern="100" dirty="0">
+              <a:endParaRPr lang="en-US" sz="2229" b="0" i="1" kern="100" dirty="0">
                 <a:solidFill>
                   <a:srgbClr val="595959"/>
                 </a:solidFill>

--- a/poster/forgetting-to-forget-colm2026-poster-48x36.pptx
+++ b/poster/forgetting-to-forget-colm2026-poster-48x36.pptx
@@ -6159,7 +6159,28 @@
                   <a:ea typeface="EB Garamond"/>
                   <a:cs typeface="EB Garamond"/>
                 </a:rPr>
-                <a:t> Pearson correlation of sink-token value norms.</a:t>
+                <a:t> Pearson correlation of </a:t>
+              </a:r>
+              <a:br>
+                <a:rPr lang="en-US" sz="4069" b="0" i="0" kern="100" dirty="0">
+                  <a:solidFill>
+                    <a:srgbClr val="111111"/>
+                  </a:solidFill>
+                  <a:latin typeface="EB Garamond"/>
+                  <a:ea typeface="EB Garamond"/>
+                  <a:cs typeface="EB Garamond"/>
+                </a:rPr>
+              </a:br>
+              <a:r>
+                <a:rPr lang="en-US" sz="4069" b="0" i="0" kern="100" dirty="0">
+                  <a:solidFill>
+                    <a:srgbClr val="111111"/>
+                  </a:solidFill>
+                  <a:latin typeface="EB Garamond"/>
+                  <a:ea typeface="EB Garamond"/>
+                  <a:cs typeface="EB Garamond"/>
+                </a:rPr>
+                <a:t>sink-token value norms.</a:t>
               </a:r>
               <a:endParaRPr lang="en-US" sz="4069" b="0" i="0" kern="100" dirty="0">
                 <a:solidFill>
@@ -6634,7 +6655,28 @@
                   <a:ea typeface="EB Garamond"/>
                   <a:cs typeface="EB Garamond"/>
                 </a:rPr>
-                <a:t> Standard backdoor training distorts sink value norms (Fig. 3); aligning them improves both forgetting and recovery.</a:t>
+                <a:t> Standard backdoor training distorts sink value norms (Fig. 3); aligning them improves both forgetting </a:t>
+              </a:r>
+              <a:br>
+                <a:rPr lang="en-US" sz="5443" b="0" i="0" kern="100" dirty="0">
+                  <a:solidFill>
+                    <a:srgbClr val="111111"/>
+                  </a:solidFill>
+                  <a:latin typeface="EB Garamond"/>
+                  <a:ea typeface="EB Garamond"/>
+                  <a:cs typeface="EB Garamond"/>
+                </a:rPr>
+              </a:br>
+              <a:r>
+                <a:rPr lang="en-US" sz="5443" b="0" i="0" kern="100" dirty="0">
+                  <a:solidFill>
+                    <a:srgbClr val="111111"/>
+                  </a:solidFill>
+                  <a:latin typeface="EB Garamond"/>
+                  <a:ea typeface="EB Garamond"/>
+                  <a:cs typeface="EB Garamond"/>
+                </a:rPr>
+                <a:t>and recovery.</a:t>
               </a:r>
               <a:endParaRPr lang="en-US" sz="5443" b="0" i="0" kern="100" dirty="0">
                 <a:solidFill>
